--- a/pregrado/s13/presentacion/S13A.pptx
+++ b/pregrado/s13/presentacion/S13A.pptx
@@ -1,36 +1,39 @@
 
 <file path=ppt/presentation.xml><?xml version="1.0" encoding="utf-8"?>
-<p:presentation xmlns:a="http://schemas.openxmlformats.org/drawingml/2006/main" xmlns:r="http://schemas.openxmlformats.org/officeDocument/2006/relationships" xmlns:p="http://schemas.openxmlformats.org/presentationml/2006/main" saveSubsetFonts="1" autoCompressPictures="0">
+<p:presentation xmlns:a="http://schemas.openxmlformats.org/drawingml/2006/main" xmlns:r="http://schemas.openxmlformats.org/officeDocument/2006/relationships" xmlns:p="http://schemas.openxmlformats.org/presentationml/2006/main" embedTrueTypeFonts="1" saveSubsetFonts="1" autoCompressPictures="0">
   <p:sldMasterIdLst>
     <p:sldMasterId id="2147483648" r:id="rId1"/>
   </p:sldMasterIdLst>
   <p:sldIdLst>
     <p:sldId id="256" r:id="rId7"/>
     <p:sldId id="257" r:id="rId9"/>
-    <p:sldId id="283" r:id="rId25"/>
     <p:sldId id="258" r:id="rId10"/>
     <p:sldId id="259" r:id="rId11"/>
-    <p:sldId id="284" r:id="rId24"/>
     <p:sldId id="260" r:id="rId12"/>
     <p:sldId id="261" r:id="rId13"/>
-    <p:sldId id="288" r:id="rId30"/>
-    <p:sldId id="285" r:id="rId27"/>
     <p:sldId id="262" r:id="rId14"/>
+    <p:sldId id="263" r:id="rId15"/>
+    <p:sldId id="264" r:id="rId16"/>
     <p:sldId id="265" r:id="rId17"/>
     <p:sldId id="266" r:id="rId18"/>
-    <p:sldId id="286" r:id="rId28"/>
+    <p:sldId id="267" r:id="rId19"/>
     <p:sldId id="268" r:id="rId20"/>
     <p:sldId id="269" r:id="rId21"/>
     <p:sldId id="270" r:id="rId22"/>
-    <p:sldId id="287" r:id="rId29"/>
-    <p:sldId id="263" r:id="rId15"/>
-    <p:sldId id="264" r:id="rId16"/>
-    <p:sldId id="267" r:id="rId19"/>
     <p:sldId id="274" r:id="rId26"/>
     <p:sldId id="282" r:id="rId34"/>
   </p:sldIdLst>
   <p:sldSz cx="12192000" cy="6858000" type="screen16x9"/>
   <p:notesSz cx="6858000" cy="9144000"/>
+  <p:embeddedFontLst>
+    <p:embeddedFont>
+      <p:font typeface="Calibri"/>
+      <p:regular r:id="rId36"/>
+      <p:bold r:id="rId37"/>
+      <p:italic r:id="rId38"/>
+      <p:boldItalic r:id="rId39"/>
+    </p:embeddedFont>
+  </p:embeddedFontLst>
   <p:defaultTextStyle>
     <a:defPPr>
       <a:defRPr lang="en-US"/>
@@ -969,146 +972,6 @@
 </p:notes>
 </file>
 
-<file path=ppt/notesSlides/notesSlide17.xml><?xml version="1.0" encoding="utf-8"?>
-<p:notes xmlns:a="http://schemas.openxmlformats.org/drawingml/2006/main" xmlns:p="http://schemas.openxmlformats.org/presentationml/2006/main" xmlns:r="http://schemas.openxmlformats.org/officeDocument/2006/relationships">
-  <p:cSld>
-    <p:spTree>
-      <p:nvGrpSpPr>
-        <p:cNvPr id="1" name=""/>
-        <p:cNvGrpSpPr/>
-        <p:nvPr/>
-      </p:nvGrpSpPr>
-      <p:grpSpPr>
-        <a:xfrm>
-          <a:off x="0" y="0"/>
-          <a:ext cx="0" cy="0"/>
-          <a:chOff x="0" y="0"/>
-          <a:chExt cx="0" cy="0"/>
-        </a:xfrm>
-      </p:grpSpPr>
-      <p:sp>
-        <p:nvSpPr>
-          <p:cNvPr id="2" name="Slide Image Placeholder 1"/>
-          <p:cNvSpPr>
-            <a:spLocks noGrp="1"/>
-          </p:cNvSpPr>
-          <p:nvPr>
-            <p:ph type="sldImg" idx="2"/>
-          </p:nvPr>
-        </p:nvSpPr>
-        <p:spPr/>
-      </p:sp>
-      <p:sp>
-        <p:nvSpPr>
-          <p:cNvPr id="3" name="Notes Placeholder 2"/>
-          <p:cNvSpPr>
-            <a:spLocks noGrp="1"/>
-          </p:cNvSpPr>
-          <p:nvPr>
-            <p:ph type="body" idx="3" sz="quarter"/>
-          </p:nvPr>
-        </p:nvSpPr>
-        <p:spPr/>
-        <p:txBody>
-          <a:bodyPr/>
-          <a:lstStyle/>
-          <a:p>
-            <a:r>
-              <a:t>Divisor del capítulo 13.2. Se enuncia la pregunta tal como aparece en el sílabo, la ficha, el cuaderno y la guía: es el mismo código en todos. [Jueves, capítulo 13.2]</a:t>
-            </a:r>
-          </a:p>
-        </p:txBody>
-      </p:sp>
-      <p:sp>
-        <p:nvSpPr>
-          <p:cNvPr id="4" name="Slide Number Placeholder 3"/>
-          <p:cNvSpPr>
-            <a:spLocks noGrp="1"/>
-          </p:cNvSpPr>
-          <p:nvPr>
-            <p:ph type="sldNum" idx="5" sz="quarter"/>
-          </p:nvPr>
-        </p:nvSpPr>
-        <p:spPr/>
-      </p:sp>
-    </p:spTree>
-  </p:cSld>
-  <p:clrMapOvr>
-    <a:masterClrMapping/>
-  </p:clrMapOvr>
-</p:notes>
-</file>
-
-<file path=ppt/notesSlides/notesSlide18.xml><?xml version="1.0" encoding="utf-8"?>
-<p:notes xmlns:a="http://schemas.openxmlformats.org/drawingml/2006/main" xmlns:p="http://schemas.openxmlformats.org/presentationml/2006/main" xmlns:r="http://schemas.openxmlformats.org/officeDocument/2006/relationships">
-  <p:cSld>
-    <p:spTree>
-      <p:nvGrpSpPr>
-        <p:cNvPr id="1" name=""/>
-        <p:cNvGrpSpPr/>
-        <p:nvPr/>
-      </p:nvGrpSpPr>
-      <p:grpSpPr>
-        <a:xfrm>
-          <a:off x="0" y="0"/>
-          <a:ext cx="0" cy="0"/>
-          <a:chOff x="0" y="0"/>
-          <a:chExt cx="0" cy="0"/>
-        </a:xfrm>
-      </p:grpSpPr>
-      <p:sp>
-        <p:nvSpPr>
-          <p:cNvPr id="2" name="Slide Image Placeholder 1"/>
-          <p:cNvSpPr>
-            <a:spLocks noGrp="1"/>
-          </p:cNvSpPr>
-          <p:nvPr>
-            <p:ph type="sldImg" idx="2"/>
-          </p:nvPr>
-        </p:nvSpPr>
-        <p:spPr/>
-      </p:sp>
-      <p:sp>
-        <p:nvSpPr>
-          <p:cNvPr id="3" name="Notes Placeholder 2"/>
-          <p:cNvSpPr>
-            <a:spLocks noGrp="1"/>
-          </p:cNvSpPr>
-          <p:nvPr>
-            <p:ph type="body" idx="3" sz="quarter"/>
-          </p:nvPr>
-        </p:nvSpPr>
-        <p:spPr/>
-        <p:txBody>
-          <a:bodyPr/>
-          <a:lstStyle/>
-          <a:p>
-            <a:r>
-              <a:t>Divisor del capítulo 13.1. Se enuncia la pregunta tal como aparece en el sílabo, la ficha, el cuaderno y la guía: es el mismo código en todos. [Jueves, capítulo 13.1]</a:t>
-            </a:r>
-          </a:p>
-        </p:txBody>
-      </p:sp>
-      <p:sp>
-        <p:nvSpPr>
-          <p:cNvPr id="4" name="Slide Number Placeholder 3"/>
-          <p:cNvSpPr>
-            <a:spLocks noGrp="1"/>
-          </p:cNvSpPr>
-          <p:nvPr>
-            <p:ph type="sldNum" idx="5" sz="quarter"/>
-          </p:nvPr>
-        </p:nvSpPr>
-        <p:spPr/>
-      </p:sp>
-    </p:spTree>
-  </p:cSld>
-  <p:clrMapOvr>
-    <a:masterClrMapping/>
-  </p:clrMapOvr>
-</p:notes>
-</file>
-
 <file path=ppt/notesSlides/notesSlide19.xml><?xml version="1.0" encoding="utf-8"?>
 <p:notes xmlns:a="http://schemas.openxmlformats.org/drawingml/2006/main" xmlns:p="http://schemas.openxmlformats.org/presentationml/2006/main" xmlns:r="http://schemas.openxmlformats.org/officeDocument/2006/relationships">
   <p:cSld>
@@ -1225,286 +1088,6 @@
           <a:p>
             <a:r>
               <a:t>GUION: Mapa en cuatro actos con pulso contexto → evidencia → decisión. Acto 1: la censura y las tres piezas (S(t), h(t), H(t)). Acto 2: Kaplan-Meier y log-rank sobre Rossi. Acto 3: la réplica de Cox (1972) sobre Rossi —HR de fin/age/prio— con el diagnóstico de PH por Schoenfeld. Acto 4: el negocio (Telco) con retención y CLV por contrato, y la generalización a Veterans. La regresión logística/GLM de S09 y la causalidad de S12 se nombran como conexión; S14 (recomendación) solo al cierre. [Jueves]</a:t>
-            </a:r>
-          </a:p>
-        </p:txBody>
-      </p:sp>
-      <p:sp>
-        <p:nvSpPr>
-          <p:cNvPr id="4" name="Slide Number Placeholder 3"/>
-          <p:cNvSpPr>
-            <a:spLocks noGrp="1"/>
-          </p:cNvSpPr>
-          <p:nvPr>
-            <p:ph type="sldNum" idx="5" sz="quarter"/>
-          </p:nvPr>
-        </p:nvSpPr>
-        <p:spPr/>
-      </p:sp>
-    </p:spTree>
-  </p:cSld>
-  <p:clrMapOvr>
-    <a:masterClrMapping/>
-  </p:clrMapOvr>
-</p:notes>
-</file>
-
-<file path=ppt/notesSlides/notesSlide20.xml><?xml version="1.0" encoding="utf-8"?>
-<p:notes xmlns:a="http://schemas.openxmlformats.org/drawingml/2006/main" xmlns:p="http://schemas.openxmlformats.org/presentationml/2006/main" xmlns:r="http://schemas.openxmlformats.org/officeDocument/2006/relationships">
-  <p:cSld>
-    <p:spTree>
-      <p:nvGrpSpPr>
-        <p:cNvPr id="1" name=""/>
-        <p:cNvGrpSpPr/>
-        <p:nvPr/>
-      </p:nvGrpSpPr>
-      <p:grpSpPr>
-        <a:xfrm>
-          <a:off x="0" y="0"/>
-          <a:ext cx="0" cy="0"/>
-          <a:chOff x="0" y="0"/>
-          <a:chExt cx="0" cy="0"/>
-        </a:xfrm>
-      </p:grpSpPr>
-      <p:sp>
-        <p:nvSpPr>
-          <p:cNvPr id="2" name="Slide Image Placeholder 1"/>
-          <p:cNvSpPr>
-            <a:spLocks noGrp="1"/>
-          </p:cNvSpPr>
-          <p:nvPr>
-            <p:ph type="sldImg" idx="2"/>
-          </p:nvPr>
-        </p:nvSpPr>
-        <p:spPr/>
-      </p:sp>
-      <p:sp>
-        <p:nvSpPr>
-          <p:cNvPr id="3" name="Notes Placeholder 2"/>
-          <p:cNvSpPr>
-            <a:spLocks noGrp="1"/>
-          </p:cNvSpPr>
-          <p:nvPr>
-            <p:ph type="body" idx="3" sz="quarter"/>
-          </p:nvPr>
-        </p:nvSpPr>
-        <p:spPr/>
-        <p:txBody>
-          <a:bodyPr/>
-          <a:lstStyle/>
-          <a:p>
-            <a:r>
-              <a:t>Divisor del capítulo 13.3. Se enuncia la pregunta tal como aparece en el sílabo, la ficha, el cuaderno y la guía: es el mismo código en todos. [Jueves, capítulo 13.3]</a:t>
-            </a:r>
-          </a:p>
-        </p:txBody>
-      </p:sp>
-      <p:sp>
-        <p:nvSpPr>
-          <p:cNvPr id="4" name="Slide Number Placeholder 3"/>
-          <p:cNvSpPr>
-            <a:spLocks noGrp="1"/>
-          </p:cNvSpPr>
-          <p:nvPr>
-            <p:ph type="sldNum" idx="5" sz="quarter"/>
-          </p:nvPr>
-        </p:nvSpPr>
-        <p:spPr/>
-      </p:sp>
-    </p:spTree>
-  </p:cSld>
-  <p:clrMapOvr>
-    <a:masterClrMapping/>
-  </p:clrMapOvr>
-</p:notes>
-</file>
-
-<file path=ppt/notesSlides/notesSlide21.xml><?xml version="1.0" encoding="utf-8"?>
-<p:notes xmlns:a="http://schemas.openxmlformats.org/drawingml/2006/main" xmlns:p="http://schemas.openxmlformats.org/presentationml/2006/main" xmlns:r="http://schemas.openxmlformats.org/officeDocument/2006/relationships">
-  <p:cSld>
-    <p:spTree>
-      <p:nvGrpSpPr>
-        <p:cNvPr id="1" name=""/>
-        <p:cNvGrpSpPr/>
-        <p:nvPr/>
-      </p:nvGrpSpPr>
-      <p:grpSpPr>
-        <a:xfrm>
-          <a:off x="0" y="0"/>
-          <a:ext cx="0" cy="0"/>
-          <a:chOff x="0" y="0"/>
-          <a:chExt cx="0" cy="0"/>
-        </a:xfrm>
-      </p:grpSpPr>
-      <p:sp>
-        <p:nvSpPr>
-          <p:cNvPr id="2" name="Slide Image Placeholder 1"/>
-          <p:cNvSpPr>
-            <a:spLocks noGrp="1"/>
-          </p:cNvSpPr>
-          <p:nvPr>
-            <p:ph type="sldImg" idx="2"/>
-          </p:nvPr>
-        </p:nvSpPr>
-        <p:spPr/>
-      </p:sp>
-      <p:sp>
-        <p:nvSpPr>
-          <p:cNvPr id="3" name="Notes Placeholder 2"/>
-          <p:cNvSpPr>
-            <a:spLocks noGrp="1"/>
-          </p:cNvSpPr>
-          <p:nvPr>
-            <p:ph type="body" idx="3" sz="quarter"/>
-          </p:nvPr>
-        </p:nvSpPr>
-        <p:spPr/>
-        <p:txBody>
-          <a:bodyPr/>
-          <a:lstStyle/>
-          <a:p>
-            <a:r>
-              <a:t>Divisor del capítulo 13.4. Se enuncia la pregunta tal como aparece en el sílabo, la ficha, el cuaderno y la guía: es el mismo código en todos. [Jueves, capítulo 13.4]</a:t>
-            </a:r>
-          </a:p>
-        </p:txBody>
-      </p:sp>
-      <p:sp>
-        <p:nvSpPr>
-          <p:cNvPr id="4" name="Slide Number Placeholder 3"/>
-          <p:cNvSpPr>
-            <a:spLocks noGrp="1"/>
-          </p:cNvSpPr>
-          <p:nvPr>
-            <p:ph type="sldNum" idx="5" sz="quarter"/>
-          </p:nvPr>
-        </p:nvSpPr>
-        <p:spPr/>
-      </p:sp>
-    </p:spTree>
-  </p:cSld>
-  <p:clrMapOvr>
-    <a:masterClrMapping/>
-  </p:clrMapOvr>
-</p:notes>
-</file>
-
-<file path=ppt/notesSlides/notesSlide22.xml><?xml version="1.0" encoding="utf-8"?>
-<p:notes xmlns:a="http://schemas.openxmlformats.org/drawingml/2006/main" xmlns:p="http://schemas.openxmlformats.org/presentationml/2006/main" xmlns:r="http://schemas.openxmlformats.org/officeDocument/2006/relationships">
-  <p:cSld>
-    <p:spTree>
-      <p:nvGrpSpPr>
-        <p:cNvPr id="1" name=""/>
-        <p:cNvGrpSpPr/>
-        <p:nvPr/>
-      </p:nvGrpSpPr>
-      <p:grpSpPr>
-        <a:xfrm>
-          <a:off x="0" y="0"/>
-          <a:ext cx="0" cy="0"/>
-          <a:chOff x="0" y="0"/>
-          <a:chExt cx="0" cy="0"/>
-        </a:xfrm>
-      </p:grpSpPr>
-      <p:sp>
-        <p:nvSpPr>
-          <p:cNvPr id="2" name="Slide Image Placeholder 1"/>
-          <p:cNvSpPr>
-            <a:spLocks noGrp="1"/>
-          </p:cNvSpPr>
-          <p:nvPr>
-            <p:ph type="sldImg" idx="2"/>
-          </p:nvPr>
-        </p:nvSpPr>
-        <p:spPr/>
-      </p:sp>
-      <p:sp>
-        <p:nvSpPr>
-          <p:cNvPr id="3" name="Notes Placeholder 2"/>
-          <p:cNvSpPr>
-            <a:spLocks noGrp="1"/>
-          </p:cNvSpPr>
-          <p:nvPr>
-            <p:ph type="body" idx="3" sz="quarter"/>
-          </p:nvPr>
-        </p:nvSpPr>
-        <p:spPr/>
-        <p:txBody>
-          <a:bodyPr/>
-          <a:lstStyle/>
-          <a:p>
-            <a:r>
-              <a:t>Divisor del capítulo 13.5. Se enuncia la pregunta tal como aparece en el sílabo, la ficha, el cuaderno y la guía: es el mismo código en todos. [Jueves, capítulo 13.5]</a:t>
-            </a:r>
-          </a:p>
-        </p:txBody>
-      </p:sp>
-      <p:sp>
-        <p:nvSpPr>
-          <p:cNvPr id="4" name="Slide Number Placeholder 3"/>
-          <p:cNvSpPr>
-            <a:spLocks noGrp="1"/>
-          </p:cNvSpPr>
-          <p:nvPr>
-            <p:ph type="sldNum" idx="5" sz="quarter"/>
-          </p:nvPr>
-        </p:nvSpPr>
-        <p:spPr/>
-      </p:sp>
-    </p:spTree>
-  </p:cSld>
-  <p:clrMapOvr>
-    <a:masterClrMapping/>
-  </p:clrMapOvr>
-</p:notes>
-</file>
-
-<file path=ppt/notesSlides/notesSlide23.xml><?xml version="1.0" encoding="utf-8"?>
-<p:notes xmlns:a="http://schemas.openxmlformats.org/drawingml/2006/main" xmlns:p="http://schemas.openxmlformats.org/presentationml/2006/main" xmlns:r="http://schemas.openxmlformats.org/officeDocument/2006/relationships">
-  <p:cSld>
-    <p:spTree>
-      <p:nvGrpSpPr>
-        <p:cNvPr id="1" name=""/>
-        <p:cNvGrpSpPr/>
-        <p:nvPr/>
-      </p:nvGrpSpPr>
-      <p:grpSpPr>
-        <a:xfrm>
-          <a:off x="0" y="0"/>
-          <a:ext cx="0" cy="0"/>
-          <a:chOff x="0" y="0"/>
-          <a:chExt cx="0" cy="0"/>
-        </a:xfrm>
-      </p:grpSpPr>
-      <p:sp>
-        <p:nvSpPr>
-          <p:cNvPr id="2" name="Slide Image Placeholder 1"/>
-          <p:cNvSpPr>
-            <a:spLocks noGrp="1"/>
-          </p:cNvSpPr>
-          <p:nvPr>
-            <p:ph type="sldImg" idx="2"/>
-          </p:nvPr>
-        </p:nvSpPr>
-        <p:spPr/>
-      </p:sp>
-      <p:sp>
-        <p:nvSpPr>
-          <p:cNvPr id="3" name="Notes Placeholder 2"/>
-          <p:cNvSpPr>
-            <a:spLocks noGrp="1"/>
-          </p:cNvSpPr>
-          <p:nvPr>
-            <p:ph type="body" idx="3" sz="quarter"/>
-          </p:nvPr>
-        </p:nvSpPr>
-        <p:spPr/>
-        <p:txBody>
-          <a:bodyPr/>
-          <a:lstStyle/>
-          <a:p>
-            <a:r>
-              <a:t>GUION: desarrolla el capítulo 13.2. Deriva de la Sección 6 de la guía docente y de la investigación de la sesión; las cifras salen del Excel de resultados. [Viernes, capítulo 13.2]</a:t>
             </a:r>
           </a:p>
         </p:txBody>
@@ -5309,7 +4892,7 @@
     <p:bg>
       <p:bgPr>
         <a:solidFill>
-          <a:srgbClr val="9B1B30"/>
+          <a:srgbClr val="FFFFFF"/>
         </a:solidFill>
         <a:effectLst/>
       </p:bgPr>
@@ -5323,20 +4906,90 @@
       <p:grpSpPr/>
       <p:sp>
         <p:nvSpPr>
-          <p:cNvPr id="2" name="Oval 1"/>
+          <p:cNvPr id="2" name="TextBox 1"/>
+          <p:cNvSpPr txBox="1"/>
+          <p:nvPr/>
+        </p:nvSpPr>
+        <p:spPr>
+          <a:xfrm>
+            <a:off x="548640" y="411480"/>
+            <a:ext cx="11094720" cy="292608"/>
+          </a:xfrm>
+          <a:prstGeom prst="rect">
+            <a:avLst/>
+          </a:prstGeom>
+          <a:noFill/>
+        </p:spPr>
+        <p:txBody>
+          <a:bodyPr wrap="square" anchor="t" lIns="0" rIns="0" tIns="0" bIns="0">
+            <a:spAutoFit/>
+          </a:bodyPr>
+          <a:lstStyle/>
+          <a:p>
+            <a:pPr algn="l"/>
+            <a:r>
+              <a:rPr sz="1300" b="1">
+                <a:solidFill>
+                  <a:srgbClr val="9B1B30"/>
+                </a:solidFill>
+                <a:latin typeface="Calibri"/>
+              </a:rPr>
+              <a:t>DEFINICIONES — NO PARAMÉTRICO</a:t>
+            </a:r>
+          </a:p>
+        </p:txBody>
+      </p:sp>
+      <p:sp>
+        <p:nvSpPr>
+          <p:cNvPr id="3" name="TextBox 2"/>
+          <p:cNvSpPr txBox="1"/>
+          <p:nvPr/>
+        </p:nvSpPr>
+        <p:spPr>
+          <a:xfrm>
+            <a:off x="548640" y="731520"/>
+            <a:ext cx="11094720" cy="777240"/>
+          </a:xfrm>
+          <a:prstGeom prst="rect">
+            <a:avLst/>
+          </a:prstGeom>
+          <a:noFill/>
+        </p:spPr>
+        <p:txBody>
+          <a:bodyPr wrap="square" anchor="t" lIns="0" rIns="0" tIns="0" bIns="0">
+            <a:spAutoFit/>
+          </a:bodyPr>
+          <a:lstStyle/>
+          <a:p>
+            <a:pPr algn="l"/>
+            <a:r>
+              <a:rPr sz="4000" b="1">
+                <a:solidFill>
+                  <a:srgbClr val="2D2D2D"/>
+                </a:solidFill>
+                <a:latin typeface="Calibri"/>
+              </a:rPr>
+              <a:t>Kaplan-Meier estima la curva; el log-rank la compara</a:t>
+            </a:r>
+          </a:p>
+        </p:txBody>
+      </p:sp>
+      <p:sp>
+        <p:nvSpPr>
+          <p:cNvPr id="4" name="Oval 3"/>
           <p:cNvSpPr/>
           <p:nvPr/>
         </p:nvSpPr>
         <p:spPr>
           <a:xfrm>
-            <a:off x="914400" y="2103120"/>
-            <a:ext cx="2377440" cy="2377440"/>
+            <a:off x="548640" y="2642616"/>
+            <a:ext cx="658368" cy="658368"/>
           </a:xfrm>
           <a:prstGeom prst="ellipse">
             <a:avLst/>
           </a:prstGeom>
           <a:solidFill>
-            <a:srgbClr val="FFFFFF"/>
+            <a:srgbClr val="E4002B"/>
           </a:solidFill>
           <a:ln>
             <a:noFill/>
@@ -5358,32 +5011,47 @@
           </a:fontRef>
         </p:style>
         <p:txBody>
-          <a:bodyPr rtlCol="0" anchor="ctr" lIns="0" rIns="0" tIns="0" bIns="0"/>
+          <a:bodyPr rtlCol="0" anchor="ctr"/>
           <a:lstStyle/>
           <a:p>
             <a:pPr algn="ctr"/>
-            <a:r>
-              <a:rPr sz="10000" b="1">
-                <a:solidFill>
-                  <a:srgbClr val="9B1B30"/>
-                </a:solidFill>
-                <a:latin typeface="Calibri"/>
-              </a:rPr>
-              <a:t>3</a:t>
-            </a:r>
-          </a:p>
-        </p:txBody>
-      </p:sp>
-      <p:sp>
-        <p:nvSpPr>
-          <p:cNvPr id="3" name="TextBox 2"/>
+          </a:p>
+        </p:txBody>
+      </p:sp>
+      <p:pic>
+        <p:nvPicPr>
+          <p:cNvPr id="5" name="Picture 4" descr="chart-column__FFFFFF.png"/>
+          <p:cNvPicPr>
+            <a:picLocks noChangeAspect="1"/>
+          </p:cNvPicPr>
+          <p:nvPr/>
+        </p:nvPicPr>
+        <p:blipFill>
+          <a:blip r:embed="rId2"/>
+          <a:stretch>
+            <a:fillRect/>
+          </a:stretch>
+        </p:blipFill>
+        <p:spPr>
+          <a:xfrm>
+            <a:off x="732983" y="2826959"/>
+            <a:ext cx="289682" cy="289682"/>
+          </a:xfrm>
+          <a:prstGeom prst="rect">
+            <a:avLst/>
+          </a:prstGeom>
+        </p:spPr>
+      </p:pic>
+      <p:sp>
+        <p:nvSpPr>
+          <p:cNvPr id="6" name="TextBox 5"/>
           <p:cNvSpPr txBox="1"/>
           <p:nvPr/>
         </p:nvSpPr>
         <p:spPr>
           <a:xfrm>
-            <a:off x="3931920" y="2651760"/>
-            <a:ext cx="7589520" cy="1371600"/>
+            <a:off x="1508760" y="1938528"/>
+            <a:ext cx="10134600" cy="411480"/>
           </a:xfrm>
           <a:prstGeom prst="rect">
             <a:avLst/>
@@ -5398,27 +5066,27 @@
           <a:p>
             <a:pPr algn="l"/>
             <a:r>
-              <a:rPr sz="4000" b="1">
-                <a:solidFill>
-                  <a:srgbClr val="FFFFFF"/>
-                </a:solidFill>
-                <a:latin typeface="Calibri"/>
-              </a:rPr>
-              <a:t>¿Cómo se estima la curva sin suponer una forma funcional?</a:t>
-            </a:r>
-          </a:p>
-        </p:txBody>
-      </p:sp>
-      <p:sp>
-        <p:nvSpPr>
-          <p:cNvPr id="4" name="TextBox 3"/>
+              <a:rPr sz="1800" b="1">
+                <a:solidFill>
+                  <a:srgbClr val="9B1B30"/>
+                </a:solidFill>
+                <a:latin typeface="Calibri"/>
+              </a:rPr>
+              <a:t>Estimador de Kaplan-Meier</a:t>
+            </a:r>
+          </a:p>
+        </p:txBody>
+      </p:sp>
+      <p:sp>
+        <p:nvSpPr>
+          <p:cNvPr id="7" name="TextBox 6"/>
           <p:cNvSpPr txBox="1"/>
           <p:nvPr/>
         </p:nvSpPr>
         <p:spPr>
           <a:xfrm>
-            <a:off x="3931920" y="3977639"/>
-            <a:ext cx="7589520" cy="914400"/>
+            <a:off x="1508760" y="2395728"/>
+            <a:ext cx="10134600" cy="1645920"/>
           </a:xfrm>
           <a:prstGeom prst="rect">
             <a:avLst/>
@@ -5431,15 +5099,309 @@
           </a:bodyPr>
           <a:lstStyle/>
           <a:p>
+            <a:pPr algn="l">
+              <a:lnSpc>
+                <a:spcPct val="110000"/>
+              </a:lnSpc>
+            </a:pPr>
+            <a:r>
+              <a:rPr sz="1400" b="0">
+                <a:solidFill>
+                  <a:srgbClr val="2D2D2D"/>
+                </a:solidFill>
+                <a:latin typeface="Calibri"/>
+              </a:rPr>
+              <a:t>Estima S(t) sin suponer una forma: los censurados reducen el conjunto en riesgo pero no cuentan como evento. Curva escalonada estándar.</a:t>
+            </a:r>
+          </a:p>
+        </p:txBody>
+      </p:sp>
+      <p:sp>
+        <p:nvSpPr>
+          <p:cNvPr id="8" name="Oval 7"/>
+          <p:cNvSpPr/>
+          <p:nvPr/>
+        </p:nvSpPr>
+        <p:spPr>
+          <a:xfrm>
+            <a:off x="548640" y="4928616"/>
+            <a:ext cx="658368" cy="658368"/>
+          </a:xfrm>
+          <a:prstGeom prst="ellipse">
+            <a:avLst/>
+          </a:prstGeom>
+          <a:solidFill>
+            <a:srgbClr val="E4002B"/>
+          </a:solidFill>
+          <a:ln>
+            <a:noFill/>
+          </a:ln>
+          <a:effectLst/>
+        </p:spPr>
+        <p:style>
+          <a:lnRef idx="1">
+            <a:schemeClr val="accent1"/>
+          </a:lnRef>
+          <a:fillRef idx="3">
+            <a:schemeClr val="accent1"/>
+          </a:fillRef>
+          <a:effectRef idx="2">
+            <a:schemeClr val="accent1"/>
+          </a:effectRef>
+          <a:fontRef idx="minor">
+            <a:schemeClr val="lt1"/>
+          </a:fontRef>
+        </p:style>
+        <p:txBody>
+          <a:bodyPr rtlCol="0" anchor="ctr"/>
+          <a:lstStyle/>
+          <a:p>
+            <a:pPr algn="ctr"/>
+          </a:p>
+        </p:txBody>
+      </p:sp>
+      <p:pic>
+        <p:nvPicPr>
+          <p:cNvPr id="9" name="Picture 8" descr="messages-square__FFFFFF.png"/>
+          <p:cNvPicPr>
+            <a:picLocks noChangeAspect="1"/>
+          </p:cNvPicPr>
+          <p:nvPr/>
+        </p:nvPicPr>
+        <p:blipFill>
+          <a:blip r:embed="rId3"/>
+          <a:stretch>
+            <a:fillRect/>
+          </a:stretch>
+        </p:blipFill>
+        <p:spPr>
+          <a:xfrm>
+            <a:off x="732983" y="5112959"/>
+            <a:ext cx="289682" cy="289682"/>
+          </a:xfrm>
+          <a:prstGeom prst="rect">
+            <a:avLst/>
+          </a:prstGeom>
+        </p:spPr>
+      </p:pic>
+      <p:sp>
+        <p:nvSpPr>
+          <p:cNvPr id="10" name="TextBox 9"/>
+          <p:cNvSpPr txBox="1"/>
+          <p:nvPr/>
+        </p:nvSpPr>
+        <p:spPr>
+          <a:xfrm>
+            <a:off x="1508760" y="4224528"/>
+            <a:ext cx="10134600" cy="411480"/>
+          </a:xfrm>
+          <a:prstGeom prst="rect">
+            <a:avLst/>
+          </a:prstGeom>
+          <a:noFill/>
+        </p:spPr>
+        <p:txBody>
+          <a:bodyPr wrap="square" anchor="t" lIns="0" rIns="0" tIns="0" bIns="0">
+            <a:spAutoFit/>
+          </a:bodyPr>
+          <a:lstStyle/>
+          <a:p>
             <a:pPr algn="l"/>
             <a:r>
-              <a:rPr sz="1700" b="0">
-                <a:solidFill>
-                  <a:srgbClr val="FCEDEE"/>
-                </a:solidFill>
-                <a:latin typeface="Calibri"/>
-              </a:rPr>
-              <a:t>Capítulo 13.3 — jueves, bloques A1 y A2</a:t>
+              <a:rPr sz="1800" b="1">
+                <a:solidFill>
+                  <a:srgbClr val="9B1B30"/>
+                </a:solidFill>
+                <a:latin typeface="Calibri"/>
+              </a:rPr>
+              <a:t>Prueba de log-rank</a:t>
+            </a:r>
+          </a:p>
+        </p:txBody>
+      </p:sp>
+      <p:sp>
+        <p:nvSpPr>
+          <p:cNvPr id="11" name="TextBox 10"/>
+          <p:cNvSpPr txBox="1"/>
+          <p:nvPr/>
+        </p:nvSpPr>
+        <p:spPr>
+          <a:xfrm>
+            <a:off x="1508760" y="4681728"/>
+            <a:ext cx="10134600" cy="1645920"/>
+          </a:xfrm>
+          <a:prstGeom prst="rect">
+            <a:avLst/>
+          </a:prstGeom>
+          <a:noFill/>
+        </p:spPr>
+        <p:txBody>
+          <a:bodyPr wrap="square" anchor="t" lIns="0" rIns="0" tIns="0" bIns="0">
+            <a:spAutoFit/>
+          </a:bodyPr>
+          <a:lstStyle/>
+          <a:p>
+            <a:pPr algn="l">
+              <a:lnSpc>
+                <a:spcPct val="110000"/>
+              </a:lnSpc>
+            </a:pPr>
+            <a:r>
+              <a:rPr sz="1400" b="0">
+                <a:solidFill>
+                  <a:srgbClr val="2D2D2D"/>
+                </a:solidFill>
+                <a:latin typeface="Calibri"/>
+              </a:rPr>
+              <a:t>Compara dos o más curvas y contrasta si difieren. Da un p-valor, no el tamaño del efecto.</a:t>
+            </a:r>
+          </a:p>
+        </p:txBody>
+      </p:sp>
+      <p:sp>
+        <p:nvSpPr>
+          <p:cNvPr id="12" name="TextBox 11"/>
+          <p:cNvSpPr txBox="1"/>
+          <p:nvPr/>
+        </p:nvSpPr>
+        <p:spPr>
+          <a:xfrm>
+            <a:off x="548640" y="5870448"/>
+            <a:ext cx="11064240" cy="320040"/>
+          </a:xfrm>
+          <a:prstGeom prst="rect">
+            <a:avLst/>
+          </a:prstGeom>
+          <a:noFill/>
+        </p:spPr>
+        <p:txBody>
+          <a:bodyPr wrap="square">
+            <a:spAutoFit/>
+          </a:bodyPr>
+          <a:lstStyle/>
+          <a:p>
+            <a:r>
+              <a:rPr sz="1000">
+                <a:solidFill>
+                  <a:srgbClr val="6E6E6E"/>
+                </a:solidFill>
+                <a:latin typeface="Calibri"/>
+              </a:rPr>
+              <a:t>DEFINICIONES puntos 5, 6, Kaplan &amp; Meier (1958), JASA 53(282):457-481; implementación lifelines.statistics.logrank_test.</a:t>
+            </a:r>
+          </a:p>
+        </p:txBody>
+      </p:sp>
+      <p:sp>
+        <p:nvSpPr>
+          <p:cNvPr id="13" name="Oval 12"/>
+          <p:cNvSpPr/>
+          <p:nvPr/>
+        </p:nvSpPr>
+        <p:spPr>
+          <a:xfrm>
+            <a:off x="548640" y="6473952"/>
+            <a:ext cx="100584" cy="100584"/>
+          </a:xfrm>
+          <a:prstGeom prst="ellipse">
+            <a:avLst/>
+          </a:prstGeom>
+          <a:solidFill>
+            <a:srgbClr val="E4002B"/>
+          </a:solidFill>
+          <a:ln>
+            <a:noFill/>
+          </a:ln>
+          <a:effectLst/>
+        </p:spPr>
+        <p:style>
+          <a:lnRef idx="1">
+            <a:schemeClr val="accent1"/>
+          </a:lnRef>
+          <a:fillRef idx="3">
+            <a:schemeClr val="accent1"/>
+          </a:fillRef>
+          <a:effectRef idx="2">
+            <a:schemeClr val="accent1"/>
+          </a:effectRef>
+          <a:fontRef idx="minor">
+            <a:schemeClr val="lt1"/>
+          </a:fontRef>
+        </p:style>
+        <p:txBody>
+          <a:bodyPr rtlCol="0" anchor="ctr"/>
+          <a:lstStyle/>
+          <a:p>
+            <a:pPr algn="ctr"/>
+          </a:p>
+        </p:txBody>
+      </p:sp>
+      <p:sp>
+        <p:nvSpPr>
+          <p:cNvPr id="14" name="TextBox 13"/>
+          <p:cNvSpPr txBox="1"/>
+          <p:nvPr/>
+        </p:nvSpPr>
+        <p:spPr>
+          <a:xfrm>
+            <a:off x="749808" y="6437376"/>
+            <a:ext cx="7772400" cy="274320"/>
+          </a:xfrm>
+          <a:prstGeom prst="rect">
+            <a:avLst/>
+          </a:prstGeom>
+          <a:noFill/>
+        </p:spPr>
+        <p:txBody>
+          <a:bodyPr wrap="square" anchor="t" lIns="0" rIns="0" tIns="0" bIns="0">
+            <a:spAutoFit/>
+          </a:bodyPr>
+          <a:lstStyle/>
+          <a:p>
+            <a:pPr algn="l"/>
+            <a:r>
+              <a:rPr sz="900" b="0">
+                <a:solidFill>
+                  <a:srgbClr val="6E6E6E"/>
+                </a:solidFill>
+                <a:latin typeface="Calibri"/>
+              </a:rPr>
+              <a:t>S13 — Herramientas para la Ciencia de Datos, UPC</a:t>
+            </a:r>
+          </a:p>
+        </p:txBody>
+      </p:sp>
+      <p:sp>
+        <p:nvSpPr>
+          <p:cNvPr id="15" name="TextBox 14"/>
+          <p:cNvSpPr txBox="1"/>
+          <p:nvPr/>
+        </p:nvSpPr>
+        <p:spPr>
+          <a:xfrm>
+            <a:off x="10180320" y="6437376"/>
+            <a:ext cx="1463040" cy="274320"/>
+          </a:xfrm>
+          <a:prstGeom prst="rect">
+            <a:avLst/>
+          </a:prstGeom>
+          <a:noFill/>
+        </p:spPr>
+        <p:txBody>
+          <a:bodyPr wrap="square" anchor="t" lIns="0" rIns="0" tIns="0" bIns="0">
+            <a:spAutoFit/>
+          </a:bodyPr>
+          <a:lstStyle/>
+          <a:p>
+            <a:pPr algn="r"/>
+            <a:r>
+              <a:rPr sz="900" b="0">
+                <a:solidFill>
+                  <a:srgbClr val="6E6E6E"/>
+                </a:solidFill>
+                <a:latin typeface="Calibri"/>
+              </a:rPr>
+              <a:t>10 / 17</a:t>
             </a:r>
           </a:p>
         </p:txBody>
@@ -5453,6 +5415,382 @@
 </file>
 
 <file path=ppt/slides/slide11.xml><?xml version="1.0" encoding="utf-8"?>
+<p:sld xmlns:a="http://schemas.openxmlformats.org/drawingml/2006/main" xmlns:p="http://schemas.openxmlformats.org/presentationml/2006/main" xmlns:r="http://schemas.openxmlformats.org/officeDocument/2006/relationships">
+  <p:cSld>
+    <p:bg>
+      <p:bgPr>
+        <a:solidFill>
+          <a:srgbClr val="FFFFFF"/>
+        </a:solidFill>
+        <a:effectLst/>
+      </p:bgPr>
+    </p:bg>
+    <p:spTree>
+      <p:nvGrpSpPr>
+        <p:cNvPr id="1" name=""/>
+        <p:cNvGrpSpPr/>
+        <p:nvPr/>
+      </p:nvGrpSpPr>
+      <p:grpSpPr/>
+      <p:sp>
+        <p:nvSpPr>
+          <p:cNvPr id="2" name="TextBox 1"/>
+          <p:cNvSpPr txBox="1"/>
+          <p:nvPr/>
+        </p:nvSpPr>
+        <p:spPr>
+          <a:xfrm>
+            <a:off x="548640" y="411480"/>
+            <a:ext cx="11094720" cy="777240"/>
+          </a:xfrm>
+          <a:prstGeom prst="rect">
+            <a:avLst/>
+          </a:prstGeom>
+          <a:noFill/>
+        </p:spPr>
+        <p:txBody>
+          <a:bodyPr wrap="square" anchor="t" lIns="0" rIns="0" tIns="0" bIns="0">
+            <a:spAutoFit/>
+          </a:bodyPr>
+          <a:lstStyle/>
+          <a:p>
+            <a:pPr algn="l"/>
+            <a:r>
+              <a:rPr sz="4000" b="1">
+                <a:solidFill>
+                  <a:srgbClr val="2D2D2D"/>
+                </a:solidFill>
+                <a:latin typeface="Calibri"/>
+              </a:rPr>
+              <a:t>Con ayuda financiera se reincide menos: 78 % frente a 69 % a 52 semanas</a:t>
+            </a:r>
+          </a:p>
+        </p:txBody>
+      </p:sp>
+      <p:pic>
+        <p:nvPicPr>
+          <p:cNvPr id="3" name="Picture 2" descr="S13deck_km_rossi.png"/>
+          <p:cNvPicPr>
+            <a:picLocks noChangeAspect="1"/>
+          </p:cNvPicPr>
+          <p:nvPr/>
+        </p:nvPicPr>
+        <p:blipFill>
+          <a:blip r:embed="rId2"/>
+          <a:stretch>
+            <a:fillRect/>
+          </a:stretch>
+        </p:blipFill>
+        <p:spPr>
+          <a:xfrm>
+            <a:off x="548640" y="1828800"/>
+            <a:ext cx="6949440" cy="3903950"/>
+          </a:xfrm>
+          <a:prstGeom prst="rect">
+            <a:avLst/>
+          </a:prstGeom>
+        </p:spPr>
+      </p:pic>
+      <p:sp>
+        <p:nvSpPr>
+          <p:cNvPr id="4" name="Oval 3"/>
+          <p:cNvSpPr/>
+          <p:nvPr/>
+        </p:nvSpPr>
+        <p:spPr>
+          <a:xfrm>
+            <a:off x="7955279" y="2011680"/>
+            <a:ext cx="548640" cy="548640"/>
+          </a:xfrm>
+          <a:prstGeom prst="ellipse">
+            <a:avLst/>
+          </a:prstGeom>
+          <a:solidFill>
+            <a:srgbClr val="E4002B"/>
+          </a:solidFill>
+          <a:ln>
+            <a:noFill/>
+          </a:ln>
+          <a:effectLst/>
+        </p:spPr>
+        <p:style>
+          <a:lnRef idx="1">
+            <a:schemeClr val="accent1"/>
+          </a:lnRef>
+          <a:fillRef idx="3">
+            <a:schemeClr val="accent1"/>
+          </a:fillRef>
+          <a:effectRef idx="2">
+            <a:schemeClr val="accent1"/>
+          </a:effectRef>
+          <a:fontRef idx="minor">
+            <a:schemeClr val="lt1"/>
+          </a:fontRef>
+        </p:style>
+        <p:txBody>
+          <a:bodyPr rtlCol="0" anchor="ctr"/>
+          <a:lstStyle/>
+          <a:p>
+            <a:pPr algn="ctr"/>
+          </a:p>
+        </p:txBody>
+      </p:sp>
+      <p:pic>
+        <p:nvPicPr>
+          <p:cNvPr id="5" name="Picture 4" descr="lightbulb__FFFFFF.png"/>
+          <p:cNvPicPr>
+            <a:picLocks noChangeAspect="1"/>
+          </p:cNvPicPr>
+          <p:nvPr/>
+        </p:nvPicPr>
+        <p:blipFill>
+          <a:blip r:embed="rId3"/>
+          <a:stretch>
+            <a:fillRect/>
+          </a:stretch>
+        </p:blipFill>
+        <p:spPr>
+          <a:xfrm>
+            <a:off x="8108898" y="2165299"/>
+            <a:ext cx="241402" cy="241402"/>
+          </a:xfrm>
+          <a:prstGeom prst="rect">
+            <a:avLst/>
+          </a:prstGeom>
+        </p:spPr>
+      </p:pic>
+      <p:sp>
+        <p:nvSpPr>
+          <p:cNvPr id="6" name="TextBox 5"/>
+          <p:cNvSpPr txBox="1"/>
+          <p:nvPr/>
+        </p:nvSpPr>
+        <p:spPr>
+          <a:xfrm>
+            <a:off x="8686800" y="2057400"/>
+            <a:ext cx="2926080" cy="548640"/>
+          </a:xfrm>
+          <a:prstGeom prst="rect">
+            <a:avLst/>
+          </a:prstGeom>
+          <a:noFill/>
+        </p:spPr>
+        <p:txBody>
+          <a:bodyPr wrap="square" anchor="t" lIns="0" rIns="0" tIns="0" bIns="0">
+            <a:spAutoFit/>
+          </a:bodyPr>
+          <a:lstStyle/>
+          <a:p>
+            <a:pPr algn="l"/>
+            <a:r>
+              <a:rPr sz="1500" b="1">
+                <a:solidFill>
+                  <a:srgbClr val="9B1B30"/>
+                </a:solidFill>
+                <a:latin typeface="Calibri"/>
+              </a:rPr>
+              <a:t>Lectura de negocio</a:t>
+            </a:r>
+          </a:p>
+        </p:txBody>
+      </p:sp>
+      <p:sp>
+        <p:nvSpPr>
+          <p:cNvPr id="7" name="TextBox 6"/>
+          <p:cNvSpPr txBox="1"/>
+          <p:nvPr/>
+        </p:nvSpPr>
+        <p:spPr>
+          <a:xfrm>
+            <a:off x="7955279" y="2880360"/>
+            <a:ext cx="3657600" cy="3108960"/>
+          </a:xfrm>
+          <a:prstGeom prst="rect">
+            <a:avLst/>
+          </a:prstGeom>
+          <a:noFill/>
+        </p:spPr>
+        <p:txBody>
+          <a:bodyPr wrap="square" anchor="t" lIns="0" rIns="0" tIns="0" bIns="0">
+            <a:spAutoFit/>
+          </a:bodyPr>
+          <a:lstStyle/>
+          <a:p>
+            <a:pPr algn="l">
+              <a:lnSpc>
+                <a:spcPct val="125000"/>
+              </a:lnSpc>
+            </a:pPr>
+            <a:r>
+              <a:rPr sz="1500" b="0">
+                <a:solidFill>
+                  <a:srgbClr val="2D2D2D"/>
+                </a:solidFill>
+                <a:latin typeface="Calibri"/>
+              </a:rPr>
+              <a:t>La curva con ayuda queda por encima toda la ventana. La brecha de S(52) es de 8 puntos; log-rank p ≈ 0,050.</a:t>
+            </a:r>
+          </a:p>
+        </p:txBody>
+      </p:sp>
+      <p:sp>
+        <p:nvSpPr>
+          <p:cNvPr id="8" name="TextBox 7"/>
+          <p:cNvSpPr txBox="1"/>
+          <p:nvPr/>
+        </p:nvSpPr>
+        <p:spPr>
+          <a:xfrm>
+            <a:off x="548640" y="5961888"/>
+            <a:ext cx="11094720" cy="292608"/>
+          </a:xfrm>
+          <a:prstGeom prst="rect">
+            <a:avLst/>
+          </a:prstGeom>
+          <a:noFill/>
+        </p:spPr>
+        <p:txBody>
+          <a:bodyPr wrap="square" anchor="t" lIns="0" rIns="0" tIns="0" bIns="0">
+            <a:spAutoFit/>
+          </a:bodyPr>
+          <a:lstStyle/>
+          <a:p>
+            <a:pPr algn="l"/>
+            <a:r>
+              <a:rPr sz="1000" b="0">
+                <a:solidFill>
+                  <a:srgbClr val="6E6E6E"/>
+                </a:solidFill>
+                <a:latin typeface="Calibri"/>
+              </a:rPr>
+              <a:t>Réplica Cox/Rossi, KM por fin, S(52) 0,78 (con) vs. 0,69 (sin), log-rank p 0,050, venv/Excel (km_rossi_fin, survival).</a:t>
+            </a:r>
+          </a:p>
+        </p:txBody>
+      </p:sp>
+      <p:sp>
+        <p:nvSpPr>
+          <p:cNvPr id="9" name="Oval 8"/>
+          <p:cNvSpPr/>
+          <p:nvPr/>
+        </p:nvSpPr>
+        <p:spPr>
+          <a:xfrm>
+            <a:off x="548640" y="6473952"/>
+            <a:ext cx="100584" cy="100584"/>
+          </a:xfrm>
+          <a:prstGeom prst="ellipse">
+            <a:avLst/>
+          </a:prstGeom>
+          <a:solidFill>
+            <a:srgbClr val="E4002B"/>
+          </a:solidFill>
+          <a:ln>
+            <a:noFill/>
+          </a:ln>
+          <a:effectLst/>
+        </p:spPr>
+        <p:style>
+          <a:lnRef idx="1">
+            <a:schemeClr val="accent1"/>
+          </a:lnRef>
+          <a:fillRef idx="3">
+            <a:schemeClr val="accent1"/>
+          </a:fillRef>
+          <a:effectRef idx="2">
+            <a:schemeClr val="accent1"/>
+          </a:effectRef>
+          <a:fontRef idx="minor">
+            <a:schemeClr val="lt1"/>
+          </a:fontRef>
+        </p:style>
+        <p:txBody>
+          <a:bodyPr rtlCol="0" anchor="ctr"/>
+          <a:lstStyle/>
+          <a:p>
+            <a:pPr algn="ctr"/>
+          </a:p>
+        </p:txBody>
+      </p:sp>
+      <p:sp>
+        <p:nvSpPr>
+          <p:cNvPr id="10" name="TextBox 9"/>
+          <p:cNvSpPr txBox="1"/>
+          <p:nvPr/>
+        </p:nvSpPr>
+        <p:spPr>
+          <a:xfrm>
+            <a:off x="749808" y="6437376"/>
+            <a:ext cx="7772400" cy="274320"/>
+          </a:xfrm>
+          <a:prstGeom prst="rect">
+            <a:avLst/>
+          </a:prstGeom>
+          <a:noFill/>
+        </p:spPr>
+        <p:txBody>
+          <a:bodyPr wrap="square" anchor="t" lIns="0" rIns="0" tIns="0" bIns="0">
+            <a:spAutoFit/>
+          </a:bodyPr>
+          <a:lstStyle/>
+          <a:p>
+            <a:pPr algn="l"/>
+            <a:r>
+              <a:rPr sz="900" b="0">
+                <a:solidFill>
+                  <a:srgbClr val="6E6E6E"/>
+                </a:solidFill>
+                <a:latin typeface="Calibri"/>
+              </a:rPr>
+              <a:t>S13 — Herramientas para la Ciencia de Datos, UPC</a:t>
+            </a:r>
+          </a:p>
+        </p:txBody>
+      </p:sp>
+      <p:sp>
+        <p:nvSpPr>
+          <p:cNvPr id="11" name="TextBox 10"/>
+          <p:cNvSpPr txBox="1"/>
+          <p:nvPr/>
+        </p:nvSpPr>
+        <p:spPr>
+          <a:xfrm>
+            <a:off x="10180320" y="6437376"/>
+            <a:ext cx="1463040" cy="274320"/>
+          </a:xfrm>
+          <a:prstGeom prst="rect">
+            <a:avLst/>
+          </a:prstGeom>
+          <a:noFill/>
+        </p:spPr>
+        <p:txBody>
+          <a:bodyPr wrap="square" anchor="t" lIns="0" rIns="0" tIns="0" bIns="0">
+            <a:spAutoFit/>
+          </a:bodyPr>
+          <a:lstStyle/>
+          <a:p>
+            <a:pPr algn="r"/>
+            <a:r>
+              <a:rPr sz="900" b="0">
+                <a:solidFill>
+                  <a:srgbClr val="6E6E6E"/>
+                </a:solidFill>
+                <a:latin typeface="Calibri"/>
+              </a:rPr>
+              <a:t>11 / 17</a:t>
+            </a:r>
+          </a:p>
+        </p:txBody>
+      </p:sp>
+    </p:spTree>
+  </p:cSld>
+  <p:clrMapOvr>
+    <a:masterClrMapping/>
+  </p:clrMapOvr>
+</p:sld>
+</file>
+
+<file path=ppt/slides/slide12.xml><?xml version="1.0" encoding="utf-8"?>
 <p:sld xmlns:a="http://schemas.openxmlformats.org/drawingml/2006/main" xmlns:p="http://schemas.openxmlformats.org/presentationml/2006/main" xmlns:r="http://schemas.openxmlformats.org/officeDocument/2006/relationships">
   <p:cSld>
     <p:bg>
@@ -5518,7 +5856,7 @@
                 </a:solidFill>
                 <a:latin typeface="Calibri"/>
               </a:rPr>
-              <a:t>5</a:t>
+              <a:t>3</a:t>
             </a:r>
           </a:p>
         </p:txBody>
@@ -5553,7 +5891,7 @@
                 </a:solidFill>
                 <a:latin typeface="Calibri"/>
               </a:rPr>
-              <a:t>¿Se sostiene con datos reales? La réplica de Cox (1972)</a:t>
+              <a:t>Regresión de Cox</a:t>
             </a:r>
           </a:p>
         </p:txBody>
@@ -5588,7 +5926,7 @@
                 </a:solidFill>
                 <a:latin typeface="Calibri"/>
               </a:rPr>
-              <a:t>¿Se sostiene con datos reales? La réplica de Cox (1972)</a:t>
+              <a:t>Cuantificar cómo cada atributo multiplica el riesgo, con su supuesto</a:t>
             </a:r>
           </a:p>
         </p:txBody>
@@ -5617,534 +5955,6 @@
           </a:prstGeom>
         </p:spPr>
       </p:pic>
-    </p:spTree>
-  </p:cSld>
-  <p:clrMapOvr>
-    <a:masterClrMapping/>
-  </p:clrMapOvr>
-</p:sld>
-</file>
-
-<file path=ppt/slides/slide12.xml><?xml version="1.0" encoding="utf-8"?>
-<p:sld xmlns:a="http://schemas.openxmlformats.org/drawingml/2006/main" xmlns:p="http://schemas.openxmlformats.org/presentationml/2006/main" xmlns:r="http://schemas.openxmlformats.org/officeDocument/2006/relationships">
-  <p:cSld>
-    <p:bg>
-      <p:bgPr>
-        <a:solidFill>
-          <a:srgbClr val="FFFFFF"/>
-        </a:solidFill>
-        <a:effectLst/>
-      </p:bgPr>
-    </p:bg>
-    <p:spTree>
-      <p:nvGrpSpPr>
-        <p:cNvPr id="1" name=""/>
-        <p:cNvGrpSpPr/>
-        <p:nvPr/>
-      </p:nvGrpSpPr>
-      <p:grpSpPr/>
-      <p:sp>
-        <p:nvSpPr>
-          <p:cNvPr id="2" name="TextBox 1"/>
-          <p:cNvSpPr txBox="1"/>
-          <p:nvPr/>
-        </p:nvSpPr>
-        <p:spPr>
-          <a:xfrm>
-            <a:off x="548640" y="411480"/>
-            <a:ext cx="11094720" cy="292608"/>
-          </a:xfrm>
-          <a:prstGeom prst="rect">
-            <a:avLst/>
-          </a:prstGeom>
-          <a:noFill/>
-        </p:spPr>
-        <p:txBody>
-          <a:bodyPr wrap="square" anchor="t" lIns="0" rIns="0" tIns="0" bIns="0">
-            <a:spAutoFit/>
-          </a:bodyPr>
-          <a:lstStyle/>
-          <a:p>
-            <a:pPr algn="l"/>
-            <a:r>
-              <a:rPr sz="1300" b="1">
-                <a:solidFill>
-                  <a:srgbClr val="9B1B30"/>
-                </a:solidFill>
-                <a:latin typeface="Calibri"/>
-              </a:rPr>
-              <a:t>DEFINICIONES — NO PARAMÉTRICO</a:t>
-            </a:r>
-          </a:p>
-        </p:txBody>
-      </p:sp>
-      <p:sp>
-        <p:nvSpPr>
-          <p:cNvPr id="3" name="TextBox 2"/>
-          <p:cNvSpPr txBox="1"/>
-          <p:nvPr/>
-        </p:nvSpPr>
-        <p:spPr>
-          <a:xfrm>
-            <a:off x="548640" y="731520"/>
-            <a:ext cx="11094720" cy="777240"/>
-          </a:xfrm>
-          <a:prstGeom prst="rect">
-            <a:avLst/>
-          </a:prstGeom>
-          <a:noFill/>
-        </p:spPr>
-        <p:txBody>
-          <a:bodyPr wrap="square" anchor="t" lIns="0" rIns="0" tIns="0" bIns="0">
-            <a:spAutoFit/>
-          </a:bodyPr>
-          <a:lstStyle/>
-          <a:p>
-            <a:pPr algn="l"/>
-            <a:r>
-              <a:rPr sz="4000" b="1">
-                <a:solidFill>
-                  <a:srgbClr val="2D2D2D"/>
-                </a:solidFill>
-                <a:latin typeface="Calibri"/>
-              </a:rPr>
-              <a:t>Kaplan-Meier estima la curva; el log-rank la compara</a:t>
-            </a:r>
-          </a:p>
-        </p:txBody>
-      </p:sp>
-      <p:sp>
-        <p:nvSpPr>
-          <p:cNvPr id="4" name="Oval 3"/>
-          <p:cNvSpPr/>
-          <p:nvPr/>
-        </p:nvSpPr>
-        <p:spPr>
-          <a:xfrm>
-            <a:off x="548640" y="2642616"/>
-            <a:ext cx="658368" cy="658368"/>
-          </a:xfrm>
-          <a:prstGeom prst="ellipse">
-            <a:avLst/>
-          </a:prstGeom>
-          <a:solidFill>
-            <a:srgbClr val="E4002B"/>
-          </a:solidFill>
-          <a:ln>
-            <a:noFill/>
-          </a:ln>
-          <a:effectLst/>
-        </p:spPr>
-        <p:style>
-          <a:lnRef idx="1">
-            <a:schemeClr val="accent1"/>
-          </a:lnRef>
-          <a:fillRef idx="3">
-            <a:schemeClr val="accent1"/>
-          </a:fillRef>
-          <a:effectRef idx="2">
-            <a:schemeClr val="accent1"/>
-          </a:effectRef>
-          <a:fontRef idx="minor">
-            <a:schemeClr val="lt1"/>
-          </a:fontRef>
-        </p:style>
-        <p:txBody>
-          <a:bodyPr rtlCol="0" anchor="ctr"/>
-          <a:lstStyle/>
-          <a:p>
-            <a:pPr algn="ctr"/>
-          </a:p>
-        </p:txBody>
-      </p:sp>
-      <p:pic>
-        <p:nvPicPr>
-          <p:cNvPr id="5" name="Picture 4" descr="chart-column__FFFFFF.png"/>
-          <p:cNvPicPr>
-            <a:picLocks noChangeAspect="1"/>
-          </p:cNvPicPr>
-          <p:nvPr/>
-        </p:nvPicPr>
-        <p:blipFill>
-          <a:blip r:embed="rId2"/>
-          <a:stretch>
-            <a:fillRect/>
-          </a:stretch>
-        </p:blipFill>
-        <p:spPr>
-          <a:xfrm>
-            <a:off x="732983" y="2826959"/>
-            <a:ext cx="289682" cy="289682"/>
-          </a:xfrm>
-          <a:prstGeom prst="rect">
-            <a:avLst/>
-          </a:prstGeom>
-        </p:spPr>
-      </p:pic>
-      <p:sp>
-        <p:nvSpPr>
-          <p:cNvPr id="6" name="TextBox 5"/>
-          <p:cNvSpPr txBox="1"/>
-          <p:nvPr/>
-        </p:nvSpPr>
-        <p:spPr>
-          <a:xfrm>
-            <a:off x="1508760" y="1938528"/>
-            <a:ext cx="10134600" cy="411480"/>
-          </a:xfrm>
-          <a:prstGeom prst="rect">
-            <a:avLst/>
-          </a:prstGeom>
-          <a:noFill/>
-        </p:spPr>
-        <p:txBody>
-          <a:bodyPr wrap="square" anchor="t" lIns="0" rIns="0" tIns="0" bIns="0">
-            <a:spAutoFit/>
-          </a:bodyPr>
-          <a:lstStyle/>
-          <a:p>
-            <a:pPr algn="l"/>
-            <a:r>
-              <a:rPr sz="1800" b="1">
-                <a:solidFill>
-                  <a:srgbClr val="9B1B30"/>
-                </a:solidFill>
-                <a:latin typeface="Calibri"/>
-              </a:rPr>
-              <a:t>Estimador de Kaplan-Meier</a:t>
-            </a:r>
-          </a:p>
-        </p:txBody>
-      </p:sp>
-      <p:sp>
-        <p:nvSpPr>
-          <p:cNvPr id="7" name="TextBox 6"/>
-          <p:cNvSpPr txBox="1"/>
-          <p:nvPr/>
-        </p:nvSpPr>
-        <p:spPr>
-          <a:xfrm>
-            <a:off x="1508760" y="2395728"/>
-            <a:ext cx="10134600" cy="1645920"/>
-          </a:xfrm>
-          <a:prstGeom prst="rect">
-            <a:avLst/>
-          </a:prstGeom>
-          <a:noFill/>
-        </p:spPr>
-        <p:txBody>
-          <a:bodyPr wrap="square" anchor="t" lIns="0" rIns="0" tIns="0" bIns="0">
-            <a:spAutoFit/>
-          </a:bodyPr>
-          <a:lstStyle/>
-          <a:p>
-            <a:pPr algn="l">
-              <a:lnSpc>
-                <a:spcPct val="110000"/>
-              </a:lnSpc>
-            </a:pPr>
-            <a:r>
-              <a:rPr sz="1400" b="0">
-                <a:solidFill>
-                  <a:srgbClr val="2D2D2D"/>
-                </a:solidFill>
-                <a:latin typeface="Calibri"/>
-              </a:rPr>
-              <a:t>Estima S(t) sin suponer una forma: los censurados reducen el conjunto en riesgo pero no cuentan como evento. Curva escalonada estándar.</a:t>
-            </a:r>
-          </a:p>
-        </p:txBody>
-      </p:sp>
-      <p:sp>
-        <p:nvSpPr>
-          <p:cNvPr id="8" name="Oval 7"/>
-          <p:cNvSpPr/>
-          <p:nvPr/>
-        </p:nvSpPr>
-        <p:spPr>
-          <a:xfrm>
-            <a:off x="548640" y="4928616"/>
-            <a:ext cx="658368" cy="658368"/>
-          </a:xfrm>
-          <a:prstGeom prst="ellipse">
-            <a:avLst/>
-          </a:prstGeom>
-          <a:solidFill>
-            <a:srgbClr val="E4002B"/>
-          </a:solidFill>
-          <a:ln>
-            <a:noFill/>
-          </a:ln>
-          <a:effectLst/>
-        </p:spPr>
-        <p:style>
-          <a:lnRef idx="1">
-            <a:schemeClr val="accent1"/>
-          </a:lnRef>
-          <a:fillRef idx="3">
-            <a:schemeClr val="accent1"/>
-          </a:fillRef>
-          <a:effectRef idx="2">
-            <a:schemeClr val="accent1"/>
-          </a:effectRef>
-          <a:fontRef idx="minor">
-            <a:schemeClr val="lt1"/>
-          </a:fontRef>
-        </p:style>
-        <p:txBody>
-          <a:bodyPr rtlCol="0" anchor="ctr"/>
-          <a:lstStyle/>
-          <a:p>
-            <a:pPr algn="ctr"/>
-          </a:p>
-        </p:txBody>
-      </p:sp>
-      <p:pic>
-        <p:nvPicPr>
-          <p:cNvPr id="9" name="Picture 8" descr="messages-square__FFFFFF.png"/>
-          <p:cNvPicPr>
-            <a:picLocks noChangeAspect="1"/>
-          </p:cNvPicPr>
-          <p:nvPr/>
-        </p:nvPicPr>
-        <p:blipFill>
-          <a:blip r:embed="rId3"/>
-          <a:stretch>
-            <a:fillRect/>
-          </a:stretch>
-        </p:blipFill>
-        <p:spPr>
-          <a:xfrm>
-            <a:off x="732983" y="5112959"/>
-            <a:ext cx="289682" cy="289682"/>
-          </a:xfrm>
-          <a:prstGeom prst="rect">
-            <a:avLst/>
-          </a:prstGeom>
-        </p:spPr>
-      </p:pic>
-      <p:sp>
-        <p:nvSpPr>
-          <p:cNvPr id="10" name="TextBox 9"/>
-          <p:cNvSpPr txBox="1"/>
-          <p:nvPr/>
-        </p:nvSpPr>
-        <p:spPr>
-          <a:xfrm>
-            <a:off x="1508760" y="4224528"/>
-            <a:ext cx="10134600" cy="411480"/>
-          </a:xfrm>
-          <a:prstGeom prst="rect">
-            <a:avLst/>
-          </a:prstGeom>
-          <a:noFill/>
-        </p:spPr>
-        <p:txBody>
-          <a:bodyPr wrap="square" anchor="t" lIns="0" rIns="0" tIns="0" bIns="0">
-            <a:spAutoFit/>
-          </a:bodyPr>
-          <a:lstStyle/>
-          <a:p>
-            <a:pPr algn="l"/>
-            <a:r>
-              <a:rPr sz="1800" b="1">
-                <a:solidFill>
-                  <a:srgbClr val="9B1B30"/>
-                </a:solidFill>
-                <a:latin typeface="Calibri"/>
-              </a:rPr>
-              <a:t>Prueba de log-rank</a:t>
-            </a:r>
-          </a:p>
-        </p:txBody>
-      </p:sp>
-      <p:sp>
-        <p:nvSpPr>
-          <p:cNvPr id="11" name="TextBox 10"/>
-          <p:cNvSpPr txBox="1"/>
-          <p:nvPr/>
-        </p:nvSpPr>
-        <p:spPr>
-          <a:xfrm>
-            <a:off x="1508760" y="4681728"/>
-            <a:ext cx="10134600" cy="1645920"/>
-          </a:xfrm>
-          <a:prstGeom prst="rect">
-            <a:avLst/>
-          </a:prstGeom>
-          <a:noFill/>
-        </p:spPr>
-        <p:txBody>
-          <a:bodyPr wrap="square" anchor="t" lIns="0" rIns="0" tIns="0" bIns="0">
-            <a:spAutoFit/>
-          </a:bodyPr>
-          <a:lstStyle/>
-          <a:p>
-            <a:pPr algn="l">
-              <a:lnSpc>
-                <a:spcPct val="110000"/>
-              </a:lnSpc>
-            </a:pPr>
-            <a:r>
-              <a:rPr sz="1400" b="0">
-                <a:solidFill>
-                  <a:srgbClr val="2D2D2D"/>
-                </a:solidFill>
-                <a:latin typeface="Calibri"/>
-              </a:rPr>
-              <a:t>Compara dos o más curvas y contrasta si difieren. Da un p-valor, no el tamaño del efecto.</a:t>
-            </a:r>
-          </a:p>
-        </p:txBody>
-      </p:sp>
-      <p:sp>
-        <p:nvSpPr>
-          <p:cNvPr id="12" name="TextBox 11"/>
-          <p:cNvSpPr txBox="1"/>
-          <p:nvPr/>
-        </p:nvSpPr>
-        <p:spPr>
-          <a:xfrm>
-            <a:off x="548640" y="5870448"/>
-            <a:ext cx="11064240" cy="320040"/>
-          </a:xfrm>
-          <a:prstGeom prst="rect">
-            <a:avLst/>
-          </a:prstGeom>
-          <a:noFill/>
-        </p:spPr>
-        <p:txBody>
-          <a:bodyPr wrap="square">
-            <a:spAutoFit/>
-          </a:bodyPr>
-          <a:lstStyle/>
-          <a:p>
-            <a:r>
-              <a:rPr sz="1000">
-                <a:solidFill>
-                  <a:srgbClr val="6E6E6E"/>
-                </a:solidFill>
-                <a:latin typeface="Calibri"/>
-              </a:rPr>
-              <a:t>DEFINICIONES puntos 5, 6, Kaplan &amp; Meier (1958), JASA 53(282):457-481; implementación lifelines.statistics.logrank_test.</a:t>
-            </a:r>
-          </a:p>
-        </p:txBody>
-      </p:sp>
-      <p:sp>
-        <p:nvSpPr>
-          <p:cNvPr id="13" name="Oval 12"/>
-          <p:cNvSpPr/>
-          <p:nvPr/>
-        </p:nvSpPr>
-        <p:spPr>
-          <a:xfrm>
-            <a:off x="548640" y="6473952"/>
-            <a:ext cx="100584" cy="100584"/>
-          </a:xfrm>
-          <a:prstGeom prst="ellipse">
-            <a:avLst/>
-          </a:prstGeom>
-          <a:solidFill>
-            <a:srgbClr val="E4002B"/>
-          </a:solidFill>
-          <a:ln>
-            <a:noFill/>
-          </a:ln>
-          <a:effectLst/>
-        </p:spPr>
-        <p:style>
-          <a:lnRef idx="1">
-            <a:schemeClr val="accent1"/>
-          </a:lnRef>
-          <a:fillRef idx="3">
-            <a:schemeClr val="accent1"/>
-          </a:fillRef>
-          <a:effectRef idx="2">
-            <a:schemeClr val="accent1"/>
-          </a:effectRef>
-          <a:fontRef idx="minor">
-            <a:schemeClr val="lt1"/>
-          </a:fontRef>
-        </p:style>
-        <p:txBody>
-          <a:bodyPr rtlCol="0" anchor="ctr"/>
-          <a:lstStyle/>
-          <a:p>
-            <a:pPr algn="ctr"/>
-          </a:p>
-        </p:txBody>
-      </p:sp>
-      <p:sp>
-        <p:nvSpPr>
-          <p:cNvPr id="14" name="TextBox 13"/>
-          <p:cNvSpPr txBox="1"/>
-          <p:nvPr/>
-        </p:nvSpPr>
-        <p:spPr>
-          <a:xfrm>
-            <a:off x="749808" y="6437376"/>
-            <a:ext cx="7772400" cy="274320"/>
-          </a:xfrm>
-          <a:prstGeom prst="rect">
-            <a:avLst/>
-          </a:prstGeom>
-          <a:noFill/>
-        </p:spPr>
-        <p:txBody>
-          <a:bodyPr wrap="square" anchor="t" lIns="0" rIns="0" tIns="0" bIns="0">
-            <a:spAutoFit/>
-          </a:bodyPr>
-          <a:lstStyle/>
-          <a:p>
-            <a:pPr algn="l"/>
-            <a:r>
-              <a:rPr sz="900" b="0">
-                <a:solidFill>
-                  <a:srgbClr val="6E6E6E"/>
-                </a:solidFill>
-                <a:latin typeface="Calibri"/>
-              </a:rPr>
-              <a:t>S13 — Herramientas para la Ciencia de Datos, UPC</a:t>
-            </a:r>
-          </a:p>
-        </p:txBody>
-      </p:sp>
-      <p:sp>
-        <p:nvSpPr>
-          <p:cNvPr id="15" name="TextBox 14"/>
-          <p:cNvSpPr txBox="1"/>
-          <p:nvPr/>
-        </p:nvSpPr>
-        <p:spPr>
-          <a:xfrm>
-            <a:off x="10180320" y="6437376"/>
-            <a:ext cx="1463040" cy="274320"/>
-          </a:xfrm>
-          <a:prstGeom prst="rect">
-            <a:avLst/>
-          </a:prstGeom>
-          <a:noFill/>
-        </p:spPr>
-        <p:txBody>
-          <a:bodyPr wrap="square" anchor="t" lIns="0" rIns="0" tIns="0" bIns="0">
-            <a:spAutoFit/>
-          </a:bodyPr>
-          <a:lstStyle/>
-          <a:p>
-            <a:pPr algn="r"/>
-            <a:r>
-              <a:rPr sz="900" b="0">
-                <a:solidFill>
-                  <a:srgbClr val="6E6E6E"/>
-                </a:solidFill>
-                <a:latin typeface="Calibri"/>
-              </a:rPr>
-              <a:t>12 / 23</a:t>
-            </a:r>
-          </a:p>
-        </p:txBody>
-      </p:sp>
     </p:spTree>
   </p:cSld>
   <p:clrMapOvr>
@@ -6180,7 +5990,7 @@
         <p:spPr>
           <a:xfrm>
             <a:off x="548640" y="411480"/>
-            <a:ext cx="11094720" cy="777240"/>
+            <a:ext cx="11094720" cy="292608"/>
           </a:xfrm>
           <a:prstGeom prst="rect">
             <a:avLst/>
@@ -6195,20 +6005,99 @@
           <a:p>
             <a:pPr algn="l"/>
             <a:r>
+              <a:rPr sz="1300" b="1">
+                <a:solidFill>
+                  <a:srgbClr val="9B1B30"/>
+                </a:solidFill>
+                <a:latin typeface="Calibri"/>
+              </a:rPr>
+              <a:t>DEFINICIONES, SEMIPARAMÉTRICO, COX (1972)</a:t>
+            </a:r>
+          </a:p>
+        </p:txBody>
+      </p:sp>
+      <p:sp>
+        <p:nvSpPr>
+          <p:cNvPr id="3" name="TextBox 2"/>
+          <p:cNvSpPr txBox="1"/>
+          <p:nvPr/>
+        </p:nvSpPr>
+        <p:spPr>
+          <a:xfrm>
+            <a:off x="548640" y="731520"/>
+            <a:ext cx="11094720" cy="777240"/>
+          </a:xfrm>
+          <a:prstGeom prst="rect">
+            <a:avLst/>
+          </a:prstGeom>
+          <a:noFill/>
+        </p:spPr>
+        <p:txBody>
+          <a:bodyPr wrap="square" anchor="t" lIns="0" rIns="0" tIns="0" bIns="0">
+            <a:spAutoFit/>
+          </a:bodyPr>
+          <a:lstStyle/>
+          <a:p>
+            <a:pPr algn="l"/>
+            <a:r>
               <a:rPr sz="4000" b="1">
                 <a:solidFill>
                   <a:srgbClr val="2D2D2D"/>
                 </a:solidFill>
                 <a:latin typeface="Calibri"/>
               </a:rPr>
-              <a:t>Con ayuda financiera se reincide menos: 78 % frente a 69 % a 52 semanas</a:t>
-            </a:r>
+              <a:t>La Cox convierte cada atributo en un hazard ratio</a:t>
+            </a:r>
+          </a:p>
+        </p:txBody>
+      </p:sp>
+      <p:sp>
+        <p:nvSpPr>
+          <p:cNvPr id="4" name="Oval 3"/>
+          <p:cNvSpPr/>
+          <p:nvPr/>
+        </p:nvSpPr>
+        <p:spPr>
+          <a:xfrm>
+            <a:off x="548640" y="2642616"/>
+            <a:ext cx="658368" cy="658368"/>
+          </a:xfrm>
+          <a:prstGeom prst="ellipse">
+            <a:avLst/>
+          </a:prstGeom>
+          <a:solidFill>
+            <a:srgbClr val="E4002B"/>
+          </a:solidFill>
+          <a:ln>
+            <a:noFill/>
+          </a:ln>
+          <a:effectLst/>
+        </p:spPr>
+        <p:style>
+          <a:lnRef idx="1">
+            <a:schemeClr val="accent1"/>
+          </a:lnRef>
+          <a:fillRef idx="3">
+            <a:schemeClr val="accent1"/>
+          </a:fillRef>
+          <a:effectRef idx="2">
+            <a:schemeClr val="accent1"/>
+          </a:effectRef>
+          <a:fontRef idx="minor">
+            <a:schemeClr val="lt1"/>
+          </a:fontRef>
+        </p:style>
+        <p:txBody>
+          <a:bodyPr rtlCol="0" anchor="ctr"/>
+          <a:lstStyle/>
+          <a:p>
+            <a:pPr algn="ctr"/>
           </a:p>
         </p:txBody>
       </p:sp>
       <p:pic>
         <p:nvPicPr>
-          <p:cNvPr id="3" name="Picture 2" descr="S13deck_km_rossi.png"/>
+          <p:cNvPr id="5" name="Picture 4" descr="workflow__FFFFFF.png"/>
           <p:cNvPicPr>
             <a:picLocks noChangeAspect="1"/>
           </p:cNvPicPr>
@@ -6222,8 +6111,8 @@
         </p:blipFill>
         <p:spPr>
           <a:xfrm>
-            <a:off x="548640" y="1828800"/>
-            <a:ext cx="6949440" cy="3903950"/>
+            <a:off x="732983" y="2826959"/>
+            <a:ext cx="289682" cy="289682"/>
           </a:xfrm>
           <a:prstGeom prst="rect">
             <a:avLst/>
@@ -6232,14 +6121,88 @@
       </p:pic>
       <p:sp>
         <p:nvSpPr>
-          <p:cNvPr id="4" name="Oval 3"/>
+          <p:cNvPr id="6" name="TextBox 5"/>
+          <p:cNvSpPr txBox="1"/>
+          <p:nvPr/>
+        </p:nvSpPr>
+        <p:spPr>
+          <a:xfrm>
+            <a:off x="1508760" y="1938528"/>
+            <a:ext cx="10134600" cy="411480"/>
+          </a:xfrm>
+          <a:prstGeom prst="rect">
+            <a:avLst/>
+          </a:prstGeom>
+          <a:noFill/>
+        </p:spPr>
+        <p:txBody>
+          <a:bodyPr wrap="square" anchor="t" lIns="0" rIns="0" tIns="0" bIns="0">
+            <a:spAutoFit/>
+          </a:bodyPr>
+          <a:lstStyle/>
+          <a:p>
+            <a:pPr algn="l"/>
+            <a:r>
+              <a:rPr sz="1800" b="1">
+                <a:solidFill>
+                  <a:srgbClr val="9B1B30"/>
+                </a:solidFill>
+                <a:latin typeface="Calibri"/>
+              </a:rPr>
+              <a:t>Regresión de Cox</a:t>
+            </a:r>
+          </a:p>
+        </p:txBody>
+      </p:sp>
+      <p:sp>
+        <p:nvSpPr>
+          <p:cNvPr id="7" name="TextBox 6"/>
+          <p:cNvSpPr txBox="1"/>
+          <p:nvPr/>
+        </p:nvSpPr>
+        <p:spPr>
+          <a:xfrm>
+            <a:off x="1508760" y="2395728"/>
+            <a:ext cx="10134600" cy="1645920"/>
+          </a:xfrm>
+          <a:prstGeom prst="rect">
+            <a:avLst/>
+          </a:prstGeom>
+          <a:noFill/>
+        </p:spPr>
+        <p:txBody>
+          <a:bodyPr wrap="square" anchor="t" lIns="0" rIns="0" tIns="0" bIns="0">
+            <a:spAutoFit/>
+          </a:bodyPr>
+          <a:lstStyle/>
+          <a:p>
+            <a:pPr algn="l">
+              <a:lnSpc>
+                <a:spcPct val="110000"/>
+              </a:lnSpc>
+            </a:pPr>
+            <a:r>
+              <a:rPr sz="1400" b="0">
+                <a:solidFill>
+                  <a:srgbClr val="2D2D2D"/>
+                </a:solidFill>
+                <a:latin typeface="Calibri"/>
+              </a:rPr>
+              <a:t>Modela h(t|x)=h₀(t)·exp(x'β): el hazard base queda libre y cada covariable multiplica el riesgo. Añade tiempo y censura a la logística.</a:t>
+            </a:r>
+          </a:p>
+        </p:txBody>
+      </p:sp>
+      <p:sp>
+        <p:nvSpPr>
+          <p:cNvPr id="8" name="Oval 7"/>
           <p:cNvSpPr/>
           <p:nvPr/>
         </p:nvSpPr>
         <p:spPr>
           <a:xfrm>
-            <a:off x="7955279" y="2011680"/>
-            <a:ext cx="548640" cy="548640"/>
+            <a:off x="548640" y="4928616"/>
+            <a:ext cx="658368" cy="658368"/>
           </a:xfrm>
           <a:prstGeom prst="ellipse">
             <a:avLst/>
@@ -6276,7 +6239,7 @@
       </p:sp>
       <p:pic>
         <p:nvPicPr>
-          <p:cNvPr id="5" name="Picture 4" descr="lightbulb__FFFFFF.png"/>
+          <p:cNvPr id="9" name="Picture 8" descr="gauge__FFFFFF.png"/>
           <p:cNvPicPr>
             <a:picLocks noChangeAspect="1"/>
           </p:cNvPicPr>
@@ -6290,8 +6253,8 @@
         </p:blipFill>
         <p:spPr>
           <a:xfrm>
-            <a:off x="8108898" y="2165299"/>
-            <a:ext cx="241402" cy="241402"/>
+            <a:off x="732983" y="5112959"/>
+            <a:ext cx="289682" cy="289682"/>
           </a:xfrm>
           <a:prstGeom prst="rect">
             <a:avLst/>
@@ -6300,14 +6263,14 @@
       </p:pic>
       <p:sp>
         <p:nvSpPr>
-          <p:cNvPr id="6" name="TextBox 5"/>
+          <p:cNvPr id="10" name="TextBox 9"/>
           <p:cNvSpPr txBox="1"/>
           <p:nvPr/>
         </p:nvSpPr>
         <p:spPr>
           <a:xfrm>
-            <a:off x="8686800" y="2057400"/>
-            <a:ext cx="2926080" cy="548640"/>
+            <a:off x="1508760" y="4224528"/>
+            <a:ext cx="10134600" cy="411480"/>
           </a:xfrm>
           <a:prstGeom prst="rect">
             <a:avLst/>
@@ -6322,27 +6285,27 @@
           <a:p>
             <a:pPr algn="l"/>
             <a:r>
-              <a:rPr sz="1500" b="1">
+              <a:rPr sz="1800" b="1">
                 <a:solidFill>
                   <a:srgbClr val="9B1B30"/>
                 </a:solidFill>
                 <a:latin typeface="Calibri"/>
               </a:rPr>
-              <a:t>Lectura de negocio</a:t>
-            </a:r>
-          </a:p>
-        </p:txBody>
-      </p:sp>
-      <p:sp>
-        <p:nvSpPr>
-          <p:cNvPr id="7" name="TextBox 6"/>
+              <a:t>Hazard ratio (HR = exp β)</a:t>
+            </a:r>
+          </a:p>
+        </p:txBody>
+      </p:sp>
+      <p:sp>
+        <p:nvSpPr>
+          <p:cNvPr id="11" name="TextBox 10"/>
           <p:cNvSpPr txBox="1"/>
           <p:nvPr/>
         </p:nvSpPr>
         <p:spPr>
           <a:xfrm>
-            <a:off x="7955279" y="2880360"/>
-            <a:ext cx="3657600" cy="3108960"/>
+            <a:off x="1508760" y="4681728"/>
+            <a:ext cx="10134600" cy="1645920"/>
           </a:xfrm>
           <a:prstGeom prst="rect">
             <a:avLst/>
@@ -6357,31 +6320,31 @@
           <a:p>
             <a:pPr algn="l">
               <a:lnSpc>
-                <a:spcPct val="125000"/>
+                <a:spcPct val="110000"/>
               </a:lnSpc>
             </a:pPr>
             <a:r>
-              <a:rPr sz="1500" b="0">
+              <a:rPr sz="1400" b="0">
                 <a:solidFill>
                   <a:srgbClr val="2D2D2D"/>
                 </a:solidFill>
                 <a:latin typeface="Calibri"/>
               </a:rPr>
-              <a:t>La curva con ayuda queda por encima toda la ventana. La brecha de S(52) es de 8 puntos; log-rank p ≈ 0,050.</a:t>
-            </a:r>
-          </a:p>
-        </p:txBody>
-      </p:sp>
-      <p:sp>
-        <p:nvSpPr>
-          <p:cNvPr id="8" name="TextBox 7"/>
+              <a:t>Factor que multiplica el hazard al subir la variable una unidad. &gt;1 riesgo, &lt;1 protector, =1 sin efecto.</a:t>
+            </a:r>
+          </a:p>
+        </p:txBody>
+      </p:sp>
+      <p:sp>
+        <p:nvSpPr>
+          <p:cNvPr id="12" name="TextBox 11"/>
           <p:cNvSpPr txBox="1"/>
           <p:nvPr/>
         </p:nvSpPr>
         <p:spPr>
           <a:xfrm>
-            <a:off x="548640" y="5961888"/>
-            <a:ext cx="11094720" cy="292608"/>
+            <a:off x="548640" y="5870448"/>
+            <a:ext cx="11064240" cy="320040"/>
           </a:xfrm>
           <a:prstGeom prst="rect">
             <a:avLst/>
@@ -6389,27 +6352,26 @@
           <a:noFill/>
         </p:spPr>
         <p:txBody>
-          <a:bodyPr wrap="square" anchor="t" lIns="0" rIns="0" tIns="0" bIns="0">
+          <a:bodyPr wrap="square">
             <a:spAutoFit/>
           </a:bodyPr>
           <a:lstStyle/>
           <a:p>
-            <a:pPr algn="l"/>
-            <a:r>
-              <a:rPr sz="1000" b="0">
+            <a:r>
+              <a:rPr sz="1000">
                 <a:solidFill>
                   <a:srgbClr val="6E6E6E"/>
                 </a:solidFill>
                 <a:latin typeface="Calibri"/>
               </a:rPr>
-              <a:t>Réplica Cox/Rossi, KM por fin, S(52) 0,78 (con) vs. 0,69 (sin), log-rank p 0,050, venv/Excel (km_rossi_fin, survival).</a:t>
-            </a:r>
-          </a:p>
-        </p:txBody>
-      </p:sp>
-      <p:sp>
-        <p:nvSpPr>
-          <p:cNvPr id="9" name="Oval 8"/>
+              <a:t>DEFINICIONES puntos 7, 8, Cox (1972), JRSS-B 34(2):187-220; Therneau &amp; Grambsch (2000). Verosimilitud parcial: β sin modelar h₀(t).</a:t>
+            </a:r>
+          </a:p>
+        </p:txBody>
+      </p:sp>
+      <p:sp>
+        <p:nvSpPr>
+          <p:cNvPr id="13" name="Oval 12"/>
           <p:cNvSpPr/>
           <p:nvPr/>
         </p:nvSpPr>
@@ -6453,7 +6415,7 @@
       </p:sp>
       <p:sp>
         <p:nvSpPr>
-          <p:cNvPr id="10" name="TextBox 9"/>
+          <p:cNvPr id="14" name="TextBox 13"/>
           <p:cNvSpPr txBox="1"/>
           <p:nvPr/>
         </p:nvSpPr>
@@ -6488,7 +6450,7 @@
       </p:sp>
       <p:sp>
         <p:nvSpPr>
-          <p:cNvPr id="11" name="TextBox 10"/>
+          <p:cNvPr id="15" name="TextBox 14"/>
           <p:cNvSpPr txBox="1"/>
           <p:nvPr/>
         </p:nvSpPr>
@@ -6516,7 +6478,7 @@
                 </a:solidFill>
                 <a:latin typeface="Calibri"/>
               </a:rPr>
-              <a:t>13 / 23</a:t>
+              <a:t>13 / 17</a:t>
             </a:r>
           </a:p>
         </p:txBody>
@@ -6535,7 +6497,7 @@
     <p:bg>
       <p:bgPr>
         <a:solidFill>
-          <a:srgbClr val="9B1B30"/>
+          <a:srgbClr val="FFFFFF"/>
         </a:solidFill>
         <a:effectLst/>
       </p:bgPr>
@@ -6549,20 +6511,440 @@
       <p:grpSpPr/>
       <p:sp>
         <p:nvSpPr>
-          <p:cNvPr id="2" name="Oval 1"/>
+          <p:cNvPr id="2" name="TextBox 1"/>
+          <p:cNvSpPr txBox="1"/>
+          <p:nvPr/>
+        </p:nvSpPr>
+        <p:spPr>
+          <a:xfrm>
+            <a:off x="548640" y="411480"/>
+            <a:ext cx="11094720" cy="292608"/>
+          </a:xfrm>
+          <a:prstGeom prst="rect">
+            <a:avLst/>
+          </a:prstGeom>
+          <a:noFill/>
+        </p:spPr>
+        <p:txBody>
+          <a:bodyPr wrap="square" anchor="t" lIns="0" rIns="0" tIns="0" bIns="0">
+            <a:spAutoFit/>
+          </a:bodyPr>
+          <a:lstStyle/>
+          <a:p>
+            <a:pPr algn="l"/>
+            <a:r>
+              <a:rPr sz="1300" b="1">
+                <a:solidFill>
+                  <a:srgbClr val="9B1B30"/>
+                </a:solidFill>
+                <a:latin typeface="Calibri"/>
+              </a:rPr>
+              <a:t>ASÍ SE HACE, LIFELINES, COXPHFITTER().FIT</a:t>
+            </a:r>
+          </a:p>
+        </p:txBody>
+      </p:sp>
+      <p:sp>
+        <p:nvSpPr>
+          <p:cNvPr id="3" name="TextBox 2"/>
+          <p:cNvSpPr txBox="1"/>
+          <p:nvPr/>
+        </p:nvSpPr>
+        <p:spPr>
+          <a:xfrm>
+            <a:off x="548640" y="731520"/>
+            <a:ext cx="11094720" cy="777240"/>
+          </a:xfrm>
+          <a:prstGeom prst="rect">
+            <a:avLst/>
+          </a:prstGeom>
+          <a:noFill/>
+        </p:spPr>
+        <p:txBody>
+          <a:bodyPr wrap="square" anchor="t" lIns="0" rIns="0" tIns="0" bIns="0">
+            <a:spAutoFit/>
+          </a:bodyPr>
+          <a:lstStyle/>
+          <a:p>
+            <a:pPr algn="l"/>
+            <a:r>
+              <a:rPr sz="4000" b="1">
+                <a:solidFill>
+                  <a:srgbClr val="2D2D2D"/>
+                </a:solidFill>
+                <a:latin typeface="Calibri"/>
+              </a:rPr>
+              <a:t>Ajustar la Cox son dos líneas: fit y hazard ratio</a:t>
+            </a:r>
+          </a:p>
+        </p:txBody>
+      </p:sp>
+      <p:sp>
+        <p:nvSpPr>
+          <p:cNvPr id="4" name="TextBox 3"/>
+          <p:cNvSpPr txBox="1"/>
+          <p:nvPr/>
+        </p:nvSpPr>
+        <p:spPr>
+          <a:xfrm>
+            <a:off x="548640" y="1755648"/>
+            <a:ext cx="11094720" cy="457200"/>
+          </a:xfrm>
+          <a:prstGeom prst="rect">
+            <a:avLst/>
+          </a:prstGeom>
+          <a:noFill/>
+        </p:spPr>
+        <p:txBody>
+          <a:bodyPr wrap="square" lIns="0" tIns="0" bIns="0">
+            <a:spAutoFit/>
+          </a:bodyPr>
+          <a:lstStyle/>
+          <a:p>
+            <a:r>
+              <a:rPr sz="1400" b="1">
+                <a:solidFill>
+                  <a:srgbClr val="9B1B30"/>
+                </a:solidFill>
+                <a:latin typeface="Calibri"/>
+              </a:rPr>
+              <a:t>▸ Qué hace:  </a:t>
+            </a:r>
+            <a:r>
+              <a:rPr sz="1400">
+                <a:solidFill>
+                  <a:srgbClr val="2D2D2D"/>
+                </a:solidFill>
+                <a:latin typeface="Calibri"/>
+              </a:rPr>
+              <a:t>ajusta la Cox por verosimilitud parcial; cada covariable se vuelve un hazard ratio HR=exp(β).</a:t>
+            </a:r>
+          </a:p>
+        </p:txBody>
+      </p:sp>
+      <p:sp>
+        <p:nvSpPr>
+          <p:cNvPr id="5" name="Rounded Rectangle 4"/>
           <p:cNvSpPr/>
           <p:nvPr/>
         </p:nvSpPr>
         <p:spPr>
           <a:xfrm>
-            <a:off x="914400" y="2103120"/>
-            <a:ext cx="2377440" cy="2377440"/>
+            <a:off x="548640" y="2395728"/>
+            <a:ext cx="11094720" cy="2980944"/>
+          </a:xfrm>
+          <a:prstGeom prst="roundRect">
+            <a:avLst/>
+          </a:prstGeom>
+          <a:solidFill>
+            <a:srgbClr val="F4F4F4"/>
+          </a:solidFill>
+          <a:ln w="9525">
+            <a:solidFill>
+              <a:srgbClr val="DDDDDD"/>
+            </a:solidFill>
+          </a:ln>
+          <a:effectLst/>
+        </p:spPr>
+        <p:style>
+          <a:lnRef idx="1">
+            <a:schemeClr val="accent1"/>
+          </a:lnRef>
+          <a:fillRef idx="3">
+            <a:schemeClr val="accent1"/>
+          </a:fillRef>
+          <a:effectRef idx="2">
+            <a:schemeClr val="accent1"/>
+          </a:effectRef>
+          <a:fontRef idx="minor">
+            <a:schemeClr val="lt1"/>
+          </a:fontRef>
+        </p:style>
+        <p:txBody>
+          <a:bodyPr rtlCol="0" anchor="ctr"/>
+          <a:lstStyle/>
+          <a:p>
+            <a:pPr algn="ctr"/>
+          </a:p>
+        </p:txBody>
+      </p:sp>
+      <p:sp>
+        <p:nvSpPr>
+          <p:cNvPr id="6" name="TextBox 5"/>
+          <p:cNvSpPr txBox="1"/>
+          <p:nvPr/>
+        </p:nvSpPr>
+        <p:spPr>
+          <a:xfrm>
+            <a:off x="804672" y="2542032"/>
+            <a:ext cx="10637520" cy="256032"/>
+          </a:xfrm>
+          <a:prstGeom prst="rect">
+            <a:avLst/>
+          </a:prstGeom>
+          <a:noFill/>
+        </p:spPr>
+        <p:txBody>
+          <a:bodyPr wrap="none" lIns="0" tIns="0" bIns="0">
+            <a:spAutoFit/>
+          </a:bodyPr>
+          <a:lstStyle/>
+          <a:p>
+            <a:r>
+              <a:rPr sz="1050" b="1">
+                <a:solidFill>
+                  <a:srgbClr val="9B1B30"/>
+                </a:solidFill>
+                <a:latin typeface="Calibri"/>
+              </a:rPr>
+              <a:t>CÓDIGO REAL DEL CUADERNO</a:t>
+            </a:r>
+          </a:p>
+        </p:txBody>
+      </p:sp>
+      <p:sp>
+        <p:nvSpPr>
+          <p:cNvPr id="7" name="TextBox 6"/>
+          <p:cNvSpPr txBox="1"/>
+          <p:nvPr/>
+        </p:nvSpPr>
+        <p:spPr>
+          <a:xfrm>
+            <a:off x="859536" y="2926080"/>
+            <a:ext cx="10472928" cy="2377440"/>
+          </a:xfrm>
+          <a:prstGeom prst="rect">
+            <a:avLst/>
+          </a:prstGeom>
+          <a:noFill/>
+        </p:spPr>
+        <p:txBody>
+          <a:bodyPr wrap="square" lIns="0" tIns="0" bIns="0">
+            <a:spAutoFit/>
+          </a:bodyPr>
+          <a:lstStyle/>
+          <a:p>
+            <a:pPr>
+              <a:lnSpc>
+                <a:spcPct val="130000"/>
+              </a:lnSpc>
+              <a:spcAft>
+                <a:spcPts val="400"/>
+              </a:spcAft>
+            </a:pPr>
+            <a:r>
+              <a:rPr sz="1200">
+                <a:solidFill>
+                  <a:srgbClr val="2D2D2D"/>
+                </a:solidFill>
+                <a:latin typeface="Consolas"/>
+              </a:rPr>
+              <a:t>from lifelines import CoxPHFitter</a:t>
+            </a:r>
+          </a:p>
+          <a:p>
+            <a:pPr>
+              <a:lnSpc>
+                <a:spcPct val="130000"/>
+              </a:lnSpc>
+              <a:spcAft>
+                <a:spcPts val="400"/>
+              </a:spcAft>
+            </a:pPr>
+            <a:r>
+              <a:rPr sz="1200">
+                <a:solidFill>
+                  <a:srgbClr val="2D2D2D"/>
+                </a:solidFill>
+                <a:latin typeface="Consolas"/>
+              </a:rPr>
+              <a:t/>
+            </a:r>
+          </a:p>
+          <a:p>
+            <a:pPr>
+              <a:lnSpc>
+                <a:spcPct val="130000"/>
+              </a:lnSpc>
+              <a:spcAft>
+                <a:spcPts val="400"/>
+              </a:spcAft>
+            </a:pPr>
+            <a:r>
+              <a:rPr sz="1200">
+                <a:solidFill>
+                  <a:srgbClr val="2D2D2D"/>
+                </a:solidFill>
+                <a:latin typeface="Consolas"/>
+              </a:rPr>
+              <a:t>cph = CoxPHFitter().fit(rossi, duration_col="week", event_col="arrest")</a:t>
+            </a:r>
+          </a:p>
+          <a:p>
+            <a:pPr>
+              <a:lnSpc>
+                <a:spcPct val="130000"/>
+              </a:lnSpc>
+              <a:spcAft>
+                <a:spcPts val="400"/>
+              </a:spcAft>
+            </a:pPr>
+            <a:r>
+              <a:rPr sz="1200">
+                <a:solidFill>
+                  <a:srgbClr val="2D2D2D"/>
+                </a:solidFill>
+                <a:latin typeface="Consolas"/>
+              </a:rPr>
+              <a:t>print(cph.summary[["exp(coef)", "p"]].round(4).to_string())</a:t>
+            </a:r>
+          </a:p>
+          <a:p>
+            <a:pPr>
+              <a:lnSpc>
+                <a:spcPct val="130000"/>
+              </a:lnSpc>
+              <a:spcAft>
+                <a:spcPts val="400"/>
+              </a:spcAft>
+            </a:pPr>
+            <a:r>
+              <a:rPr sz="1200">
+                <a:solidFill>
+                  <a:srgbClr val="2D2D2D"/>
+                </a:solidFill>
+                <a:latin typeface="Consolas"/>
+              </a:rPr>
+              <a:t>print(f"C-index = {cph.concordance_index_:.4f}")</a:t>
+            </a:r>
+          </a:p>
+          <a:p>
+            <a:pPr>
+              <a:lnSpc>
+                <a:spcPct val="130000"/>
+              </a:lnSpc>
+              <a:spcAft>
+                <a:spcPts val="400"/>
+              </a:spcAft>
+            </a:pPr>
+            <a:r>
+              <a:rPr sz="1200">
+                <a:solidFill>
+                  <a:srgbClr val="2D2D2D"/>
+                </a:solidFill>
+                <a:latin typeface="Consolas"/>
+              </a:rPr>
+              <a:t># HR:  fin 0,68 ,  age 0,94 ,  prio 1,10     |     C-index 0,64</a:t>
+            </a:r>
+          </a:p>
+        </p:txBody>
+      </p:sp>
+      <p:sp>
+        <p:nvSpPr>
+          <p:cNvPr id="8" name="TextBox 7"/>
+          <p:cNvSpPr txBox="1"/>
+          <p:nvPr/>
+        </p:nvSpPr>
+        <p:spPr>
+          <a:xfrm>
+            <a:off x="548640" y="5961888"/>
+            <a:ext cx="11094720" cy="292608"/>
+          </a:xfrm>
+          <a:prstGeom prst="rect">
+            <a:avLst/>
+          </a:prstGeom>
+          <a:noFill/>
+        </p:spPr>
+        <p:txBody>
+          <a:bodyPr wrap="square" anchor="t" lIns="0" rIns="0" tIns="0" bIns="0">
+            <a:spAutoFit/>
+          </a:bodyPr>
+          <a:lstStyle/>
+          <a:p>
+            <a:pPr algn="l"/>
+            <a:r>
+              <a:rPr sz="1000" b="0">
+                <a:solidFill>
+                  <a:srgbClr val="6E6E6E"/>
+                </a:solidFill>
+                <a:latin typeface="Calibri"/>
+              </a:rPr>
+              <a:t>notebook Sección 2, Cox sobre Rossi, exp(coef) → survival!B2-B4 y hoja cox_rossi, C-index survival!B15 — venv/Excel.</a:t>
+            </a:r>
+          </a:p>
+        </p:txBody>
+      </p:sp>
+      <p:sp>
+        <p:nvSpPr>
+          <p:cNvPr id="9" name="Rounded Rectangle 8"/>
+          <p:cNvSpPr/>
+          <p:nvPr/>
+        </p:nvSpPr>
+        <p:spPr>
+          <a:xfrm>
+            <a:off x="9098280" y="310896"/>
+            <a:ext cx="2560320" cy="402336"/>
+          </a:xfrm>
+          <a:prstGeom prst="roundRect">
+            <a:avLst/>
+          </a:prstGeom>
+          <a:solidFill>
+            <a:srgbClr val="FCEDEE"/>
+          </a:solidFill>
+          <a:ln w="15875">
+            <a:solidFill>
+              <a:srgbClr val="E4002B"/>
+            </a:solidFill>
+          </a:ln>
+          <a:effectLst/>
+        </p:spPr>
+        <p:style>
+          <a:lnRef idx="1">
+            <a:schemeClr val="accent1"/>
+          </a:lnRef>
+          <a:fillRef idx="3">
+            <a:schemeClr val="accent1"/>
+          </a:fillRef>
+          <a:effectRef idx="2">
+            <a:schemeClr val="accent1"/>
+          </a:effectRef>
+          <a:fontRef idx="minor">
+            <a:schemeClr val="lt1"/>
+          </a:fontRef>
+        </p:style>
+        <p:txBody>
+          <a:bodyPr rtlCol="0" anchor="ctr" lIns="54864" rIns="54864" tIns="0" bIns="0"/>
+          <a:lstStyle/>
+          <a:p>
+            <a:pPr algn="ctr"/>
+            <a:r>
+              <a:rPr sz="1300" b="1">
+                <a:solidFill>
+                  <a:srgbClr val="9B1B30"/>
+                </a:solidFill>
+                <a:latin typeface="Calibri"/>
+              </a:rPr>
+              <a:t>▶  Notebook, celda 9</a:t>
+            </a:r>
+          </a:p>
+        </p:txBody>
+      </p:sp>
+      <p:sp>
+        <p:nvSpPr>
+          <p:cNvPr id="10" name="Oval 9"/>
+          <p:cNvSpPr/>
+          <p:nvPr/>
+        </p:nvSpPr>
+        <p:spPr>
+          <a:xfrm>
+            <a:off x="548640" y="6473952"/>
+            <a:ext cx="100584" cy="100584"/>
           </a:xfrm>
           <a:prstGeom prst="ellipse">
             <a:avLst/>
           </a:prstGeom>
           <a:solidFill>
-            <a:srgbClr val="FFFFFF"/>
+            <a:srgbClr val="E4002B"/>
           </a:solidFill>
           <a:ln>
             <a:noFill/>
@@ -6584,32 +6966,23 @@
           </a:fontRef>
         </p:style>
         <p:txBody>
-          <a:bodyPr rtlCol="0" anchor="ctr" lIns="0" rIns="0" tIns="0" bIns="0"/>
+          <a:bodyPr rtlCol="0" anchor="ctr"/>
           <a:lstStyle/>
           <a:p>
             <a:pPr algn="ctr"/>
-            <a:r>
-              <a:rPr sz="10000" b="1">
-                <a:solidFill>
-                  <a:srgbClr val="9B1B30"/>
-                </a:solidFill>
-                <a:latin typeface="Calibri"/>
-              </a:rPr>
-              <a:t>4</a:t>
-            </a:r>
-          </a:p>
-        </p:txBody>
-      </p:sp>
-      <p:sp>
-        <p:nvSpPr>
-          <p:cNvPr id="3" name="TextBox 2"/>
+          </a:p>
+        </p:txBody>
+      </p:sp>
+      <p:sp>
+        <p:nvSpPr>
+          <p:cNvPr id="11" name="TextBox 10"/>
           <p:cNvSpPr txBox="1"/>
           <p:nvPr/>
         </p:nvSpPr>
         <p:spPr>
           <a:xfrm>
-            <a:off x="3931920" y="2651760"/>
-            <a:ext cx="7589520" cy="1371600"/>
+            <a:off x="749808" y="6437376"/>
+            <a:ext cx="7772400" cy="274320"/>
           </a:xfrm>
           <a:prstGeom prst="rect">
             <a:avLst/>
@@ -6624,27 +6997,27 @@
           <a:p>
             <a:pPr algn="l"/>
             <a:r>
-              <a:rPr sz="4000" b="1">
-                <a:solidFill>
-                  <a:srgbClr val="FFFFFF"/>
-                </a:solidFill>
-                <a:latin typeface="Calibri"/>
-              </a:rPr>
-              <a:t>¿Cómo se mide el efecto de una variable sobre el tiempo?</a:t>
-            </a:r>
-          </a:p>
-        </p:txBody>
-      </p:sp>
-      <p:sp>
-        <p:nvSpPr>
-          <p:cNvPr id="4" name="TextBox 3"/>
+              <a:rPr sz="900" b="0">
+                <a:solidFill>
+                  <a:srgbClr val="6E6E6E"/>
+                </a:solidFill>
+                <a:latin typeface="Calibri"/>
+              </a:rPr>
+              <a:t>S13 — Herramientas para la Ciencia de Datos, UPC</a:t>
+            </a:r>
+          </a:p>
+        </p:txBody>
+      </p:sp>
+      <p:sp>
+        <p:nvSpPr>
+          <p:cNvPr id="12" name="TextBox 11"/>
           <p:cNvSpPr txBox="1"/>
           <p:nvPr/>
         </p:nvSpPr>
         <p:spPr>
           <a:xfrm>
-            <a:off x="3931920" y="3977639"/>
-            <a:ext cx="7589520" cy="914400"/>
+            <a:off x="10180320" y="6437376"/>
+            <a:ext cx="1463040" cy="274320"/>
           </a:xfrm>
           <a:prstGeom prst="rect">
             <a:avLst/>
@@ -6657,15 +7030,15 @@
           </a:bodyPr>
           <a:lstStyle/>
           <a:p>
-            <a:pPr algn="l"/>
-            <a:r>
-              <a:rPr sz="1700" b="0">
-                <a:solidFill>
-                  <a:srgbClr val="FCEDEE"/>
-                </a:solidFill>
-                <a:latin typeface="Calibri"/>
-              </a:rPr>
-              <a:t>Capítulo 13.4 — jueves, bloques A1 y A2</a:t>
+            <a:pPr algn="r"/>
+            <a:r>
+              <a:rPr sz="900" b="0">
+                <a:solidFill>
+                  <a:srgbClr val="6E6E6E"/>
+                </a:solidFill>
+                <a:latin typeface="Calibri"/>
+              </a:rPr>
+              <a:t>14 / 17</a:t>
             </a:r>
           </a:p>
         </p:txBody>
@@ -6705,7 +7078,7 @@
         <p:spPr>
           <a:xfrm>
             <a:off x="548640" y="411480"/>
-            <a:ext cx="11094720" cy="292608"/>
+            <a:ext cx="11094720" cy="777240"/>
           </a:xfrm>
           <a:prstGeom prst="rect">
             <a:avLst/>
@@ -6720,52 +7093,41 @@
           <a:p>
             <a:pPr algn="l"/>
             <a:r>
-              <a:rPr sz="1300" b="1">
-                <a:solidFill>
-                  <a:srgbClr val="9B1B30"/>
-                </a:solidFill>
-                <a:latin typeface="Calibri"/>
-              </a:rPr>
-              <a:t>DEFINICIONES, SEMIPARAMÉTRICO, COX (1972)</a:t>
-            </a:r>
-          </a:p>
-        </p:txBody>
-      </p:sp>
-      <p:sp>
-        <p:nvSpPr>
-          <p:cNvPr id="3" name="TextBox 2"/>
-          <p:cNvSpPr txBox="1"/>
-          <p:nvPr/>
-        </p:nvSpPr>
-        <p:spPr>
-          <a:xfrm>
-            <a:off x="548640" y="731520"/>
-            <a:ext cx="11094720" cy="777240"/>
-          </a:xfrm>
-          <a:prstGeom prst="rect">
-            <a:avLst/>
-          </a:prstGeom>
-          <a:noFill/>
-        </p:spPr>
-        <p:txBody>
-          <a:bodyPr wrap="square" anchor="t" lIns="0" rIns="0" tIns="0" bIns="0">
-            <a:spAutoFit/>
-          </a:bodyPr>
-          <a:lstStyle/>
-          <a:p>
-            <a:pPr algn="l"/>
-            <a:r>
               <a:rPr sz="4000" b="1">
                 <a:solidFill>
                   <a:srgbClr val="2D2D2D"/>
                 </a:solidFill>
                 <a:latin typeface="Calibri"/>
               </a:rPr>
-              <a:t>La Cox convierte cada atributo en un hazard ratio</a:t>
-            </a:r>
-          </a:p>
-        </p:txBody>
-      </p:sp>
+              <a:t>La ayuda financiera baja el riesgo 32 %; cada antecedente lo sube 10 %</a:t>
+            </a:r>
+          </a:p>
+        </p:txBody>
+      </p:sp>
+      <p:pic>
+        <p:nvPicPr>
+          <p:cNvPr id="3" name="Picture 2" descr="S13deck_forest.png"/>
+          <p:cNvPicPr>
+            <a:picLocks noChangeAspect="1"/>
+          </p:cNvPicPr>
+          <p:nvPr/>
+        </p:nvPicPr>
+        <p:blipFill>
+          <a:blip r:embed="rId2"/>
+          <a:stretch>
+            <a:fillRect/>
+          </a:stretch>
+        </p:blipFill>
+        <p:spPr>
+          <a:xfrm>
+            <a:off x="548640" y="1828800"/>
+            <a:ext cx="6949440" cy="4032327"/>
+          </a:xfrm>
+          <a:prstGeom prst="rect">
+            <a:avLst/>
+          </a:prstGeom>
+        </p:spPr>
+      </p:pic>
       <p:sp>
         <p:nvSpPr>
           <p:cNvPr id="4" name="Oval 3"/>
@@ -6774,8 +7136,8 @@
         </p:nvSpPr>
         <p:spPr>
           <a:xfrm>
-            <a:off x="548640" y="2642616"/>
-            <a:ext cx="658368" cy="658368"/>
+            <a:off x="7955279" y="2011680"/>
+            <a:ext cx="548640" cy="548640"/>
           </a:xfrm>
           <a:prstGeom prst="ellipse">
             <a:avLst/>
@@ -6812,22 +7174,22 @@
       </p:sp>
       <p:pic>
         <p:nvPicPr>
-          <p:cNvPr id="5" name="Picture 4" descr="workflow__FFFFFF.png"/>
+          <p:cNvPr id="5" name="Picture 4" descr="lightbulb__FFFFFF.png"/>
           <p:cNvPicPr>
             <a:picLocks noChangeAspect="1"/>
           </p:cNvPicPr>
           <p:nvPr/>
         </p:nvPicPr>
         <p:blipFill>
-          <a:blip r:embed="rId2"/>
+          <a:blip r:embed="rId3"/>
           <a:stretch>
             <a:fillRect/>
           </a:stretch>
         </p:blipFill>
         <p:spPr>
           <a:xfrm>
-            <a:off x="732983" y="2826959"/>
-            <a:ext cx="289682" cy="289682"/>
+            <a:off x="8108898" y="2165299"/>
+            <a:ext cx="241402" cy="241402"/>
           </a:xfrm>
           <a:prstGeom prst="rect">
             <a:avLst/>
@@ -6842,8 +7204,8 @@
         </p:nvSpPr>
         <p:spPr>
           <a:xfrm>
-            <a:off x="1508760" y="1938528"/>
-            <a:ext cx="10134600" cy="411480"/>
+            <a:off x="8686800" y="2057400"/>
+            <a:ext cx="2926080" cy="548640"/>
           </a:xfrm>
           <a:prstGeom prst="rect">
             <a:avLst/>
@@ -6858,13 +7220,13 @@
           <a:p>
             <a:pPr algn="l"/>
             <a:r>
-              <a:rPr sz="1800" b="1">
+              <a:rPr sz="1500" b="1">
                 <a:solidFill>
                   <a:srgbClr val="9B1B30"/>
                 </a:solidFill>
                 <a:latin typeface="Calibri"/>
               </a:rPr>
-              <a:t>Regresión de Cox</a:t>
+              <a:t>Lectura de negocio</a:t>
             </a:r>
           </a:p>
         </p:txBody>
@@ -6877,8 +7239,8 @@
         </p:nvSpPr>
         <p:spPr>
           <a:xfrm>
-            <a:off x="1508760" y="2395728"/>
-            <a:ext cx="10134600" cy="1645920"/>
+            <a:off x="7955279" y="2880360"/>
+            <a:ext cx="3657600" cy="3108960"/>
           </a:xfrm>
           <a:prstGeom prst="rect">
             <a:avLst/>
@@ -6893,31 +7255,66 @@
           <a:p>
             <a:pPr algn="l">
               <a:lnSpc>
-                <a:spcPct val="110000"/>
+                <a:spcPct val="125000"/>
               </a:lnSpc>
             </a:pPr>
             <a:r>
-              <a:rPr sz="1400" b="0">
+              <a:rPr sz="1500" b="0">
                 <a:solidFill>
                   <a:srgbClr val="2D2D2D"/>
                 </a:solidFill>
                 <a:latin typeface="Calibri"/>
               </a:rPr>
-              <a:t>Modela h(t|x)=h₀(t)·exp(x'β): el hazard base queda libre y cada covariable multiplica el riesgo. Añade tiempo y censura a la logística.</a:t>
-            </a:r>
-          </a:p>
-        </p:txBody>
-      </p:sp>
-      <p:sp>
-        <p:nvSpPr>
-          <p:cNvPr id="8" name="Oval 7"/>
+              <a:t>Solo fin, age y prio son significativos (IC no cruza 1). fin HR 0,68, age 0,94, prio 1,10.</a:t>
+            </a:r>
+          </a:p>
+        </p:txBody>
+      </p:sp>
+      <p:sp>
+        <p:nvSpPr>
+          <p:cNvPr id="8" name="TextBox 7"/>
+          <p:cNvSpPr txBox="1"/>
+          <p:nvPr/>
+        </p:nvSpPr>
+        <p:spPr>
+          <a:xfrm>
+            <a:off x="548640" y="5961888"/>
+            <a:ext cx="11094720" cy="292608"/>
+          </a:xfrm>
+          <a:prstGeom prst="rect">
+            <a:avLst/>
+          </a:prstGeom>
+          <a:noFill/>
+        </p:spPr>
+        <p:txBody>
+          <a:bodyPr wrap="square" anchor="t" lIns="0" rIns="0" tIns="0" bIns="0">
+            <a:spAutoFit/>
+          </a:bodyPr>
+          <a:lstStyle/>
+          <a:p>
+            <a:pPr algn="l"/>
+            <a:r>
+              <a:rPr sz="1000" b="0">
+                <a:solidFill>
+                  <a:srgbClr val="6E6E6E"/>
+                </a:solidFill>
+                <a:latin typeface="Calibri"/>
+              </a:rPr>
+              <a:t>Réplica Cox/Rossi, exp(coef) con IC 95 %, fin 0,68 / age 0,94 / prio 1,10 — concordancia 0,64 — venv/Excel (cox_rossi).</a:t>
+            </a:r>
+          </a:p>
+        </p:txBody>
+      </p:sp>
+      <p:sp>
+        <p:nvSpPr>
+          <p:cNvPr id="9" name="Oval 8"/>
           <p:cNvSpPr/>
           <p:nvPr/>
         </p:nvSpPr>
         <p:spPr>
           <a:xfrm>
-            <a:off x="548640" y="4928616"/>
-            <a:ext cx="658368" cy="658368"/>
+            <a:off x="548640" y="6473952"/>
+            <a:ext cx="100584" cy="100584"/>
           </a:xfrm>
           <a:prstGeom prst="ellipse">
             <a:avLst/>
@@ -6952,30 +7349,6 @@
           </a:p>
         </p:txBody>
       </p:sp>
-      <p:pic>
-        <p:nvPicPr>
-          <p:cNvPr id="9" name="Picture 8" descr="gauge__FFFFFF.png"/>
-          <p:cNvPicPr>
-            <a:picLocks noChangeAspect="1"/>
-          </p:cNvPicPr>
-          <p:nvPr/>
-        </p:nvPicPr>
-        <p:blipFill>
-          <a:blip r:embed="rId3"/>
-          <a:stretch>
-            <a:fillRect/>
-          </a:stretch>
-        </p:blipFill>
-        <p:spPr>
-          <a:xfrm>
-            <a:off x="732983" y="5112959"/>
-            <a:ext cx="289682" cy="289682"/>
-          </a:xfrm>
-          <a:prstGeom prst="rect">
-            <a:avLst/>
-          </a:prstGeom>
-        </p:spPr>
-      </p:pic>
       <p:sp>
         <p:nvSpPr>
           <p:cNvPr id="10" name="TextBox 9"/>
@@ -6984,8 +7357,8 @@
         </p:nvSpPr>
         <p:spPr>
           <a:xfrm>
-            <a:off x="1508760" y="4224528"/>
-            <a:ext cx="10134600" cy="411480"/>
+            <a:off x="749808" y="6437376"/>
+            <a:ext cx="7772400" cy="274320"/>
           </a:xfrm>
           <a:prstGeom prst="rect">
             <a:avLst/>
@@ -7000,13 +7373,13 @@
           <a:p>
             <a:pPr algn="l"/>
             <a:r>
-              <a:rPr sz="1800" b="1">
-                <a:solidFill>
-                  <a:srgbClr val="9B1B30"/>
-                </a:solidFill>
-                <a:latin typeface="Calibri"/>
-              </a:rPr>
-              <a:t>Hazard ratio (HR = exp β)</a:t>
+              <a:rPr sz="900" b="0">
+                <a:solidFill>
+                  <a:srgbClr val="6E6E6E"/>
+                </a:solidFill>
+                <a:latin typeface="Calibri"/>
+              </a:rPr>
+              <a:t>S13 — Herramientas para la Ciencia de Datos, UPC</a:t>
             </a:r>
           </a:p>
         </p:txBody>
@@ -7019,8 +7392,8 @@
         </p:nvSpPr>
         <p:spPr>
           <a:xfrm>
-            <a:off x="1508760" y="4681728"/>
-            <a:ext cx="10134600" cy="1645920"/>
+            <a:off x="10180320" y="6437376"/>
+            <a:ext cx="1463040" cy="274320"/>
           </a:xfrm>
           <a:prstGeom prst="rect">
             <a:avLst/>
@@ -7033,167 +7406,15 @@
           </a:bodyPr>
           <a:lstStyle/>
           <a:p>
-            <a:pPr algn="l">
-              <a:lnSpc>
-                <a:spcPct val="110000"/>
-              </a:lnSpc>
-            </a:pPr>
-            <a:r>
-              <a:rPr sz="1400" b="0">
-                <a:solidFill>
-                  <a:srgbClr val="2D2D2D"/>
-                </a:solidFill>
-                <a:latin typeface="Calibri"/>
-              </a:rPr>
-              <a:t>Factor que multiplica el hazard al subir la variable una unidad. &gt;1 riesgo, &lt;1 protector, =1 sin efecto.</a:t>
-            </a:r>
-          </a:p>
-        </p:txBody>
-      </p:sp>
-      <p:sp>
-        <p:nvSpPr>
-          <p:cNvPr id="12" name="TextBox 11"/>
-          <p:cNvSpPr txBox="1"/>
-          <p:nvPr/>
-        </p:nvSpPr>
-        <p:spPr>
-          <a:xfrm>
-            <a:off x="548640" y="5870448"/>
-            <a:ext cx="11064240" cy="320040"/>
-          </a:xfrm>
-          <a:prstGeom prst="rect">
-            <a:avLst/>
-          </a:prstGeom>
-          <a:noFill/>
-        </p:spPr>
-        <p:txBody>
-          <a:bodyPr wrap="square">
-            <a:spAutoFit/>
-          </a:bodyPr>
-          <a:lstStyle/>
-          <a:p>
-            <a:r>
-              <a:rPr sz="1000">
+            <a:pPr algn="r"/>
+            <a:r>
+              <a:rPr sz="900" b="0">
                 <a:solidFill>
                   <a:srgbClr val="6E6E6E"/>
                 </a:solidFill>
                 <a:latin typeface="Calibri"/>
               </a:rPr>
-              <a:t>DEFINICIONES puntos 7, 8, Cox (1972), JRSS-B 34(2):187-220; Therneau &amp; Grambsch (2000). Verosimilitud parcial: β sin modelar h₀(t).</a:t>
-            </a:r>
-          </a:p>
-        </p:txBody>
-      </p:sp>
-      <p:sp>
-        <p:nvSpPr>
-          <p:cNvPr id="13" name="Oval 12"/>
-          <p:cNvSpPr/>
-          <p:nvPr/>
-        </p:nvSpPr>
-        <p:spPr>
-          <a:xfrm>
-            <a:off x="548640" y="6473952"/>
-            <a:ext cx="100584" cy="100584"/>
-          </a:xfrm>
-          <a:prstGeom prst="ellipse">
-            <a:avLst/>
-          </a:prstGeom>
-          <a:solidFill>
-            <a:srgbClr val="E4002B"/>
-          </a:solidFill>
-          <a:ln>
-            <a:noFill/>
-          </a:ln>
-          <a:effectLst/>
-        </p:spPr>
-        <p:style>
-          <a:lnRef idx="1">
-            <a:schemeClr val="accent1"/>
-          </a:lnRef>
-          <a:fillRef idx="3">
-            <a:schemeClr val="accent1"/>
-          </a:fillRef>
-          <a:effectRef idx="2">
-            <a:schemeClr val="accent1"/>
-          </a:effectRef>
-          <a:fontRef idx="minor">
-            <a:schemeClr val="lt1"/>
-          </a:fontRef>
-        </p:style>
-        <p:txBody>
-          <a:bodyPr rtlCol="0" anchor="ctr"/>
-          <a:lstStyle/>
-          <a:p>
-            <a:pPr algn="ctr"/>
-          </a:p>
-        </p:txBody>
-      </p:sp>
-      <p:sp>
-        <p:nvSpPr>
-          <p:cNvPr id="14" name="TextBox 13"/>
-          <p:cNvSpPr txBox="1"/>
-          <p:nvPr/>
-        </p:nvSpPr>
-        <p:spPr>
-          <a:xfrm>
-            <a:off x="749808" y="6437376"/>
-            <a:ext cx="7772400" cy="274320"/>
-          </a:xfrm>
-          <a:prstGeom prst="rect">
-            <a:avLst/>
-          </a:prstGeom>
-          <a:noFill/>
-        </p:spPr>
-        <p:txBody>
-          <a:bodyPr wrap="square" anchor="t" lIns="0" rIns="0" tIns="0" bIns="0">
-            <a:spAutoFit/>
-          </a:bodyPr>
-          <a:lstStyle/>
-          <a:p>
-            <a:pPr algn="l"/>
-            <a:r>
-              <a:rPr sz="900" b="0">
-                <a:solidFill>
-                  <a:srgbClr val="6E6E6E"/>
-                </a:solidFill>
-                <a:latin typeface="Calibri"/>
-              </a:rPr>
-              <a:t>S13 — Herramientas para la Ciencia de Datos, UPC</a:t>
-            </a:r>
-          </a:p>
-        </p:txBody>
-      </p:sp>
-      <p:sp>
-        <p:nvSpPr>
-          <p:cNvPr id="15" name="TextBox 14"/>
-          <p:cNvSpPr txBox="1"/>
-          <p:nvPr/>
-        </p:nvSpPr>
-        <p:spPr>
-          <a:xfrm>
-            <a:off x="10180320" y="6437376"/>
-            <a:ext cx="1463040" cy="274320"/>
-          </a:xfrm>
-          <a:prstGeom prst="rect">
-            <a:avLst/>
-          </a:prstGeom>
-          <a:noFill/>
-        </p:spPr>
-        <p:txBody>
-          <a:bodyPr wrap="square" anchor="t" lIns="0" rIns="0" tIns="0" bIns="0">
-            <a:spAutoFit/>
-          </a:bodyPr>
-          <a:lstStyle/>
-          <a:p>
-            <a:pPr algn="r"/>
-            <a:r>
-              <a:rPr sz="900" b="0">
-                <a:solidFill>
-                  <a:srgbClr val="6E6E6E"/>
-                </a:solidFill>
-                <a:latin typeface="Calibri"/>
-              </a:rPr>
-              <a:t>15 / 23</a:t>
+              <a:t>15 / 17</a:t>
             </a:r>
           </a:p>
         </p:txBody>
@@ -7212,7 +7433,7 @@
     <p:bg>
       <p:bgPr>
         <a:solidFill>
-          <a:srgbClr val="FFFFFF"/>
+          <a:srgbClr val="FCEDEE"/>
         </a:solidFill>
         <a:effectLst/>
       </p:bgPr>
@@ -7226,434 +7447,14 @@
       <p:grpSpPr/>
       <p:sp>
         <p:nvSpPr>
-          <p:cNvPr id="2" name="TextBox 1"/>
-          <p:cNvSpPr txBox="1"/>
-          <p:nvPr/>
-        </p:nvSpPr>
-        <p:spPr>
-          <a:xfrm>
-            <a:off x="548640" y="411480"/>
-            <a:ext cx="11094720" cy="292608"/>
-          </a:xfrm>
-          <a:prstGeom prst="rect">
-            <a:avLst/>
-          </a:prstGeom>
-          <a:noFill/>
-        </p:spPr>
-        <p:txBody>
-          <a:bodyPr wrap="square" anchor="t" lIns="0" rIns="0" tIns="0" bIns="0">
-            <a:spAutoFit/>
-          </a:bodyPr>
-          <a:lstStyle/>
-          <a:p>
-            <a:pPr algn="l"/>
-            <a:r>
-              <a:rPr sz="1300" b="1">
-                <a:solidFill>
-                  <a:srgbClr val="9B1B30"/>
-                </a:solidFill>
-                <a:latin typeface="Calibri"/>
-              </a:rPr>
-              <a:t>ASÍ SE HACE, LIFELINES, COXPHFITTER().FIT</a:t>
-            </a:r>
-          </a:p>
-        </p:txBody>
-      </p:sp>
-      <p:sp>
-        <p:nvSpPr>
-          <p:cNvPr id="3" name="TextBox 2"/>
-          <p:cNvSpPr txBox="1"/>
-          <p:nvPr/>
-        </p:nvSpPr>
-        <p:spPr>
-          <a:xfrm>
-            <a:off x="548640" y="731520"/>
-            <a:ext cx="11094720" cy="777240"/>
-          </a:xfrm>
-          <a:prstGeom prst="rect">
-            <a:avLst/>
-          </a:prstGeom>
-          <a:noFill/>
-        </p:spPr>
-        <p:txBody>
-          <a:bodyPr wrap="square" anchor="t" lIns="0" rIns="0" tIns="0" bIns="0">
-            <a:spAutoFit/>
-          </a:bodyPr>
-          <a:lstStyle/>
-          <a:p>
-            <a:pPr algn="l"/>
-            <a:r>
-              <a:rPr sz="4000" b="1">
-                <a:solidFill>
-                  <a:srgbClr val="2D2D2D"/>
-                </a:solidFill>
-                <a:latin typeface="Calibri"/>
-              </a:rPr>
-              <a:t>Ajustar la Cox son dos líneas: fit y hazard ratio</a:t>
-            </a:r>
-          </a:p>
-        </p:txBody>
-      </p:sp>
-      <p:sp>
-        <p:nvSpPr>
-          <p:cNvPr id="4" name="TextBox 3"/>
-          <p:cNvSpPr txBox="1"/>
-          <p:nvPr/>
-        </p:nvSpPr>
-        <p:spPr>
-          <a:xfrm>
-            <a:off x="548640" y="1755648"/>
-            <a:ext cx="11094720" cy="457200"/>
-          </a:xfrm>
-          <a:prstGeom prst="rect">
-            <a:avLst/>
-          </a:prstGeom>
-          <a:noFill/>
-        </p:spPr>
-        <p:txBody>
-          <a:bodyPr wrap="square" lIns="0" tIns="0" bIns="0">
-            <a:spAutoFit/>
-          </a:bodyPr>
-          <a:lstStyle/>
-          <a:p>
-            <a:r>
-              <a:rPr sz="1400" b="1">
-                <a:solidFill>
-                  <a:srgbClr val="9B1B30"/>
-                </a:solidFill>
-                <a:latin typeface="Calibri"/>
-              </a:rPr>
-              <a:t>▸ Qué hace:  </a:t>
-            </a:r>
-            <a:r>
-              <a:rPr sz="1400">
-                <a:solidFill>
-                  <a:srgbClr val="2D2D2D"/>
-                </a:solidFill>
-                <a:latin typeface="Calibri"/>
-              </a:rPr>
-              <a:t>ajusta la Cox por verosimilitud parcial; cada covariable se vuelve un hazard ratio HR=exp(β).</a:t>
-            </a:r>
-          </a:p>
-        </p:txBody>
-      </p:sp>
-      <p:sp>
-        <p:nvSpPr>
-          <p:cNvPr id="5" name="Rounded Rectangle 4"/>
+          <p:cNvPr id="2" name="Oval 1"/>
           <p:cNvSpPr/>
           <p:nvPr/>
         </p:nvSpPr>
         <p:spPr>
           <a:xfrm>
-            <a:off x="548640" y="2395728"/>
-            <a:ext cx="11094720" cy="2980944"/>
-          </a:xfrm>
-          <a:prstGeom prst="roundRect">
-            <a:avLst/>
-          </a:prstGeom>
-          <a:solidFill>
-            <a:srgbClr val="F4F4F4"/>
-          </a:solidFill>
-          <a:ln w="9525">
-            <a:solidFill>
-              <a:srgbClr val="DDDDDD"/>
-            </a:solidFill>
-          </a:ln>
-          <a:effectLst/>
-        </p:spPr>
-        <p:style>
-          <a:lnRef idx="1">
-            <a:schemeClr val="accent1"/>
-          </a:lnRef>
-          <a:fillRef idx="3">
-            <a:schemeClr val="accent1"/>
-          </a:fillRef>
-          <a:effectRef idx="2">
-            <a:schemeClr val="accent1"/>
-          </a:effectRef>
-          <a:fontRef idx="minor">
-            <a:schemeClr val="lt1"/>
-          </a:fontRef>
-        </p:style>
-        <p:txBody>
-          <a:bodyPr rtlCol="0" anchor="ctr"/>
-          <a:lstStyle/>
-          <a:p>
-            <a:pPr algn="ctr"/>
-          </a:p>
-        </p:txBody>
-      </p:sp>
-      <p:sp>
-        <p:nvSpPr>
-          <p:cNvPr id="6" name="TextBox 5"/>
-          <p:cNvSpPr txBox="1"/>
-          <p:nvPr/>
-        </p:nvSpPr>
-        <p:spPr>
-          <a:xfrm>
-            <a:off x="804672" y="2542032"/>
-            <a:ext cx="10637520" cy="256032"/>
-          </a:xfrm>
-          <a:prstGeom prst="rect">
-            <a:avLst/>
-          </a:prstGeom>
-          <a:noFill/>
-        </p:spPr>
-        <p:txBody>
-          <a:bodyPr wrap="none" lIns="0" tIns="0" bIns="0">
-            <a:spAutoFit/>
-          </a:bodyPr>
-          <a:lstStyle/>
-          <a:p>
-            <a:r>
-              <a:rPr sz="1050" b="1">
-                <a:solidFill>
-                  <a:srgbClr val="9B1B30"/>
-                </a:solidFill>
-                <a:latin typeface="Calibri"/>
-              </a:rPr>
-              <a:t>CÓDIGO REAL DEL CUADERNO</a:t>
-            </a:r>
-          </a:p>
-        </p:txBody>
-      </p:sp>
-      <p:sp>
-        <p:nvSpPr>
-          <p:cNvPr id="7" name="TextBox 6"/>
-          <p:cNvSpPr txBox="1"/>
-          <p:nvPr/>
-        </p:nvSpPr>
-        <p:spPr>
-          <a:xfrm>
-            <a:off x="859536" y="2926080"/>
-            <a:ext cx="10472928" cy="2377440"/>
-          </a:xfrm>
-          <a:prstGeom prst="rect">
-            <a:avLst/>
-          </a:prstGeom>
-          <a:noFill/>
-        </p:spPr>
-        <p:txBody>
-          <a:bodyPr wrap="square" lIns="0" tIns="0" bIns="0">
-            <a:spAutoFit/>
-          </a:bodyPr>
-          <a:lstStyle/>
-          <a:p>
-            <a:pPr>
-              <a:lnSpc>
-                <a:spcPct val="130000"/>
-              </a:lnSpc>
-              <a:spcAft>
-                <a:spcPts val="400"/>
-              </a:spcAft>
-            </a:pPr>
-            <a:r>
-              <a:rPr sz="1200">
-                <a:solidFill>
-                  <a:srgbClr val="2D2D2D"/>
-                </a:solidFill>
-                <a:latin typeface="Consolas"/>
-              </a:rPr>
-              <a:t>from lifelines import CoxPHFitter</a:t>
-            </a:r>
-          </a:p>
-          <a:p>
-            <a:pPr>
-              <a:lnSpc>
-                <a:spcPct val="130000"/>
-              </a:lnSpc>
-              <a:spcAft>
-                <a:spcPts val="400"/>
-              </a:spcAft>
-            </a:pPr>
-            <a:r>
-              <a:rPr sz="1200">
-                <a:solidFill>
-                  <a:srgbClr val="2D2D2D"/>
-                </a:solidFill>
-                <a:latin typeface="Consolas"/>
-              </a:rPr>
-              <a:t/>
-            </a:r>
-          </a:p>
-          <a:p>
-            <a:pPr>
-              <a:lnSpc>
-                <a:spcPct val="130000"/>
-              </a:lnSpc>
-              <a:spcAft>
-                <a:spcPts val="400"/>
-              </a:spcAft>
-            </a:pPr>
-            <a:r>
-              <a:rPr sz="1200">
-                <a:solidFill>
-                  <a:srgbClr val="2D2D2D"/>
-                </a:solidFill>
-                <a:latin typeface="Consolas"/>
-              </a:rPr>
-              <a:t>cph = CoxPHFitter().fit(rossi, duration_col="week", event_col="arrest")</a:t>
-            </a:r>
-          </a:p>
-          <a:p>
-            <a:pPr>
-              <a:lnSpc>
-                <a:spcPct val="130000"/>
-              </a:lnSpc>
-              <a:spcAft>
-                <a:spcPts val="400"/>
-              </a:spcAft>
-            </a:pPr>
-            <a:r>
-              <a:rPr sz="1200">
-                <a:solidFill>
-                  <a:srgbClr val="2D2D2D"/>
-                </a:solidFill>
-                <a:latin typeface="Consolas"/>
-              </a:rPr>
-              <a:t>print(cph.summary[["exp(coef)", "p"]].round(4).to_string())</a:t>
-            </a:r>
-          </a:p>
-          <a:p>
-            <a:pPr>
-              <a:lnSpc>
-                <a:spcPct val="130000"/>
-              </a:lnSpc>
-              <a:spcAft>
-                <a:spcPts val="400"/>
-              </a:spcAft>
-            </a:pPr>
-            <a:r>
-              <a:rPr sz="1200">
-                <a:solidFill>
-                  <a:srgbClr val="2D2D2D"/>
-                </a:solidFill>
-                <a:latin typeface="Consolas"/>
-              </a:rPr>
-              <a:t>print(f"C-index = {cph.concordance_index_:.4f}")</a:t>
-            </a:r>
-          </a:p>
-          <a:p>
-            <a:pPr>
-              <a:lnSpc>
-                <a:spcPct val="130000"/>
-              </a:lnSpc>
-              <a:spcAft>
-                <a:spcPts val="400"/>
-              </a:spcAft>
-            </a:pPr>
-            <a:r>
-              <a:rPr sz="1200">
-                <a:solidFill>
-                  <a:srgbClr val="2D2D2D"/>
-                </a:solidFill>
-                <a:latin typeface="Consolas"/>
-              </a:rPr>
-              <a:t># HR:  fin 0,68 ,  age 0,94 ,  prio 1,10     |     C-index 0,64</a:t>
-            </a:r>
-          </a:p>
-        </p:txBody>
-      </p:sp>
-      <p:sp>
-        <p:nvSpPr>
-          <p:cNvPr id="8" name="TextBox 7"/>
-          <p:cNvSpPr txBox="1"/>
-          <p:nvPr/>
-        </p:nvSpPr>
-        <p:spPr>
-          <a:xfrm>
-            <a:off x="548640" y="5961888"/>
-            <a:ext cx="11094720" cy="292608"/>
-          </a:xfrm>
-          <a:prstGeom prst="rect">
-            <a:avLst/>
-          </a:prstGeom>
-          <a:noFill/>
-        </p:spPr>
-        <p:txBody>
-          <a:bodyPr wrap="square" anchor="t" lIns="0" rIns="0" tIns="0" bIns="0">
-            <a:spAutoFit/>
-          </a:bodyPr>
-          <a:lstStyle/>
-          <a:p>
-            <a:pPr algn="l"/>
-            <a:r>
-              <a:rPr sz="1000" b="0">
-                <a:solidFill>
-                  <a:srgbClr val="6E6E6E"/>
-                </a:solidFill>
-                <a:latin typeface="Calibri"/>
-              </a:rPr>
-              <a:t>notebook Sección 2, Cox sobre Rossi, exp(coef) → survival!B2-B4 y hoja cox_rossi, C-index survival!B15 — venv/Excel.</a:t>
-            </a:r>
-          </a:p>
-        </p:txBody>
-      </p:sp>
-      <p:sp>
-        <p:nvSpPr>
-          <p:cNvPr id="9" name="Rounded Rectangle 8"/>
-          <p:cNvSpPr/>
-          <p:nvPr/>
-        </p:nvSpPr>
-        <p:spPr>
-          <a:xfrm>
-            <a:off x="9098280" y="310896"/>
-            <a:ext cx="2560320" cy="402336"/>
-          </a:xfrm>
-          <a:prstGeom prst="roundRect">
-            <a:avLst/>
-          </a:prstGeom>
-          <a:solidFill>
-            <a:srgbClr val="FCEDEE"/>
-          </a:solidFill>
-          <a:ln w="15875">
-            <a:solidFill>
-              <a:srgbClr val="E4002B"/>
-            </a:solidFill>
-          </a:ln>
-          <a:effectLst/>
-        </p:spPr>
-        <p:style>
-          <a:lnRef idx="1">
-            <a:schemeClr val="accent1"/>
-          </a:lnRef>
-          <a:fillRef idx="3">
-            <a:schemeClr val="accent1"/>
-          </a:fillRef>
-          <a:effectRef idx="2">
-            <a:schemeClr val="accent1"/>
-          </a:effectRef>
-          <a:fontRef idx="minor">
-            <a:schemeClr val="lt1"/>
-          </a:fontRef>
-        </p:style>
-        <p:txBody>
-          <a:bodyPr rtlCol="0" anchor="ctr" lIns="54864" rIns="54864" tIns="0" bIns="0"/>
-          <a:lstStyle/>
-          <a:p>
-            <a:pPr algn="ctr"/>
-            <a:r>
-              <a:rPr sz="1300" b="1">
-                <a:solidFill>
-                  <a:srgbClr val="9B1B30"/>
-                </a:solidFill>
-                <a:latin typeface="Calibri"/>
-              </a:rPr>
-              <a:t>▶  Notebook, celda 9</a:t>
-            </a:r>
-          </a:p>
-        </p:txBody>
-      </p:sp>
-      <p:sp>
-        <p:nvSpPr>
-          <p:cNvPr id="10" name="Oval 9"/>
-          <p:cNvSpPr/>
-          <p:nvPr/>
-        </p:nvSpPr>
-        <p:spPr>
-          <a:xfrm>
-            <a:off x="548640" y="6473952"/>
-            <a:ext cx="100584" cy="100584"/>
+            <a:off x="5593080" y="914400"/>
+            <a:ext cx="1005840" cy="1005840"/>
           </a:xfrm>
           <a:prstGeom prst="ellipse">
             <a:avLst/>
@@ -7681,23 +7482,32 @@
           </a:fontRef>
         </p:style>
         <p:txBody>
-          <a:bodyPr rtlCol="0" anchor="ctr"/>
+          <a:bodyPr rtlCol="0" anchor="ctr" lIns="0" rIns="0" tIns="0" bIns="0"/>
           <a:lstStyle/>
           <a:p>
             <a:pPr algn="ctr"/>
-          </a:p>
-        </p:txBody>
-      </p:sp>
-      <p:sp>
-        <p:nvSpPr>
-          <p:cNvPr id="11" name="TextBox 10"/>
+            <a:r>
+              <a:rPr sz="4400" b="1">
+                <a:solidFill>
+                  <a:srgbClr val="FFFFFF"/>
+                </a:solidFill>
+                <a:latin typeface="Calibri"/>
+              </a:rPr>
+              <a:t>?</a:t>
+            </a:r>
+          </a:p>
+        </p:txBody>
+      </p:sp>
+      <p:sp>
+        <p:nvSpPr>
+          <p:cNvPr id="3" name="TextBox 2"/>
           <p:cNvSpPr txBox="1"/>
           <p:nvPr/>
         </p:nvSpPr>
         <p:spPr>
           <a:xfrm>
-            <a:off x="749808" y="6437376"/>
-            <a:ext cx="7772400" cy="274320"/>
+            <a:off x="1371600" y="2468880"/>
+            <a:ext cx="9448800" cy="2011680"/>
           </a:xfrm>
           <a:prstGeom prst="rect">
             <a:avLst/>
@@ -7710,29 +7520,29 @@
           </a:bodyPr>
           <a:lstStyle/>
           <a:p>
-            <a:pPr algn="l"/>
-            <a:r>
-              <a:rPr sz="900" b="0">
-                <a:solidFill>
-                  <a:srgbClr val="6E6E6E"/>
-                </a:solidFill>
-                <a:latin typeface="Calibri"/>
-              </a:rPr>
-              <a:t>S13 — Herramientas para la Ciencia de Datos, UPC</a:t>
-            </a:r>
-          </a:p>
-        </p:txBody>
-      </p:sp>
-      <p:sp>
-        <p:nvSpPr>
-          <p:cNvPr id="12" name="TextBox 11"/>
+            <a:pPr algn="ctr"/>
+            <a:r>
+              <a:rPr sz="3200" b="1">
+                <a:solidFill>
+                  <a:srgbClr val="9B1B30"/>
+                </a:solidFill>
+                <a:latin typeface="Calibri"/>
+              </a:rPr>
+              <a:t>¿Un factor que predice el churn siempre sirve para decidir la intervención?</a:t>
+            </a:r>
+          </a:p>
+        </p:txBody>
+      </p:sp>
+      <p:sp>
+        <p:nvSpPr>
+          <p:cNvPr id="4" name="TextBox 3"/>
           <p:cNvSpPr txBox="1"/>
           <p:nvPr/>
         </p:nvSpPr>
         <p:spPr>
           <a:xfrm>
-            <a:off x="10180320" y="6437376"/>
-            <a:ext cx="1463040" cy="274320"/>
+            <a:off x="2011680" y="4754880"/>
+            <a:ext cx="8168640" cy="1280160"/>
           </a:xfrm>
           <a:prstGeom prst="rect">
             <a:avLst/>
@@ -7745,15 +7555,15 @@
           </a:bodyPr>
           <a:lstStyle/>
           <a:p>
-            <a:pPr algn="r"/>
-            <a:r>
-              <a:rPr sz="900" b="0">
-                <a:solidFill>
-                  <a:srgbClr val="6E6E6E"/>
-                </a:solidFill>
-                <a:latin typeface="Calibri"/>
-              </a:rPr>
-              <a:t>16 / 23</a:t>
+            <a:pPr algn="ctr"/>
+            <a:r>
+              <a:rPr sz="1500" b="0">
+                <a:solidFill>
+                  <a:srgbClr val="2D2D2D"/>
+                </a:solidFill>
+                <a:latin typeface="Calibri"/>
+              </a:rPr>
+              <a:t>prio es muy significativo pero no accionable; fin es protector y accionable. Significativo no es lo mismo que útil.</a:t>
             </a:r>
           </a:p>
         </p:txBody>
@@ -7793,7 +7603,7 @@
         <p:spPr>
           <a:xfrm>
             <a:off x="548640" y="411480"/>
-            <a:ext cx="11094720" cy="777240"/>
+            <a:ext cx="11094720" cy="292608"/>
           </a:xfrm>
           <a:prstGeom prst="rect">
             <a:avLst/>
@@ -7808,41 +7618,52 @@
           <a:p>
             <a:pPr algn="l"/>
             <a:r>
+              <a:rPr sz="1300" b="1">
+                <a:solidFill>
+                  <a:srgbClr val="9B1B30"/>
+                </a:solidFill>
+                <a:latin typeface="Calibri"/>
+              </a:rPr>
+              <a:t>BIBLIOGRAFÍA</a:t>
+            </a:r>
+          </a:p>
+        </p:txBody>
+      </p:sp>
+      <p:sp>
+        <p:nvSpPr>
+          <p:cNvPr id="3" name="TextBox 2"/>
+          <p:cNvSpPr txBox="1"/>
+          <p:nvPr/>
+        </p:nvSpPr>
+        <p:spPr>
+          <a:xfrm>
+            <a:off x="548640" y="731520"/>
+            <a:ext cx="11094720" cy="777240"/>
+          </a:xfrm>
+          <a:prstGeom prst="rect">
+            <a:avLst/>
+          </a:prstGeom>
+          <a:noFill/>
+        </p:spPr>
+        <p:txBody>
+          <a:bodyPr wrap="square" anchor="t" lIns="0" rIns="0" tIns="0" bIns="0">
+            <a:spAutoFit/>
+          </a:bodyPr>
+          <a:lstStyle/>
+          <a:p>
+            <a:pPr algn="l"/>
+            <a:r>
               <a:rPr sz="4000" b="1">
                 <a:solidFill>
                   <a:srgbClr val="2D2D2D"/>
                 </a:solidFill>
                 <a:latin typeface="Calibri"/>
               </a:rPr>
-              <a:t>La ayuda financiera baja el riesgo 32 %; cada antecedente lo sube 10 %</a:t>
-            </a:r>
-          </a:p>
-        </p:txBody>
-      </p:sp>
-      <p:pic>
-        <p:nvPicPr>
-          <p:cNvPr id="3" name="Picture 2" descr="S13deck_forest.png"/>
-          <p:cNvPicPr>
-            <a:picLocks noChangeAspect="1"/>
-          </p:cNvPicPr>
-          <p:nvPr/>
-        </p:nvPicPr>
-        <p:blipFill>
-          <a:blip r:embed="rId2"/>
-          <a:stretch>
-            <a:fillRect/>
-          </a:stretch>
-        </p:blipFill>
-        <p:spPr>
-          <a:xfrm>
-            <a:off x="548640" y="1828800"/>
-            <a:ext cx="6949440" cy="4032327"/>
-          </a:xfrm>
-          <a:prstGeom prst="rect">
-            <a:avLst/>
-          </a:prstGeom>
-        </p:spPr>
-      </p:pic>
+              <a:t>Cuatro lecturas anclan la supervivencia y el CLV</a:t>
+            </a:r>
+          </a:p>
+        </p:txBody>
+      </p:sp>
       <p:sp>
         <p:nvSpPr>
           <p:cNvPr id="4" name="Oval 3"/>
@@ -7851,8 +7672,8 @@
         </p:nvSpPr>
         <p:spPr>
           <a:xfrm>
-            <a:off x="7955279" y="2011680"/>
-            <a:ext cx="548640" cy="548640"/>
+            <a:off x="548640" y="1810512"/>
+            <a:ext cx="384048" cy="384048"/>
           </a:xfrm>
           <a:prstGeom prst="ellipse">
             <a:avLst/>
@@ -7880,47 +7701,32 @@
           </a:fontRef>
         </p:style>
         <p:txBody>
-          <a:bodyPr rtlCol="0" anchor="ctr"/>
+          <a:bodyPr rtlCol="0" anchor="ctr" lIns="0" rIns="0" tIns="0" bIns="0"/>
           <a:lstStyle/>
           <a:p>
             <a:pPr algn="ctr"/>
-          </a:p>
-        </p:txBody>
-      </p:sp>
-      <p:pic>
-        <p:nvPicPr>
-          <p:cNvPr id="5" name="Picture 4" descr="lightbulb__FFFFFF.png"/>
-          <p:cNvPicPr>
-            <a:picLocks noChangeAspect="1"/>
-          </p:cNvPicPr>
-          <p:nvPr/>
-        </p:nvPicPr>
-        <p:blipFill>
-          <a:blip r:embed="rId3"/>
-          <a:stretch>
-            <a:fillRect/>
-          </a:stretch>
-        </p:blipFill>
-        <p:spPr>
-          <a:xfrm>
-            <a:off x="8108898" y="2165299"/>
-            <a:ext cx="241402" cy="241402"/>
-          </a:xfrm>
-          <a:prstGeom prst="rect">
-            <a:avLst/>
-          </a:prstGeom>
-        </p:spPr>
-      </p:pic>
-      <p:sp>
-        <p:nvSpPr>
-          <p:cNvPr id="6" name="TextBox 5"/>
+            <a:r>
+              <a:rPr sz="1400" b="1">
+                <a:solidFill>
+                  <a:srgbClr val="FFFFFF"/>
+                </a:solidFill>
+                <a:latin typeface="Calibri"/>
+              </a:rPr>
+              <a:t>1</a:t>
+            </a:r>
+          </a:p>
+        </p:txBody>
+      </p:sp>
+      <p:sp>
+        <p:nvSpPr>
+          <p:cNvPr id="5" name="TextBox 4"/>
           <p:cNvSpPr txBox="1"/>
           <p:nvPr/>
         </p:nvSpPr>
         <p:spPr>
           <a:xfrm>
-            <a:off x="8686800" y="2057400"/>
-            <a:ext cx="2926080" cy="548640"/>
+            <a:off x="1097280" y="1783080"/>
+            <a:ext cx="10546080" cy="320040"/>
           </a:xfrm>
           <a:prstGeom prst="rect">
             <a:avLst/>
@@ -7937,25 +7743,25 @@
             <a:r>
               <a:rPr sz="1500" b="1">
                 <a:solidFill>
-                  <a:srgbClr val="9B1B30"/>
-                </a:solidFill>
-                <a:latin typeface="Calibri"/>
-              </a:rPr>
-              <a:t>Lectura de negocio</a:t>
-            </a:r>
-          </a:p>
-        </p:txBody>
-      </p:sp>
-      <p:sp>
-        <p:nvSpPr>
-          <p:cNvPr id="7" name="TextBox 6"/>
+                  <a:srgbClr val="2D2D2D"/>
+                </a:solidFill>
+                <a:latin typeface="Calibri"/>
+              </a:rPr>
+              <a:t>Kaplan &amp; Meier (1958) — Nonparametric Estimation</a:t>
+            </a:r>
+          </a:p>
+        </p:txBody>
+      </p:sp>
+      <p:sp>
+        <p:nvSpPr>
+          <p:cNvPr id="6" name="TextBox 5"/>
           <p:cNvSpPr txBox="1"/>
           <p:nvPr/>
         </p:nvSpPr>
         <p:spPr>
           <a:xfrm>
-            <a:off x="7955279" y="2880360"/>
-            <a:ext cx="3657600" cy="3108960"/>
+            <a:off x="1097280" y="2093976"/>
+            <a:ext cx="10546080" cy="274320"/>
           </a:xfrm>
           <a:prstGeom prst="rect">
             <a:avLst/>
@@ -7968,68 +7774,29 @@
           </a:bodyPr>
           <a:lstStyle/>
           <a:p>
-            <a:pPr algn="l">
-              <a:lnSpc>
-                <a:spcPct val="125000"/>
-              </a:lnSpc>
-            </a:pPr>
-            <a:r>
-              <a:rPr sz="1500" b="0">
-                <a:solidFill>
-                  <a:srgbClr val="2D2D2D"/>
-                </a:solidFill>
-                <a:latin typeface="Calibri"/>
-              </a:rPr>
-              <a:t>Solo fin, age y prio son significativos (IC no cruza 1). fin HR 0,68, age 0,94, prio 1,10.</a:t>
-            </a:r>
-          </a:p>
-        </p:txBody>
-      </p:sp>
-      <p:sp>
-        <p:nvSpPr>
-          <p:cNvPr id="8" name="TextBox 7"/>
-          <p:cNvSpPr txBox="1"/>
-          <p:nvPr/>
-        </p:nvSpPr>
-        <p:spPr>
-          <a:xfrm>
-            <a:off x="548640" y="5961888"/>
-            <a:ext cx="11094720" cy="292608"/>
-          </a:xfrm>
-          <a:prstGeom prst="rect">
-            <a:avLst/>
-          </a:prstGeom>
-          <a:noFill/>
-        </p:spPr>
-        <p:txBody>
-          <a:bodyPr wrap="square" anchor="t" lIns="0" rIns="0" tIns="0" bIns="0">
-            <a:spAutoFit/>
-          </a:bodyPr>
-          <a:lstStyle/>
-          <a:p>
             <a:pPr algn="l"/>
             <a:r>
-              <a:rPr sz="1000" b="0">
+              <a:rPr sz="1200" b="0">
                 <a:solidFill>
                   <a:srgbClr val="6E6E6E"/>
                 </a:solidFill>
                 <a:latin typeface="Calibri"/>
               </a:rPr>
-              <a:t>Réplica Cox/Rossi, exp(coef) con IC 95 %, fin 0,68 / age 0,94 / prio 1,10 — concordancia 0,64 — venv/Excel (cox_rossi).</a:t>
-            </a:r>
-          </a:p>
-        </p:txBody>
-      </p:sp>
-      <p:sp>
-        <p:nvSpPr>
-          <p:cNvPr id="9" name="Oval 8"/>
+              <a:t>JASA 53(282):457-481  —  el estimador producto-límite y la curva de retención</a:t>
+            </a:r>
+          </a:p>
+        </p:txBody>
+      </p:sp>
+      <p:sp>
+        <p:nvSpPr>
+          <p:cNvPr id="7" name="Oval 6"/>
           <p:cNvSpPr/>
           <p:nvPr/>
         </p:nvSpPr>
         <p:spPr>
           <a:xfrm>
-            <a:off x="548640" y="6473952"/>
-            <a:ext cx="100584" cy="100584"/>
+            <a:off x="548640" y="2706624"/>
+            <a:ext cx="384048" cy="384048"/>
           </a:xfrm>
           <a:prstGeom prst="ellipse">
             <a:avLst/>
@@ -8057,23 +7824,32 @@
           </a:fontRef>
         </p:style>
         <p:txBody>
-          <a:bodyPr rtlCol="0" anchor="ctr"/>
+          <a:bodyPr rtlCol="0" anchor="ctr" lIns="0" rIns="0" tIns="0" bIns="0"/>
           <a:lstStyle/>
           <a:p>
             <a:pPr algn="ctr"/>
-          </a:p>
-        </p:txBody>
-      </p:sp>
-      <p:sp>
-        <p:nvSpPr>
-          <p:cNvPr id="10" name="TextBox 9"/>
+            <a:r>
+              <a:rPr sz="1400" b="1">
+                <a:solidFill>
+                  <a:srgbClr val="FFFFFF"/>
+                </a:solidFill>
+                <a:latin typeface="Calibri"/>
+              </a:rPr>
+              <a:t>2</a:t>
+            </a:r>
+          </a:p>
+        </p:txBody>
+      </p:sp>
+      <p:sp>
+        <p:nvSpPr>
+          <p:cNvPr id="8" name="TextBox 7"/>
           <p:cNvSpPr txBox="1"/>
           <p:nvPr/>
         </p:nvSpPr>
         <p:spPr>
           <a:xfrm>
-            <a:off x="749808" y="6437376"/>
-            <a:ext cx="7772400" cy="274320"/>
+            <a:off x="1097280" y="2679192"/>
+            <a:ext cx="10546080" cy="320040"/>
           </a:xfrm>
           <a:prstGeom prst="rect">
             <a:avLst/>
@@ -8088,27 +7864,27 @@
           <a:p>
             <a:pPr algn="l"/>
             <a:r>
-              <a:rPr sz="900" b="0">
-                <a:solidFill>
-                  <a:srgbClr val="6E6E6E"/>
-                </a:solidFill>
-                <a:latin typeface="Calibri"/>
-              </a:rPr>
-              <a:t>S13 — Herramientas para la Ciencia de Datos, UPC</a:t>
-            </a:r>
-          </a:p>
-        </p:txBody>
-      </p:sp>
-      <p:sp>
-        <p:nvSpPr>
-          <p:cNvPr id="11" name="TextBox 10"/>
+              <a:rPr sz="1500" b="1">
+                <a:solidFill>
+                  <a:srgbClr val="2D2D2D"/>
+                </a:solidFill>
+                <a:latin typeface="Calibri"/>
+              </a:rPr>
+              <a:t>Cox (1972) — Regression Models and Life-Tables</a:t>
+            </a:r>
+          </a:p>
+        </p:txBody>
+      </p:sp>
+      <p:sp>
+        <p:nvSpPr>
+          <p:cNvPr id="9" name="TextBox 8"/>
           <p:cNvSpPr txBox="1"/>
           <p:nvPr/>
         </p:nvSpPr>
         <p:spPr>
           <a:xfrm>
-            <a:off x="10180320" y="6437376"/>
-            <a:ext cx="1463040" cy="274320"/>
+            <a:off x="1097280" y="2990088"/>
+            <a:ext cx="10546080" cy="274320"/>
           </a:xfrm>
           <a:prstGeom prst="rect">
             <a:avLst/>
@@ -8121,204 +7897,29 @@
           </a:bodyPr>
           <a:lstStyle/>
           <a:p>
-            <a:pPr algn="r"/>
-            <a:r>
-              <a:rPr sz="900" b="0">
+            <a:pPr algn="l"/>
+            <a:r>
+              <a:rPr sz="1200" b="0">
                 <a:solidFill>
                   <a:srgbClr val="6E6E6E"/>
                 </a:solidFill>
                 <a:latin typeface="Calibri"/>
               </a:rPr>
-              <a:t>17 / 23</a:t>
-            </a:r>
-          </a:p>
-        </p:txBody>
-      </p:sp>
-    </p:spTree>
-  </p:cSld>
-  <p:clrMapOvr>
-    <a:masterClrMapping/>
-  </p:clrMapOvr>
-</p:sld>
-</file>
-
-<file path=ppt/slides/slide18.xml><?xml version="1.0" encoding="utf-8"?>
-<p:sld xmlns:a="http://schemas.openxmlformats.org/drawingml/2006/main" xmlns:p="http://schemas.openxmlformats.org/presentationml/2006/main" xmlns:r="http://schemas.openxmlformats.org/officeDocument/2006/relationships">
-  <p:cSld>
-    <p:bg>
-      <p:bgPr>
-        <a:solidFill>
-          <a:srgbClr val="9B1B30"/>
-        </a:solidFill>
-        <a:effectLst/>
-      </p:bgPr>
-    </p:bg>
-    <p:spTree>
-      <p:nvGrpSpPr>
-        <p:cNvPr id="1" name=""/>
-        <p:cNvGrpSpPr/>
-        <p:nvPr/>
-      </p:nvGrpSpPr>
-      <p:grpSpPr/>
-      <p:sp>
-        <p:nvSpPr>
-          <p:cNvPr id="2" name="Oval 1"/>
+              <a:t>JRSS-B 34(2):187-220  —  el modelo de riesgos proporcionales y el hazard ratio</a:t>
+            </a:r>
+          </a:p>
+        </p:txBody>
+      </p:sp>
+      <p:sp>
+        <p:nvSpPr>
+          <p:cNvPr id="10" name="Oval 9"/>
           <p:cNvSpPr/>
           <p:nvPr/>
         </p:nvSpPr>
         <p:spPr>
           <a:xfrm>
-            <a:off x="914400" y="2103120"/>
-            <a:ext cx="2377440" cy="2377440"/>
-          </a:xfrm>
-          <a:prstGeom prst="ellipse">
-            <a:avLst/>
-          </a:prstGeom>
-          <a:solidFill>
-            <a:srgbClr val="FFFFFF"/>
-          </a:solidFill>
-          <a:ln>
-            <a:noFill/>
-          </a:ln>
-          <a:effectLst/>
-        </p:spPr>
-        <p:style>
-          <a:lnRef idx="1">
-            <a:schemeClr val="accent1"/>
-          </a:lnRef>
-          <a:fillRef idx="3">
-            <a:schemeClr val="accent1"/>
-          </a:fillRef>
-          <a:effectRef idx="2">
-            <a:schemeClr val="accent1"/>
-          </a:effectRef>
-          <a:fontRef idx="minor">
-            <a:schemeClr val="lt1"/>
-          </a:fontRef>
-        </p:style>
-        <p:txBody>
-          <a:bodyPr rtlCol="0" anchor="ctr" lIns="0" rIns="0" tIns="0" bIns="0"/>
-          <a:lstStyle/>
-          <a:p>
-            <a:pPr algn="ctr"/>
-            <a:r>
-              <a:rPr sz="10000" b="1">
-                <a:solidFill>
-                  <a:srgbClr val="9B1B30"/>
-                </a:solidFill>
-                <a:latin typeface="Calibri"/>
-              </a:rPr>
-              <a:t>5</a:t>
-            </a:r>
-          </a:p>
-        </p:txBody>
-      </p:sp>
-      <p:sp>
-        <p:nvSpPr>
-          <p:cNvPr id="3" name="TextBox 2"/>
-          <p:cNvSpPr txBox="1"/>
-          <p:nvPr/>
-        </p:nvSpPr>
-        <p:spPr>
-          <a:xfrm>
-            <a:off x="3931920" y="2651760"/>
-            <a:ext cx="7589520" cy="1371600"/>
-          </a:xfrm>
-          <a:prstGeom prst="rect">
-            <a:avLst/>
-          </a:prstGeom>
-          <a:noFill/>
-        </p:spPr>
-        <p:txBody>
-          <a:bodyPr wrap="square" anchor="t" lIns="0" rIns="0" tIns="0" bIns="0">
-            <a:spAutoFit/>
-          </a:bodyPr>
-          <a:lstStyle/>
-          <a:p>
-            <a:pPr algn="l"/>
-            <a:r>
-              <a:rPr sz="4000" b="1">
-                <a:solidFill>
-                  <a:srgbClr val="FFFFFF"/>
-                </a:solidFill>
-                <a:latin typeface="Calibri"/>
-              </a:rPr>
-              <a:t>¿Se sostiene con datos reales? La réplica de Cox (1972)</a:t>
-            </a:r>
-          </a:p>
-        </p:txBody>
-      </p:sp>
-      <p:sp>
-        <p:nvSpPr>
-          <p:cNvPr id="4" name="TextBox 3"/>
-          <p:cNvSpPr txBox="1"/>
-          <p:nvPr/>
-        </p:nvSpPr>
-        <p:spPr>
-          <a:xfrm>
-            <a:off x="3931920" y="3977639"/>
-            <a:ext cx="7589520" cy="914400"/>
-          </a:xfrm>
-          <a:prstGeom prst="rect">
-            <a:avLst/>
-          </a:prstGeom>
-          <a:noFill/>
-        </p:spPr>
-        <p:txBody>
-          <a:bodyPr wrap="square" anchor="t" lIns="0" rIns="0" tIns="0" bIns="0">
-            <a:spAutoFit/>
-          </a:bodyPr>
-          <a:lstStyle/>
-          <a:p>
-            <a:pPr algn="l"/>
-            <a:r>
-              <a:rPr sz="1700" b="0">
-                <a:solidFill>
-                  <a:srgbClr val="FCEDEE"/>
-                </a:solidFill>
-                <a:latin typeface="Calibri"/>
-              </a:rPr>
-              <a:t>Capítulo 13.5 — jueves, bloques A1 y A2</a:t>
-            </a:r>
-          </a:p>
-        </p:txBody>
-      </p:sp>
-    </p:spTree>
-  </p:cSld>
-  <p:clrMapOvr>
-    <a:masterClrMapping/>
-  </p:clrMapOvr>
-</p:sld>
-</file>
-
-<file path=ppt/slides/slide19.xml><?xml version="1.0" encoding="utf-8"?>
-<p:sld xmlns:a="http://schemas.openxmlformats.org/drawingml/2006/main" xmlns:p="http://schemas.openxmlformats.org/presentationml/2006/main" xmlns:r="http://schemas.openxmlformats.org/officeDocument/2006/relationships">
-  <p:cSld>
-    <p:bg>
-      <p:bgPr>
-        <a:solidFill>
-          <a:srgbClr val="2D2D2D"/>
-        </a:solidFill>
-        <a:effectLst/>
-      </p:bgPr>
-    </p:bg>
-    <p:spTree>
-      <p:nvGrpSpPr>
-        <p:cNvPr id="1" name=""/>
-        <p:cNvGrpSpPr/>
-        <p:nvPr/>
-      </p:nvGrpSpPr>
-      <p:grpSpPr/>
-      <p:sp>
-        <p:nvSpPr>
-          <p:cNvPr id="2" name="Oval 1"/>
-          <p:cNvSpPr/>
-          <p:nvPr/>
-        </p:nvSpPr>
-        <p:spPr>
-          <a:xfrm>
-            <a:off x="5638800" y="914400"/>
-            <a:ext cx="914400" cy="914400"/>
+            <a:off x="548640" y="3602736"/>
+            <a:ext cx="384048" cy="384048"/>
           </a:xfrm>
           <a:prstGeom prst="ellipse">
             <a:avLst/>
@@ -8351,27 +7952,27 @@
           <a:p>
             <a:pPr algn="ctr"/>
             <a:r>
-              <a:rPr sz="4800" b="1">
+              <a:rPr sz="1400" b="1">
                 <a:solidFill>
                   <a:srgbClr val="FFFFFF"/>
                 </a:solidFill>
                 <a:latin typeface="Calibri"/>
               </a:rPr>
-              <a:t>“</a:t>
-            </a:r>
-          </a:p>
-        </p:txBody>
-      </p:sp>
-      <p:sp>
-        <p:nvSpPr>
-          <p:cNvPr id="3" name="TextBox 2"/>
+              <a:t>3</a:t>
+            </a:r>
+          </a:p>
+        </p:txBody>
+      </p:sp>
+      <p:sp>
+        <p:nvSpPr>
+          <p:cNvPr id="11" name="TextBox 10"/>
           <p:cNvSpPr txBox="1"/>
           <p:nvPr/>
         </p:nvSpPr>
         <p:spPr>
           <a:xfrm>
-            <a:off x="1645920" y="2377440"/>
-            <a:ext cx="8900160" cy="2377440"/>
+            <a:off x="1097280" y="3575304"/>
+            <a:ext cx="10546080" cy="320040"/>
           </a:xfrm>
           <a:prstGeom prst="rect">
             <a:avLst/>
@@ -8384,33 +7985,29 @@
           </a:bodyPr>
           <a:lstStyle/>
           <a:p>
-            <a:pPr algn="ctr">
-              <a:lnSpc>
-                <a:spcPct val="125000"/>
-              </a:lnSpc>
-            </a:pPr>
-            <a:r>
-              <a:rPr sz="2600" b="0">
-                <a:solidFill>
-                  <a:srgbClr val="FFFFFF"/>
-                </a:solidFill>
-                <a:latin typeface="Calibri"/>
-              </a:rPr>
-              <a:t>En pruebas de vida, seguimiento médico y otros campos, la observación del momento en que ocurre el evento de interés (llamado muerte) puede quedar impedida, para algunos elementos de la muestra, por la ocurrencia previa de otro evento (llamado pérdida).</a:t>
-            </a:r>
-          </a:p>
-        </p:txBody>
-      </p:sp>
-      <p:sp>
-        <p:nvSpPr>
-          <p:cNvPr id="4" name="TextBox 3"/>
+            <a:pPr algn="l"/>
+            <a:r>
+              <a:rPr sz="1500" b="1">
+                <a:solidFill>
+                  <a:srgbClr val="2D2D2D"/>
+                </a:solidFill>
+                <a:latin typeface="Calibri"/>
+              </a:rPr>
+              <a:t>Therneau &amp; Grambsch (2000) — Modeling Survival Data</a:t>
+            </a:r>
+          </a:p>
+        </p:txBody>
+      </p:sp>
+      <p:sp>
+        <p:nvSpPr>
+          <p:cNvPr id="12" name="TextBox 11"/>
           <p:cNvSpPr txBox="1"/>
           <p:nvPr/>
         </p:nvSpPr>
         <p:spPr>
           <a:xfrm>
-            <a:off x="1645920" y="5120640"/>
-            <a:ext cx="8900160" cy="548640"/>
+            <a:off x="1097280" y="3886200"/>
+            <a:ext cx="10546080" cy="274320"/>
           </a:xfrm>
           <a:prstGeom prst="rect">
             <a:avLst/>
@@ -8423,15 +8020,252 @@
           </a:bodyPr>
           <a:lstStyle/>
           <a:p>
+            <a:pPr algn="l"/>
+            <a:r>
+              <a:rPr sz="1200" b="0">
+                <a:solidFill>
+                  <a:srgbClr val="6E6E6E"/>
+                </a:solidFill>
+                <a:latin typeface="Calibri"/>
+              </a:rPr>
+              <a:t>Springer  —  diagnóstico de PH por residuales de Schoenfeld</a:t>
+            </a:r>
+          </a:p>
+        </p:txBody>
+      </p:sp>
+      <p:sp>
+        <p:nvSpPr>
+          <p:cNvPr id="13" name="Oval 12"/>
+          <p:cNvSpPr/>
+          <p:nvPr/>
+        </p:nvSpPr>
+        <p:spPr>
+          <a:xfrm>
+            <a:off x="548640" y="4498848"/>
+            <a:ext cx="384048" cy="384048"/>
+          </a:xfrm>
+          <a:prstGeom prst="ellipse">
+            <a:avLst/>
+          </a:prstGeom>
+          <a:solidFill>
+            <a:srgbClr val="E4002B"/>
+          </a:solidFill>
+          <a:ln>
+            <a:noFill/>
+          </a:ln>
+          <a:effectLst/>
+        </p:spPr>
+        <p:style>
+          <a:lnRef idx="1">
+            <a:schemeClr val="accent1"/>
+          </a:lnRef>
+          <a:fillRef idx="3">
+            <a:schemeClr val="accent1"/>
+          </a:fillRef>
+          <a:effectRef idx="2">
+            <a:schemeClr val="accent1"/>
+          </a:effectRef>
+          <a:fontRef idx="minor">
+            <a:schemeClr val="lt1"/>
+          </a:fontRef>
+        </p:style>
+        <p:txBody>
+          <a:bodyPr rtlCol="0" anchor="ctr" lIns="0" rIns="0" tIns="0" bIns="0"/>
+          <a:lstStyle/>
+          <a:p>
             <a:pPr algn="ctr"/>
             <a:r>
-              <a:rPr sz="1500" b="0">
-                <a:solidFill>
-                  <a:srgbClr val="FCEDEE"/>
-                </a:solidFill>
-                <a:latin typeface="Calibri"/>
-              </a:rPr>
-              <a:t>— Kaplan y Meier, 1958 — primera línea del resumen (p. 457)</a:t>
+              <a:rPr sz="1400" b="1">
+                <a:solidFill>
+                  <a:srgbClr val="FFFFFF"/>
+                </a:solidFill>
+                <a:latin typeface="Calibri"/>
+              </a:rPr>
+              <a:t>4</a:t>
+            </a:r>
+          </a:p>
+        </p:txBody>
+      </p:sp>
+      <p:sp>
+        <p:nvSpPr>
+          <p:cNvPr id="14" name="TextBox 13"/>
+          <p:cNvSpPr txBox="1"/>
+          <p:nvPr/>
+        </p:nvSpPr>
+        <p:spPr>
+          <a:xfrm>
+            <a:off x="1097280" y="4471416"/>
+            <a:ext cx="10546080" cy="320040"/>
+          </a:xfrm>
+          <a:prstGeom prst="rect">
+            <a:avLst/>
+          </a:prstGeom>
+          <a:noFill/>
+        </p:spPr>
+        <p:txBody>
+          <a:bodyPr wrap="square" anchor="t" lIns="0" rIns="0" tIns="0" bIns="0">
+            <a:spAutoFit/>
+          </a:bodyPr>
+          <a:lstStyle/>
+          <a:p>
+            <a:pPr algn="l"/>
+            <a:r>
+              <a:rPr sz="1500" b="1">
+                <a:solidFill>
+                  <a:srgbClr val="2D2D2D"/>
+                </a:solidFill>
+                <a:latin typeface="Calibri"/>
+              </a:rPr>
+              <a:t>Fader, Hardie &amp; Lee (2005) — RFM and CLV</a:t>
+            </a:r>
+          </a:p>
+        </p:txBody>
+      </p:sp>
+      <p:sp>
+        <p:nvSpPr>
+          <p:cNvPr id="15" name="TextBox 14"/>
+          <p:cNvSpPr txBox="1"/>
+          <p:nvPr/>
+        </p:nvSpPr>
+        <p:spPr>
+          <a:xfrm>
+            <a:off x="1097280" y="4782312"/>
+            <a:ext cx="10546080" cy="274320"/>
+          </a:xfrm>
+          <a:prstGeom prst="rect">
+            <a:avLst/>
+          </a:prstGeom>
+          <a:noFill/>
+        </p:spPr>
+        <p:txBody>
+          <a:bodyPr wrap="square" anchor="t" lIns="0" rIns="0" tIns="0" bIns="0">
+            <a:spAutoFit/>
+          </a:bodyPr>
+          <a:lstStyle/>
+          <a:p>
+            <a:pPr algn="l"/>
+            <a:r>
+              <a:rPr sz="1200" b="0">
+                <a:solidFill>
+                  <a:srgbClr val="6E6E6E"/>
+                </a:solidFill>
+                <a:latin typeface="Calibri"/>
+              </a:rPr>
+              <a:t>JMR 42(4):415-430  —  CLV desde probabilidades de retención/supervivencia</a:t>
+            </a:r>
+          </a:p>
+        </p:txBody>
+      </p:sp>
+      <p:sp>
+        <p:nvSpPr>
+          <p:cNvPr id="16" name="Oval 15"/>
+          <p:cNvSpPr/>
+          <p:nvPr/>
+        </p:nvSpPr>
+        <p:spPr>
+          <a:xfrm>
+            <a:off x="548640" y="6473952"/>
+            <a:ext cx="100584" cy="100584"/>
+          </a:xfrm>
+          <a:prstGeom prst="ellipse">
+            <a:avLst/>
+          </a:prstGeom>
+          <a:solidFill>
+            <a:srgbClr val="E4002B"/>
+          </a:solidFill>
+          <a:ln>
+            <a:noFill/>
+          </a:ln>
+          <a:effectLst/>
+        </p:spPr>
+        <p:style>
+          <a:lnRef idx="1">
+            <a:schemeClr val="accent1"/>
+          </a:lnRef>
+          <a:fillRef idx="3">
+            <a:schemeClr val="accent1"/>
+          </a:fillRef>
+          <a:effectRef idx="2">
+            <a:schemeClr val="accent1"/>
+          </a:effectRef>
+          <a:fontRef idx="minor">
+            <a:schemeClr val="lt1"/>
+          </a:fontRef>
+        </p:style>
+        <p:txBody>
+          <a:bodyPr rtlCol="0" anchor="ctr"/>
+          <a:lstStyle/>
+          <a:p>
+            <a:pPr algn="ctr"/>
+          </a:p>
+        </p:txBody>
+      </p:sp>
+      <p:sp>
+        <p:nvSpPr>
+          <p:cNvPr id="17" name="TextBox 16"/>
+          <p:cNvSpPr txBox="1"/>
+          <p:nvPr/>
+        </p:nvSpPr>
+        <p:spPr>
+          <a:xfrm>
+            <a:off x="749808" y="6437376"/>
+            <a:ext cx="7772400" cy="274320"/>
+          </a:xfrm>
+          <a:prstGeom prst="rect">
+            <a:avLst/>
+          </a:prstGeom>
+          <a:noFill/>
+        </p:spPr>
+        <p:txBody>
+          <a:bodyPr wrap="square" anchor="t" lIns="0" rIns="0" tIns="0" bIns="0">
+            <a:spAutoFit/>
+          </a:bodyPr>
+          <a:lstStyle/>
+          <a:p>
+            <a:pPr algn="l"/>
+            <a:r>
+              <a:rPr sz="900" b="0">
+                <a:solidFill>
+                  <a:srgbClr val="6E6E6E"/>
+                </a:solidFill>
+                <a:latin typeface="Calibri"/>
+              </a:rPr>
+              <a:t>S13 — Herramientas para la Ciencia de Datos, UPC</a:t>
+            </a:r>
+          </a:p>
+        </p:txBody>
+      </p:sp>
+      <p:sp>
+        <p:nvSpPr>
+          <p:cNvPr id="18" name="TextBox 17"/>
+          <p:cNvSpPr txBox="1"/>
+          <p:nvPr/>
+        </p:nvSpPr>
+        <p:spPr>
+          <a:xfrm>
+            <a:off x="10180320" y="6437376"/>
+            <a:ext cx="1463040" cy="274320"/>
+          </a:xfrm>
+          <a:prstGeom prst="rect">
+            <a:avLst/>
+          </a:prstGeom>
+          <a:noFill/>
+        </p:spPr>
+        <p:txBody>
+          <a:bodyPr wrap="square" anchor="t" lIns="0" rIns="0" tIns="0" bIns="0">
+            <a:spAutoFit/>
+          </a:bodyPr>
+          <a:lstStyle/>
+          <a:p>
+            <a:pPr algn="r"/>
+            <a:r>
+              <a:rPr sz="900" b="0">
+                <a:solidFill>
+                  <a:srgbClr val="6E6E6E"/>
+                </a:solidFill>
+                <a:latin typeface="Calibri"/>
+              </a:rPr>
+              <a:t>17 / 17</a:t>
             </a:r>
           </a:p>
         </p:txBody>
@@ -9580,1893 +9414,7 @@
                 </a:solidFill>
                 <a:latin typeface="Calibri"/>
               </a:rPr>
-              <a:t>2 / 23</a:t>
-            </a:r>
-          </a:p>
-        </p:txBody>
-      </p:sp>
-    </p:spTree>
-  </p:cSld>
-  <p:clrMapOvr>
-    <a:masterClrMapping/>
-  </p:clrMapOvr>
-</p:sld>
-</file>
-
-<file path=ppt/slides/slide20.xml><?xml version="1.0" encoding="utf-8"?>
-<p:sld xmlns:a="http://schemas.openxmlformats.org/drawingml/2006/main" xmlns:p="http://schemas.openxmlformats.org/presentationml/2006/main" xmlns:r="http://schemas.openxmlformats.org/officeDocument/2006/relationships">
-  <p:cSld>
-    <p:bg>
-      <p:bgPr>
-        <a:solidFill>
-          <a:srgbClr val="FFFFFF"/>
-        </a:solidFill>
-        <a:effectLst/>
-      </p:bgPr>
-    </p:bg>
-    <p:spTree>
-      <p:nvGrpSpPr>
-        <p:cNvPr id="1" name=""/>
-        <p:cNvGrpSpPr/>
-        <p:nvPr/>
-      </p:nvGrpSpPr>
-      <p:grpSpPr/>
-      <p:sp>
-        <p:nvSpPr>
-          <p:cNvPr id="2" name="TextBox 1"/>
-          <p:cNvSpPr txBox="1"/>
-          <p:nvPr/>
-        </p:nvSpPr>
-        <p:spPr>
-          <a:xfrm>
-            <a:off x="548640" y="411480"/>
-            <a:ext cx="11094720" cy="292608"/>
-          </a:xfrm>
-          <a:prstGeom prst="rect">
-            <a:avLst/>
-          </a:prstGeom>
-          <a:noFill/>
-        </p:spPr>
-        <p:txBody>
-          <a:bodyPr wrap="square" anchor="t" lIns="0" rIns="0" tIns="0" bIns="0">
-            <a:spAutoFit/>
-          </a:bodyPr>
-          <a:lstStyle/>
-          <a:p>
-            <a:pPr algn="l"/>
-            <a:r>
-              <a:rPr sz="1300" b="1">
-                <a:solidFill>
-                  <a:srgbClr val="9B1B30"/>
-                </a:solidFill>
-                <a:latin typeface="Calibri"/>
-              </a:rPr>
-              <a:t>QUÉ PREGUNTABAN LOS PAPERS Y POR QUÉ USARON LO QUE USARON</a:t>
-            </a:r>
-          </a:p>
-        </p:txBody>
-      </p:sp>
-      <p:sp>
-        <p:nvSpPr>
-          <p:cNvPr id="3" name="TextBox 2"/>
-          <p:cNvSpPr txBox="1"/>
-          <p:nvPr/>
-        </p:nvSpPr>
-        <p:spPr>
-          <a:xfrm>
-            <a:off x="548640" y="731520"/>
-            <a:ext cx="11094720" cy="777240"/>
-          </a:xfrm>
-          <a:prstGeom prst="rect">
-            <a:avLst/>
-          </a:prstGeom>
-          <a:noFill/>
-        </p:spPr>
-        <p:txBody>
-          <a:bodyPr wrap="square" anchor="t" lIns="0" rIns="0" tIns="0" bIns="0">
-            <a:spAutoFit/>
-          </a:bodyPr>
-          <a:lstStyle/>
-          <a:p>
-            <a:pPr algn="l"/>
-            <a:r>
-              <a:rPr sz="4000" b="1">
-                <a:solidFill>
-                  <a:srgbClr val="2D2D2D"/>
-                </a:solidFill>
-                <a:latin typeface="Calibri"/>
-              </a:rPr>
-              <a:t>Tres decisiones, cada una con su alternativa descartada</a:t>
-            </a:r>
-          </a:p>
-        </p:txBody>
-      </p:sp>
-      <p:sp>
-        <p:nvSpPr>
-          <p:cNvPr id="4" name="Rounded Rectangle 3"/>
-          <p:cNvSpPr/>
-          <p:nvPr/>
-        </p:nvSpPr>
-        <p:spPr>
-          <a:xfrm>
-            <a:off x="548640" y="1874519"/>
-            <a:ext cx="3454400" cy="4114800"/>
-          </a:xfrm>
-          <a:prstGeom prst="roundRect">
-            <a:avLst/>
-          </a:prstGeom>
-          <a:solidFill>
-            <a:srgbClr val="FCEDEE"/>
-          </a:solidFill>
-          <a:ln>
-            <a:noFill/>
-          </a:ln>
-          <a:effectLst/>
-        </p:spPr>
-        <p:style>
-          <a:lnRef idx="1">
-            <a:schemeClr val="accent1"/>
-          </a:lnRef>
-          <a:fillRef idx="3">
-            <a:schemeClr val="accent1"/>
-          </a:fillRef>
-          <a:effectRef idx="2">
-            <a:schemeClr val="accent1"/>
-          </a:effectRef>
-          <a:fontRef idx="minor">
-            <a:schemeClr val="lt1"/>
-          </a:fontRef>
-        </p:style>
-        <p:txBody>
-          <a:bodyPr rtlCol="0" anchor="ctr"/>
-          <a:lstStyle/>
-          <a:p>
-            <a:pPr algn="ctr"/>
-          </a:p>
-        </p:txBody>
-      </p:sp>
-      <p:sp>
-        <p:nvSpPr>
-          <p:cNvPr id="5" name="Oval 4"/>
-          <p:cNvSpPr/>
-          <p:nvPr/>
-        </p:nvSpPr>
-        <p:spPr>
-          <a:xfrm>
-            <a:off x="777240" y="2103119"/>
-            <a:ext cx="640080" cy="640080"/>
-          </a:xfrm>
-          <a:prstGeom prst="ellipse">
-            <a:avLst/>
-          </a:prstGeom>
-          <a:solidFill>
-            <a:srgbClr val="E4002B"/>
-          </a:solidFill>
-          <a:ln>
-            <a:noFill/>
-          </a:ln>
-          <a:effectLst/>
-        </p:spPr>
-        <p:style>
-          <a:lnRef idx="1">
-            <a:schemeClr val="accent1"/>
-          </a:lnRef>
-          <a:fillRef idx="3">
-            <a:schemeClr val="accent1"/>
-          </a:fillRef>
-          <a:effectRef idx="2">
-            <a:schemeClr val="accent1"/>
-          </a:effectRef>
-          <a:fontRef idx="minor">
-            <a:schemeClr val="lt1"/>
-          </a:fontRef>
-        </p:style>
-        <p:txBody>
-          <a:bodyPr rtlCol="0" anchor="ctr" lIns="0" rIns="0" tIns="0" bIns="0"/>
-          <a:lstStyle/>
-          <a:p>
-            <a:pPr algn="ctr"/>
-            <a:r>
-              <a:rPr sz="2000" b="1">
-                <a:solidFill>
-                  <a:srgbClr val="FFFFFF"/>
-                </a:solidFill>
-                <a:latin typeface="Calibri"/>
-              </a:rPr>
-              <a:t>1</a:t>
-            </a:r>
-          </a:p>
-        </p:txBody>
-      </p:sp>
-      <p:sp>
-        <p:nvSpPr>
-          <p:cNvPr id="6" name="TextBox 5"/>
-          <p:cNvSpPr txBox="1"/>
-          <p:nvPr/>
-        </p:nvSpPr>
-        <p:spPr>
-          <a:xfrm>
-            <a:off x="777240" y="2926079"/>
-            <a:ext cx="2997200" cy="640080"/>
-          </a:xfrm>
-          <a:prstGeom prst="rect">
-            <a:avLst/>
-          </a:prstGeom>
-          <a:noFill/>
-        </p:spPr>
-        <p:txBody>
-          <a:bodyPr wrap="square" anchor="t" lIns="0" rIns="0" tIns="0" bIns="0">
-            <a:spAutoFit/>
-          </a:bodyPr>
-          <a:lstStyle/>
-          <a:p>
-            <a:pPr algn="l"/>
-            <a:r>
-              <a:rPr sz="1800" b="1">
-                <a:solidFill>
-                  <a:srgbClr val="9B1B30"/>
-                </a:solidFill>
-                <a:latin typeface="Calibri"/>
-              </a:rPr>
-              <a:t>Por qué un producto y no una proporción</a:t>
-            </a:r>
-          </a:p>
-        </p:txBody>
-      </p:sp>
-      <p:sp>
-        <p:nvSpPr>
-          <p:cNvPr id="7" name="TextBox 6"/>
-          <p:cNvSpPr txBox="1"/>
-          <p:nvPr/>
-        </p:nvSpPr>
-        <p:spPr>
-          <a:xfrm>
-            <a:off x="777240" y="3611879"/>
-            <a:ext cx="2997200" cy="1645920"/>
-          </a:xfrm>
-          <a:prstGeom prst="rect">
-            <a:avLst/>
-          </a:prstGeom>
-          <a:noFill/>
-        </p:spPr>
-        <p:txBody>
-          <a:bodyPr wrap="square" anchor="t" lIns="0" rIns="0" tIns="0" bIns="0">
-            <a:spAutoFit/>
-          </a:bodyPr>
-          <a:lstStyle/>
-          <a:p>
-            <a:pPr algn="l">
-              <a:lnSpc>
-                <a:spcPct val="115000"/>
-              </a:lnSpc>
-            </a:pPr>
-            <a:r>
-              <a:rPr sz="1300" b="0">
-                <a:solidFill>
-                  <a:srgbClr val="2D2D2D"/>
-                </a:solidFill>
-                <a:latin typeface="Calibri"/>
-              </a:rPr>
-              <a:t>Con censura, el denominador cambia a cada instante. La única cantidad que TODO sujeto puede alimentar es local: la probabilidad de no fallar en un instante, dado que se llegó vivo hasta ahí.</a:t>
-            </a:r>
-          </a:p>
-        </p:txBody>
-      </p:sp>
-      <p:sp>
-        <p:nvSpPr>
-          <p:cNvPr id="8" name="TextBox 7"/>
-          <p:cNvSpPr txBox="1"/>
-          <p:nvPr/>
-        </p:nvSpPr>
-        <p:spPr>
-          <a:xfrm>
-            <a:off x="777240" y="5303519"/>
-            <a:ext cx="2997200" cy="502920"/>
-          </a:xfrm>
-          <a:prstGeom prst="rect">
-            <a:avLst/>
-          </a:prstGeom>
-          <a:noFill/>
-        </p:spPr>
-        <p:txBody>
-          <a:bodyPr wrap="square" anchor="t" lIns="0" rIns="0" tIns="0" bIns="0">
-            <a:spAutoFit/>
-          </a:bodyPr>
-          <a:lstStyle/>
-          <a:p>
-            <a:pPr algn="l"/>
-            <a:r>
-              <a:rPr sz="1200" b="1">
-                <a:solidFill>
-                  <a:srgbClr val="9B1B30"/>
-                </a:solidFill>
-                <a:latin typeface="Calibri"/>
-              </a:rPr>
-              <a:t>El censurado achica el riesgo, no baja el escalón</a:t>
-            </a:r>
-          </a:p>
-        </p:txBody>
-      </p:sp>
-      <p:sp>
-        <p:nvSpPr>
-          <p:cNvPr id="9" name="Rounded Rectangle 8"/>
-          <p:cNvSpPr/>
-          <p:nvPr/>
-        </p:nvSpPr>
-        <p:spPr>
-          <a:xfrm>
-            <a:off x="4368800" y="1874519"/>
-            <a:ext cx="3454400" cy="4114800"/>
-          </a:xfrm>
-          <a:prstGeom prst="roundRect">
-            <a:avLst/>
-          </a:prstGeom>
-          <a:solidFill>
-            <a:srgbClr val="FCEDEE"/>
-          </a:solidFill>
-          <a:ln>
-            <a:noFill/>
-          </a:ln>
-          <a:effectLst/>
-        </p:spPr>
-        <p:style>
-          <a:lnRef idx="1">
-            <a:schemeClr val="accent1"/>
-          </a:lnRef>
-          <a:fillRef idx="3">
-            <a:schemeClr val="accent1"/>
-          </a:fillRef>
-          <a:effectRef idx="2">
-            <a:schemeClr val="accent1"/>
-          </a:effectRef>
-          <a:fontRef idx="minor">
-            <a:schemeClr val="lt1"/>
-          </a:fontRef>
-        </p:style>
-        <p:txBody>
-          <a:bodyPr rtlCol="0" anchor="ctr"/>
-          <a:lstStyle/>
-          <a:p>
-            <a:pPr algn="ctr"/>
-          </a:p>
-        </p:txBody>
-      </p:sp>
-      <p:sp>
-        <p:nvSpPr>
-          <p:cNvPr id="10" name="Oval 9"/>
-          <p:cNvSpPr/>
-          <p:nvPr/>
-        </p:nvSpPr>
-        <p:spPr>
-          <a:xfrm>
-            <a:off x="4597400" y="2103119"/>
-            <a:ext cx="640080" cy="640080"/>
-          </a:xfrm>
-          <a:prstGeom prst="ellipse">
-            <a:avLst/>
-          </a:prstGeom>
-          <a:solidFill>
-            <a:srgbClr val="E4002B"/>
-          </a:solidFill>
-          <a:ln>
-            <a:noFill/>
-          </a:ln>
-          <a:effectLst/>
-        </p:spPr>
-        <p:style>
-          <a:lnRef idx="1">
-            <a:schemeClr val="accent1"/>
-          </a:lnRef>
-          <a:fillRef idx="3">
-            <a:schemeClr val="accent1"/>
-          </a:fillRef>
-          <a:effectRef idx="2">
-            <a:schemeClr val="accent1"/>
-          </a:effectRef>
-          <a:fontRef idx="minor">
-            <a:schemeClr val="lt1"/>
-          </a:fontRef>
-        </p:style>
-        <p:txBody>
-          <a:bodyPr rtlCol="0" anchor="ctr" lIns="0" rIns="0" tIns="0" bIns="0"/>
-          <a:lstStyle/>
-          <a:p>
-            <a:pPr algn="ctr"/>
-            <a:r>
-              <a:rPr sz="2000" b="1">
-                <a:solidFill>
-                  <a:srgbClr val="FFFFFF"/>
-                </a:solidFill>
-                <a:latin typeface="Calibri"/>
-              </a:rPr>
-              <a:t>2</a:t>
-            </a:r>
-          </a:p>
-        </p:txBody>
-      </p:sp>
-      <p:sp>
-        <p:nvSpPr>
-          <p:cNvPr id="11" name="TextBox 10"/>
-          <p:cNvSpPr txBox="1"/>
-          <p:nvPr/>
-        </p:nvSpPr>
-        <p:spPr>
-          <a:xfrm>
-            <a:off x="4597400" y="2926079"/>
-            <a:ext cx="2997200" cy="640080"/>
-          </a:xfrm>
-          <a:prstGeom prst="rect">
-            <a:avLst/>
-          </a:prstGeom>
-          <a:noFill/>
-        </p:spPr>
-        <p:txBody>
-          <a:bodyPr wrap="square" anchor="t" lIns="0" rIns="0" tIns="0" bIns="0">
-            <a:spAutoFit/>
-          </a:bodyPr>
-          <a:lstStyle/>
-          <a:p>
-            <a:pPr algn="l"/>
-            <a:r>
-              <a:rPr sz="1800" b="1">
-                <a:solidFill>
-                  <a:srgbClr val="9B1B30"/>
-                </a:solidFill>
-                <a:latin typeface="Calibri"/>
-              </a:rPr>
-              <a:t>Por qué el riesgo y no el tiempo</a:t>
-            </a:r>
-          </a:p>
-        </p:txBody>
-      </p:sp>
-      <p:sp>
-        <p:nvSpPr>
-          <p:cNvPr id="12" name="TextBox 11"/>
-          <p:cNvSpPr txBox="1"/>
-          <p:nvPr/>
-        </p:nvSpPr>
-        <p:spPr>
-          <a:xfrm>
-            <a:off x="4597400" y="3611879"/>
-            <a:ext cx="2997200" cy="1645920"/>
-          </a:xfrm>
-          <a:prstGeom prst="rect">
-            <a:avLst/>
-          </a:prstGeom>
-          <a:noFill/>
-        </p:spPr>
-        <p:txBody>
-          <a:bodyPr wrap="square" anchor="t" lIns="0" rIns="0" tIns="0" bIns="0">
-            <a:spAutoFit/>
-          </a:bodyPr>
-          <a:lstStyle/>
-          <a:p>
-            <a:pPr algn="l">
-              <a:lnSpc>
-                <a:spcPct val="115000"/>
-              </a:lnSpc>
-            </a:pPr>
-            <a:r>
-              <a:rPr sz="1300" b="0">
-                <a:solidFill>
-                  <a:srgbClr val="2D2D2D"/>
-                </a:solidFill>
-                <a:latin typeface="Calibri"/>
-              </a:rPr>
-              <a:t>El hazard está definido CONDICIONADO a seguir vivo, que es justo lo que aporta un censurado. La forma de producto deja que cada atributo entre como un factor que multiplica el riesgo.</a:t>
-            </a:r>
-          </a:p>
-        </p:txBody>
-      </p:sp>
-      <p:sp>
-        <p:nvSpPr>
-          <p:cNvPr id="13" name="TextBox 12"/>
-          <p:cNvSpPr txBox="1"/>
-          <p:nvPr/>
-        </p:nvSpPr>
-        <p:spPr>
-          <a:xfrm>
-            <a:off x="4597400" y="5303519"/>
-            <a:ext cx="2997200" cy="502920"/>
-          </a:xfrm>
-          <a:prstGeom prst="rect">
-            <a:avLst/>
-          </a:prstGeom>
-          <a:noFill/>
-        </p:spPr>
-        <p:txBody>
-          <a:bodyPr wrap="square" anchor="t" lIns="0" rIns="0" tIns="0" bIns="0">
-            <a:spAutoFit/>
-          </a:bodyPr>
-          <a:lstStyle/>
-          <a:p>
-            <a:pPr algn="l"/>
-            <a:r>
-              <a:rPr sz="1200" b="1">
-                <a:solidFill>
-                  <a:srgbClr val="9B1B30"/>
-                </a:solidFill>
-                <a:latin typeface="Calibri"/>
-              </a:rPr>
-              <a:t>Postulado «provisionally»: un supuesto, no una verdad</a:t>
-            </a:r>
-          </a:p>
-        </p:txBody>
-      </p:sp>
-      <p:sp>
-        <p:nvSpPr>
-          <p:cNvPr id="14" name="Rounded Rectangle 13"/>
-          <p:cNvSpPr/>
-          <p:nvPr/>
-        </p:nvSpPr>
-        <p:spPr>
-          <a:xfrm>
-            <a:off x="8188960" y="1874519"/>
-            <a:ext cx="3454400" cy="4114800"/>
-          </a:xfrm>
-          <a:prstGeom prst="roundRect">
-            <a:avLst/>
-          </a:prstGeom>
-          <a:solidFill>
-            <a:srgbClr val="FCEDEE"/>
-          </a:solidFill>
-          <a:ln>
-            <a:noFill/>
-          </a:ln>
-          <a:effectLst/>
-        </p:spPr>
-        <p:style>
-          <a:lnRef idx="1">
-            <a:schemeClr val="accent1"/>
-          </a:lnRef>
-          <a:fillRef idx="3">
-            <a:schemeClr val="accent1"/>
-          </a:fillRef>
-          <a:effectRef idx="2">
-            <a:schemeClr val="accent1"/>
-          </a:effectRef>
-          <a:fontRef idx="minor">
-            <a:schemeClr val="lt1"/>
-          </a:fontRef>
-        </p:style>
-        <p:txBody>
-          <a:bodyPr rtlCol="0" anchor="ctr"/>
-          <a:lstStyle/>
-          <a:p>
-            <a:pPr algn="ctr"/>
-          </a:p>
-        </p:txBody>
-      </p:sp>
-      <p:sp>
-        <p:nvSpPr>
-          <p:cNvPr id="15" name="Oval 14"/>
-          <p:cNvSpPr/>
-          <p:nvPr/>
-        </p:nvSpPr>
-        <p:spPr>
-          <a:xfrm>
-            <a:off x="8417560" y="2103119"/>
-            <a:ext cx="640080" cy="640080"/>
-          </a:xfrm>
-          <a:prstGeom prst="ellipse">
-            <a:avLst/>
-          </a:prstGeom>
-          <a:solidFill>
-            <a:srgbClr val="E4002B"/>
-          </a:solidFill>
-          <a:ln>
-            <a:noFill/>
-          </a:ln>
-          <a:effectLst/>
-        </p:spPr>
-        <p:style>
-          <a:lnRef idx="1">
-            <a:schemeClr val="accent1"/>
-          </a:lnRef>
-          <a:fillRef idx="3">
-            <a:schemeClr val="accent1"/>
-          </a:fillRef>
-          <a:effectRef idx="2">
-            <a:schemeClr val="accent1"/>
-          </a:effectRef>
-          <a:fontRef idx="minor">
-            <a:schemeClr val="lt1"/>
-          </a:fontRef>
-        </p:style>
-        <p:txBody>
-          <a:bodyPr rtlCol="0" anchor="ctr" lIns="0" rIns="0" tIns="0" bIns="0"/>
-          <a:lstStyle/>
-          <a:p>
-            <a:pPr algn="ctr"/>
-            <a:r>
-              <a:rPr sz="2000" b="1">
-                <a:solidFill>
-                  <a:srgbClr val="FFFFFF"/>
-                </a:solidFill>
-                <a:latin typeface="Calibri"/>
-              </a:rPr>
-              <a:t>3</a:t>
-            </a:r>
-          </a:p>
-        </p:txBody>
-      </p:sp>
-      <p:sp>
-        <p:nvSpPr>
-          <p:cNvPr id="16" name="TextBox 15"/>
-          <p:cNvSpPr txBox="1"/>
-          <p:nvPr/>
-        </p:nvSpPr>
-        <p:spPr>
-          <a:xfrm>
-            <a:off x="8417560" y="2926079"/>
-            <a:ext cx="2997200" cy="640080"/>
-          </a:xfrm>
-          <a:prstGeom prst="rect">
-            <a:avLst/>
-          </a:prstGeom>
-          <a:noFill/>
-        </p:spPr>
-        <p:txBody>
-          <a:bodyPr wrap="square" anchor="t" lIns="0" rIns="0" tIns="0" bIns="0">
-            <a:spAutoFit/>
-          </a:bodyPr>
-          <a:lstStyle/>
-          <a:p>
-            <a:pPr algn="l"/>
-            <a:r>
-              <a:rPr sz="1800" b="1">
-                <a:solidFill>
-                  <a:srgbClr val="9B1B30"/>
-                </a:solidFill>
-                <a:latin typeface="Calibri"/>
-              </a:rPr>
-              <a:t>Por qué el riesgo base queda libre</a:t>
-            </a:r>
-          </a:p>
-        </p:txBody>
-      </p:sp>
-      <p:sp>
-        <p:nvSpPr>
-          <p:cNvPr id="17" name="TextBox 16"/>
-          <p:cNvSpPr txBox="1"/>
-          <p:nvPr/>
-        </p:nvSpPr>
-        <p:spPr>
-          <a:xfrm>
-            <a:off x="8417560" y="3611879"/>
-            <a:ext cx="2997200" cy="1645920"/>
-          </a:xfrm>
-          <a:prstGeom prst="rect">
-            <a:avLst/>
-          </a:prstGeom>
-          <a:noFill/>
-        </p:spPr>
-        <p:txBody>
-          <a:bodyPr wrap="square" anchor="t" lIns="0" rIns="0" tIns="0" bIns="0">
-            <a:spAutoFit/>
-          </a:bodyPr>
-          <a:lstStyle/>
-          <a:p>
-            <a:pPr algn="l">
-              <a:lnSpc>
-                <a:spcPct val="115000"/>
-              </a:lnSpc>
-            </a:pPr>
-            <a:r>
-              <a:rPr sz="1300" b="0">
-                <a:solidFill>
-                  <a:srgbClr val="2D2D2D"/>
-                </a:solidFill>
-                <a:latin typeface="Calibri"/>
-              </a:rPr>
-              <a:t>Se gana no decidir la forma de la curva base, para la que casi nunca hay evidencia. Se paga que el efecto ya no puede depender del tiempo: riesgos proporcionales.</a:t>
-            </a:r>
-          </a:p>
-        </p:txBody>
-      </p:sp>
-      <p:sp>
-        <p:nvSpPr>
-          <p:cNvPr id="18" name="TextBox 17"/>
-          <p:cNvSpPr txBox="1"/>
-          <p:nvPr/>
-        </p:nvSpPr>
-        <p:spPr>
-          <a:xfrm>
-            <a:off x="8417560" y="5303519"/>
-            <a:ext cx="2997200" cy="502920"/>
-          </a:xfrm>
-          <a:prstGeom prst="rect">
-            <a:avLst/>
-          </a:prstGeom>
-          <a:noFill/>
-        </p:spPr>
-        <p:txBody>
-          <a:bodyPr wrap="square" anchor="t" lIns="0" rIns="0" tIns="0" bIns="0">
-            <a:spAutoFit/>
-          </a:bodyPr>
-          <a:lstStyle/>
-          <a:p>
-            <a:pPr algn="l"/>
-            <a:r>
-              <a:rPr sz="1200" b="1">
-                <a:solidFill>
-                  <a:srgbClr val="9B1B30"/>
-                </a:solidFill>
-                <a:latin typeface="Calibri"/>
-              </a:rPr>
-              <a:t>La factura se cobra en el test de Schoenfeld</a:t>
-            </a:r>
-          </a:p>
-        </p:txBody>
-      </p:sp>
-      <p:sp>
-        <p:nvSpPr>
-          <p:cNvPr id="19" name="TextBox 18"/>
-          <p:cNvSpPr txBox="1"/>
-          <p:nvPr/>
-        </p:nvSpPr>
-        <p:spPr>
-          <a:xfrm>
-            <a:off x="548640" y="5870448"/>
-            <a:ext cx="11064240" cy="320040"/>
-          </a:xfrm>
-          <a:prstGeom prst="rect">
-            <a:avLst/>
-          </a:prstGeom>
-          <a:noFill/>
-        </p:spPr>
-        <p:txBody>
-          <a:bodyPr wrap="square">
-            <a:spAutoFit/>
-          </a:bodyPr>
-          <a:lstStyle/>
-          <a:p>
-            <a:r>
-              <a:rPr sz="1000">
-                <a:solidFill>
-                  <a:srgbClr val="6E6E6E"/>
-                </a:solidFill>
-                <a:latin typeface="Calibri"/>
-              </a:rPr>
-              <a:t>Decisiones documentadas en los originales: REPLICACION_PAPER Sección 0.3 (Kaplan y Meier 1958, pp. 457-458; Cox 1972 y su relato de 1986).</a:t>
-            </a:r>
-          </a:p>
-        </p:txBody>
-      </p:sp>
-      <p:sp>
-        <p:nvSpPr>
-          <p:cNvPr id="20" name="Oval 19"/>
-          <p:cNvSpPr/>
-          <p:nvPr/>
-        </p:nvSpPr>
-        <p:spPr>
-          <a:xfrm>
-            <a:off x="548640" y="6473952"/>
-            <a:ext cx="100584" cy="100584"/>
-          </a:xfrm>
-          <a:prstGeom prst="ellipse">
-            <a:avLst/>
-          </a:prstGeom>
-          <a:solidFill>
-            <a:srgbClr val="E4002B"/>
-          </a:solidFill>
-          <a:ln>
-            <a:noFill/>
-          </a:ln>
-          <a:effectLst/>
-        </p:spPr>
-        <p:style>
-          <a:lnRef idx="1">
-            <a:schemeClr val="accent1"/>
-          </a:lnRef>
-          <a:fillRef idx="3">
-            <a:schemeClr val="accent1"/>
-          </a:fillRef>
-          <a:effectRef idx="2">
-            <a:schemeClr val="accent1"/>
-          </a:effectRef>
-          <a:fontRef idx="minor">
-            <a:schemeClr val="lt1"/>
-          </a:fontRef>
-        </p:style>
-        <p:txBody>
-          <a:bodyPr rtlCol="0" anchor="ctr"/>
-          <a:lstStyle/>
-          <a:p>
-            <a:pPr algn="ctr"/>
-          </a:p>
-        </p:txBody>
-      </p:sp>
-      <p:sp>
-        <p:nvSpPr>
-          <p:cNvPr id="21" name="TextBox 20"/>
-          <p:cNvSpPr txBox="1"/>
-          <p:nvPr/>
-        </p:nvSpPr>
-        <p:spPr>
-          <a:xfrm>
-            <a:off x="749808" y="6437376"/>
-            <a:ext cx="7772400" cy="274320"/>
-          </a:xfrm>
-          <a:prstGeom prst="rect">
-            <a:avLst/>
-          </a:prstGeom>
-          <a:noFill/>
-        </p:spPr>
-        <p:txBody>
-          <a:bodyPr wrap="square" anchor="t" lIns="0" rIns="0" tIns="0" bIns="0">
-            <a:spAutoFit/>
-          </a:bodyPr>
-          <a:lstStyle/>
-          <a:p>
-            <a:pPr algn="l"/>
-            <a:r>
-              <a:rPr sz="900" b="0">
-                <a:solidFill>
-                  <a:srgbClr val="6E6E6E"/>
-                </a:solidFill>
-                <a:latin typeface="Calibri"/>
-              </a:rPr>
-              <a:t>S13 — Herramientas para la Ciencia de Datos, UPC</a:t>
-            </a:r>
-          </a:p>
-        </p:txBody>
-      </p:sp>
-      <p:sp>
-        <p:nvSpPr>
-          <p:cNvPr id="22" name="TextBox 21"/>
-          <p:cNvSpPr txBox="1"/>
-          <p:nvPr/>
-        </p:nvSpPr>
-        <p:spPr>
-          <a:xfrm>
-            <a:off x="10180320" y="6437376"/>
-            <a:ext cx="1463040" cy="274320"/>
-          </a:xfrm>
-          <a:prstGeom prst="rect">
-            <a:avLst/>
-          </a:prstGeom>
-          <a:noFill/>
-        </p:spPr>
-        <p:txBody>
-          <a:bodyPr wrap="square" anchor="t" lIns="0" rIns="0" tIns="0" bIns="0">
-            <a:spAutoFit/>
-          </a:bodyPr>
-          <a:lstStyle/>
-          <a:p>
-            <a:pPr algn="r"/>
-            <a:r>
-              <a:rPr sz="900" b="0">
-                <a:solidFill>
-                  <a:srgbClr val="6E6E6E"/>
-                </a:solidFill>
-                <a:latin typeface="Calibri"/>
-              </a:rPr>
-              <a:t>20 / 23</a:t>
-            </a:r>
-          </a:p>
-        </p:txBody>
-      </p:sp>
-    </p:spTree>
-  </p:cSld>
-  <p:clrMapOvr>
-    <a:masterClrMapping/>
-  </p:clrMapOvr>
-</p:sld>
-</file>
-
-<file path=ppt/slides/slide21.xml><?xml version="1.0" encoding="utf-8"?>
-<p:sld xmlns:a="http://schemas.openxmlformats.org/drawingml/2006/main" xmlns:p="http://schemas.openxmlformats.org/presentationml/2006/main" xmlns:r="http://schemas.openxmlformats.org/officeDocument/2006/relationships">
-  <p:cSld>
-    <p:bg>
-      <p:bgPr>
-        <a:solidFill>
-          <a:srgbClr val="9B1B30"/>
-        </a:solidFill>
-        <a:effectLst/>
-      </p:bgPr>
-    </p:bg>
-    <p:spTree>
-      <p:nvGrpSpPr>
-        <p:cNvPr id="1" name=""/>
-        <p:cNvGrpSpPr/>
-        <p:nvPr/>
-      </p:nvGrpSpPr>
-      <p:grpSpPr/>
-      <p:sp>
-        <p:nvSpPr>
-          <p:cNvPr id="2" name="Oval 1"/>
-          <p:cNvSpPr/>
-          <p:nvPr/>
-        </p:nvSpPr>
-        <p:spPr>
-          <a:xfrm>
-            <a:off x="914400" y="2103120"/>
-            <a:ext cx="2377440" cy="2377440"/>
-          </a:xfrm>
-          <a:prstGeom prst="ellipse">
-            <a:avLst/>
-          </a:prstGeom>
-          <a:solidFill>
-            <a:srgbClr val="FFFFFF"/>
-          </a:solidFill>
-          <a:ln>
-            <a:noFill/>
-          </a:ln>
-          <a:effectLst/>
-        </p:spPr>
-        <p:style>
-          <a:lnRef idx="1">
-            <a:schemeClr val="accent1"/>
-          </a:lnRef>
-          <a:fillRef idx="3">
-            <a:schemeClr val="accent1"/>
-          </a:fillRef>
-          <a:effectRef idx="2">
-            <a:schemeClr val="accent1"/>
-          </a:effectRef>
-          <a:fontRef idx="minor">
-            <a:schemeClr val="lt1"/>
-          </a:fontRef>
-        </p:style>
-        <p:txBody>
-          <a:bodyPr rtlCol="0" anchor="ctr" lIns="0" rIns="0" tIns="0" bIns="0"/>
-          <a:lstStyle/>
-          <a:p>
-            <a:pPr algn="ctr"/>
-            <a:r>
-              <a:rPr sz="10000" b="1">
-                <a:solidFill>
-                  <a:srgbClr val="9B1B30"/>
-                </a:solidFill>
-                <a:latin typeface="Calibri"/>
-              </a:rPr>
-              <a:t>4</a:t>
-            </a:r>
-          </a:p>
-        </p:txBody>
-      </p:sp>
-      <p:sp>
-        <p:nvSpPr>
-          <p:cNvPr id="3" name="TextBox 2"/>
-          <p:cNvSpPr txBox="1"/>
-          <p:nvPr/>
-        </p:nvSpPr>
-        <p:spPr>
-          <a:xfrm>
-            <a:off x="3931920" y="2651760"/>
-            <a:ext cx="7589520" cy="1371600"/>
-          </a:xfrm>
-          <a:prstGeom prst="rect">
-            <a:avLst/>
-          </a:prstGeom>
-          <a:noFill/>
-        </p:spPr>
-        <p:txBody>
-          <a:bodyPr wrap="square" anchor="t" lIns="0" rIns="0" tIns="0" bIns="0">
-            <a:spAutoFit/>
-          </a:bodyPr>
-          <a:lstStyle/>
-          <a:p>
-            <a:pPr algn="l"/>
-            <a:r>
-              <a:rPr sz="4000" b="1">
-                <a:solidFill>
-                  <a:srgbClr val="FFFFFF"/>
-                </a:solidFill>
-                <a:latin typeface="Calibri"/>
-              </a:rPr>
-              <a:t>¿Cómo se mide el efecto de una variable sobre el tiempo?</a:t>
-            </a:r>
-          </a:p>
-        </p:txBody>
-      </p:sp>
-      <p:sp>
-        <p:nvSpPr>
-          <p:cNvPr id="4" name="TextBox 3"/>
-          <p:cNvSpPr txBox="1"/>
-          <p:nvPr/>
-        </p:nvSpPr>
-        <p:spPr>
-          <a:xfrm>
-            <a:off x="3931920" y="3977639"/>
-            <a:ext cx="7589520" cy="914400"/>
-          </a:xfrm>
-          <a:prstGeom prst="rect">
-            <a:avLst/>
-          </a:prstGeom>
-          <a:noFill/>
-        </p:spPr>
-        <p:txBody>
-          <a:bodyPr wrap="square" anchor="t" lIns="0" rIns="0" tIns="0" bIns="0">
-            <a:spAutoFit/>
-          </a:bodyPr>
-          <a:lstStyle/>
-          <a:p>
-            <a:pPr algn="l"/>
-            <a:r>
-              <a:rPr sz="1700" b="0">
-                <a:solidFill>
-                  <a:srgbClr val="FCEDEE"/>
-                </a:solidFill>
-                <a:latin typeface="Calibri"/>
-              </a:rPr>
-              <a:t>¿Cómo se mide el efecto de una variable sobre el tiempo?</a:t>
-            </a:r>
-          </a:p>
-        </p:txBody>
-      </p:sp>
-      <p:pic>
-        <p:nvPicPr>
-          <p:cNvPr id="5" name="Picture 4" descr="chart-column__FFFFFF.png"/>
-          <p:cNvPicPr>
-            <a:picLocks noChangeAspect="1"/>
-          </p:cNvPicPr>
-          <p:nvPr/>
-        </p:nvPicPr>
-        <p:blipFill>
-          <a:blip r:embed="rId2"/>
-          <a:stretch>
-            <a:fillRect/>
-          </a:stretch>
-        </p:blipFill>
-        <p:spPr>
-          <a:xfrm>
-            <a:off x="10195560" y="640080"/>
-            <a:ext cx="1051560" cy="1051560"/>
-          </a:xfrm>
-          <a:prstGeom prst="rect">
-            <a:avLst/>
-          </a:prstGeom>
-        </p:spPr>
-      </p:pic>
-    </p:spTree>
-  </p:cSld>
-  <p:clrMapOvr>
-    <a:masterClrMapping/>
-  </p:clrMapOvr>
-</p:sld>
-</file>
-
-<file path=ppt/slides/slide22.xml><?xml version="1.0" encoding="utf-8"?>
-<p:sld xmlns:a="http://schemas.openxmlformats.org/drawingml/2006/main" xmlns:p="http://schemas.openxmlformats.org/presentationml/2006/main" xmlns:r="http://schemas.openxmlformats.org/officeDocument/2006/relationships">
-  <p:cSld>
-    <p:bg>
-      <p:bgPr>
-        <a:solidFill>
-          <a:srgbClr val="FCEDEE"/>
-        </a:solidFill>
-        <a:effectLst/>
-      </p:bgPr>
-    </p:bg>
-    <p:spTree>
-      <p:nvGrpSpPr>
-        <p:cNvPr id="1" name=""/>
-        <p:cNvGrpSpPr/>
-        <p:nvPr/>
-      </p:nvGrpSpPr>
-      <p:grpSpPr/>
-      <p:sp>
-        <p:nvSpPr>
-          <p:cNvPr id="2" name="Oval 1"/>
-          <p:cNvSpPr/>
-          <p:nvPr/>
-        </p:nvSpPr>
-        <p:spPr>
-          <a:xfrm>
-            <a:off x="5593080" y="914400"/>
-            <a:ext cx="1005840" cy="1005840"/>
-          </a:xfrm>
-          <a:prstGeom prst="ellipse">
-            <a:avLst/>
-          </a:prstGeom>
-          <a:solidFill>
-            <a:srgbClr val="E4002B"/>
-          </a:solidFill>
-          <a:ln>
-            <a:noFill/>
-          </a:ln>
-          <a:effectLst/>
-        </p:spPr>
-        <p:style>
-          <a:lnRef idx="1">
-            <a:schemeClr val="accent1"/>
-          </a:lnRef>
-          <a:fillRef idx="3">
-            <a:schemeClr val="accent1"/>
-          </a:fillRef>
-          <a:effectRef idx="2">
-            <a:schemeClr val="accent1"/>
-          </a:effectRef>
-          <a:fontRef idx="minor">
-            <a:schemeClr val="lt1"/>
-          </a:fontRef>
-        </p:style>
-        <p:txBody>
-          <a:bodyPr rtlCol="0" anchor="ctr" lIns="0" rIns="0" tIns="0" bIns="0"/>
-          <a:lstStyle/>
-          <a:p>
-            <a:pPr algn="ctr"/>
-            <a:r>
-              <a:rPr sz="4400" b="1">
-                <a:solidFill>
-                  <a:srgbClr val="FFFFFF"/>
-                </a:solidFill>
-                <a:latin typeface="Calibri"/>
-              </a:rPr>
-              <a:t>?</a:t>
-            </a:r>
-          </a:p>
-        </p:txBody>
-      </p:sp>
-      <p:sp>
-        <p:nvSpPr>
-          <p:cNvPr id="3" name="TextBox 2"/>
-          <p:cNvSpPr txBox="1"/>
-          <p:nvPr/>
-        </p:nvSpPr>
-        <p:spPr>
-          <a:xfrm>
-            <a:off x="1371600" y="2468880"/>
-            <a:ext cx="9448800" cy="2011680"/>
-          </a:xfrm>
-          <a:prstGeom prst="rect">
-            <a:avLst/>
-          </a:prstGeom>
-          <a:noFill/>
-        </p:spPr>
-        <p:txBody>
-          <a:bodyPr wrap="square" anchor="t" lIns="0" rIns="0" tIns="0" bIns="0">
-            <a:spAutoFit/>
-          </a:bodyPr>
-          <a:lstStyle/>
-          <a:p>
-            <a:pPr algn="ctr"/>
-            <a:r>
-              <a:rPr sz="3200" b="1">
-                <a:solidFill>
-                  <a:srgbClr val="9B1B30"/>
-                </a:solidFill>
-                <a:latin typeface="Calibri"/>
-              </a:rPr>
-              <a:t>¿Un factor que predice el churn siempre sirve para decidir la intervención?</a:t>
-            </a:r>
-          </a:p>
-        </p:txBody>
-      </p:sp>
-      <p:sp>
-        <p:nvSpPr>
-          <p:cNvPr id="4" name="TextBox 3"/>
-          <p:cNvSpPr txBox="1"/>
-          <p:nvPr/>
-        </p:nvSpPr>
-        <p:spPr>
-          <a:xfrm>
-            <a:off x="2011680" y="4754880"/>
-            <a:ext cx="8168640" cy="1280160"/>
-          </a:xfrm>
-          <a:prstGeom prst="rect">
-            <a:avLst/>
-          </a:prstGeom>
-          <a:noFill/>
-        </p:spPr>
-        <p:txBody>
-          <a:bodyPr wrap="square" anchor="t" lIns="0" rIns="0" tIns="0" bIns="0">
-            <a:spAutoFit/>
-          </a:bodyPr>
-          <a:lstStyle/>
-          <a:p>
-            <a:pPr algn="ctr"/>
-            <a:r>
-              <a:rPr sz="1500" b="0">
-                <a:solidFill>
-                  <a:srgbClr val="2D2D2D"/>
-                </a:solidFill>
-                <a:latin typeface="Calibri"/>
-              </a:rPr>
-              <a:t>prio es muy significativo pero no accionable; fin es protector y accionable. Significativo no es lo mismo que útil.</a:t>
-            </a:r>
-          </a:p>
-        </p:txBody>
-      </p:sp>
-    </p:spTree>
-  </p:cSld>
-  <p:clrMapOvr>
-    <a:masterClrMapping/>
-  </p:clrMapOvr>
-</p:sld>
-</file>
-
-<file path=ppt/slides/slide23.xml><?xml version="1.0" encoding="utf-8"?>
-<p:sld xmlns:a="http://schemas.openxmlformats.org/drawingml/2006/main" xmlns:p="http://schemas.openxmlformats.org/presentationml/2006/main" xmlns:r="http://schemas.openxmlformats.org/officeDocument/2006/relationships">
-  <p:cSld>
-    <p:bg>
-      <p:bgPr>
-        <a:solidFill>
-          <a:srgbClr val="FFFFFF"/>
-        </a:solidFill>
-        <a:effectLst/>
-      </p:bgPr>
-    </p:bg>
-    <p:spTree>
-      <p:nvGrpSpPr>
-        <p:cNvPr id="1" name=""/>
-        <p:cNvGrpSpPr/>
-        <p:nvPr/>
-      </p:nvGrpSpPr>
-      <p:grpSpPr/>
-      <p:sp>
-        <p:nvSpPr>
-          <p:cNvPr id="2" name="TextBox 1"/>
-          <p:cNvSpPr txBox="1"/>
-          <p:nvPr/>
-        </p:nvSpPr>
-        <p:spPr>
-          <a:xfrm>
-            <a:off x="548640" y="411480"/>
-            <a:ext cx="11094720" cy="292608"/>
-          </a:xfrm>
-          <a:prstGeom prst="rect">
-            <a:avLst/>
-          </a:prstGeom>
-          <a:noFill/>
-        </p:spPr>
-        <p:txBody>
-          <a:bodyPr wrap="square" anchor="t" lIns="0" rIns="0" tIns="0" bIns="0">
-            <a:spAutoFit/>
-          </a:bodyPr>
-          <a:lstStyle/>
-          <a:p>
-            <a:pPr algn="l"/>
-            <a:r>
-              <a:rPr sz="1300" b="1">
-                <a:solidFill>
-                  <a:srgbClr val="9B1B30"/>
-                </a:solidFill>
-                <a:latin typeface="Calibri"/>
-              </a:rPr>
-              <a:t>BIBLIOGRAFÍA</a:t>
-            </a:r>
-          </a:p>
-        </p:txBody>
-      </p:sp>
-      <p:sp>
-        <p:nvSpPr>
-          <p:cNvPr id="3" name="TextBox 2"/>
-          <p:cNvSpPr txBox="1"/>
-          <p:nvPr/>
-        </p:nvSpPr>
-        <p:spPr>
-          <a:xfrm>
-            <a:off x="548640" y="731520"/>
-            <a:ext cx="11094720" cy="777240"/>
-          </a:xfrm>
-          <a:prstGeom prst="rect">
-            <a:avLst/>
-          </a:prstGeom>
-          <a:noFill/>
-        </p:spPr>
-        <p:txBody>
-          <a:bodyPr wrap="square" anchor="t" lIns="0" rIns="0" tIns="0" bIns="0">
-            <a:spAutoFit/>
-          </a:bodyPr>
-          <a:lstStyle/>
-          <a:p>
-            <a:pPr algn="l"/>
-            <a:r>
-              <a:rPr sz="4000" b="1">
-                <a:solidFill>
-                  <a:srgbClr val="2D2D2D"/>
-                </a:solidFill>
-                <a:latin typeface="Calibri"/>
-              </a:rPr>
-              <a:t>Cuatro lecturas anclan la supervivencia y el CLV</a:t>
-            </a:r>
-          </a:p>
-        </p:txBody>
-      </p:sp>
-      <p:sp>
-        <p:nvSpPr>
-          <p:cNvPr id="4" name="Oval 3"/>
-          <p:cNvSpPr/>
-          <p:nvPr/>
-        </p:nvSpPr>
-        <p:spPr>
-          <a:xfrm>
-            <a:off x="548640" y="1810512"/>
-            <a:ext cx="384048" cy="384048"/>
-          </a:xfrm>
-          <a:prstGeom prst="ellipse">
-            <a:avLst/>
-          </a:prstGeom>
-          <a:solidFill>
-            <a:srgbClr val="E4002B"/>
-          </a:solidFill>
-          <a:ln>
-            <a:noFill/>
-          </a:ln>
-          <a:effectLst/>
-        </p:spPr>
-        <p:style>
-          <a:lnRef idx="1">
-            <a:schemeClr val="accent1"/>
-          </a:lnRef>
-          <a:fillRef idx="3">
-            <a:schemeClr val="accent1"/>
-          </a:fillRef>
-          <a:effectRef idx="2">
-            <a:schemeClr val="accent1"/>
-          </a:effectRef>
-          <a:fontRef idx="minor">
-            <a:schemeClr val="lt1"/>
-          </a:fontRef>
-        </p:style>
-        <p:txBody>
-          <a:bodyPr rtlCol="0" anchor="ctr" lIns="0" rIns="0" tIns="0" bIns="0"/>
-          <a:lstStyle/>
-          <a:p>
-            <a:pPr algn="ctr"/>
-            <a:r>
-              <a:rPr sz="1400" b="1">
-                <a:solidFill>
-                  <a:srgbClr val="FFFFFF"/>
-                </a:solidFill>
-                <a:latin typeface="Calibri"/>
-              </a:rPr>
-              <a:t>1</a:t>
-            </a:r>
-          </a:p>
-        </p:txBody>
-      </p:sp>
-      <p:sp>
-        <p:nvSpPr>
-          <p:cNvPr id="5" name="TextBox 4"/>
-          <p:cNvSpPr txBox="1"/>
-          <p:nvPr/>
-        </p:nvSpPr>
-        <p:spPr>
-          <a:xfrm>
-            <a:off x="1097280" y="1783080"/>
-            <a:ext cx="10546080" cy="320040"/>
-          </a:xfrm>
-          <a:prstGeom prst="rect">
-            <a:avLst/>
-          </a:prstGeom>
-          <a:noFill/>
-        </p:spPr>
-        <p:txBody>
-          <a:bodyPr wrap="square" anchor="t" lIns="0" rIns="0" tIns="0" bIns="0">
-            <a:spAutoFit/>
-          </a:bodyPr>
-          <a:lstStyle/>
-          <a:p>
-            <a:pPr algn="l"/>
-            <a:r>
-              <a:rPr sz="1500" b="1">
-                <a:solidFill>
-                  <a:srgbClr val="2D2D2D"/>
-                </a:solidFill>
-                <a:latin typeface="Calibri"/>
-              </a:rPr>
-              <a:t>Kaplan &amp; Meier (1958) — Nonparametric Estimation</a:t>
-            </a:r>
-          </a:p>
-        </p:txBody>
-      </p:sp>
-      <p:sp>
-        <p:nvSpPr>
-          <p:cNvPr id="6" name="TextBox 5"/>
-          <p:cNvSpPr txBox="1"/>
-          <p:nvPr/>
-        </p:nvSpPr>
-        <p:spPr>
-          <a:xfrm>
-            <a:off x="1097280" y="2093976"/>
-            <a:ext cx="10546080" cy="274320"/>
-          </a:xfrm>
-          <a:prstGeom prst="rect">
-            <a:avLst/>
-          </a:prstGeom>
-          <a:noFill/>
-        </p:spPr>
-        <p:txBody>
-          <a:bodyPr wrap="square" anchor="t" lIns="0" rIns="0" tIns="0" bIns="0">
-            <a:spAutoFit/>
-          </a:bodyPr>
-          <a:lstStyle/>
-          <a:p>
-            <a:pPr algn="l"/>
-            <a:r>
-              <a:rPr sz="1200" b="0">
-                <a:solidFill>
-                  <a:srgbClr val="6E6E6E"/>
-                </a:solidFill>
-                <a:latin typeface="Calibri"/>
-              </a:rPr>
-              <a:t>JASA 53(282):457-481  —  el estimador producto-límite y la curva de retención</a:t>
-            </a:r>
-          </a:p>
-        </p:txBody>
-      </p:sp>
-      <p:sp>
-        <p:nvSpPr>
-          <p:cNvPr id="7" name="Oval 6"/>
-          <p:cNvSpPr/>
-          <p:nvPr/>
-        </p:nvSpPr>
-        <p:spPr>
-          <a:xfrm>
-            <a:off x="548640" y="2706624"/>
-            <a:ext cx="384048" cy="384048"/>
-          </a:xfrm>
-          <a:prstGeom prst="ellipse">
-            <a:avLst/>
-          </a:prstGeom>
-          <a:solidFill>
-            <a:srgbClr val="E4002B"/>
-          </a:solidFill>
-          <a:ln>
-            <a:noFill/>
-          </a:ln>
-          <a:effectLst/>
-        </p:spPr>
-        <p:style>
-          <a:lnRef idx="1">
-            <a:schemeClr val="accent1"/>
-          </a:lnRef>
-          <a:fillRef idx="3">
-            <a:schemeClr val="accent1"/>
-          </a:fillRef>
-          <a:effectRef idx="2">
-            <a:schemeClr val="accent1"/>
-          </a:effectRef>
-          <a:fontRef idx="minor">
-            <a:schemeClr val="lt1"/>
-          </a:fontRef>
-        </p:style>
-        <p:txBody>
-          <a:bodyPr rtlCol="0" anchor="ctr" lIns="0" rIns="0" tIns="0" bIns="0"/>
-          <a:lstStyle/>
-          <a:p>
-            <a:pPr algn="ctr"/>
-            <a:r>
-              <a:rPr sz="1400" b="1">
-                <a:solidFill>
-                  <a:srgbClr val="FFFFFF"/>
-                </a:solidFill>
-                <a:latin typeface="Calibri"/>
-              </a:rPr>
-              <a:t>2</a:t>
-            </a:r>
-          </a:p>
-        </p:txBody>
-      </p:sp>
-      <p:sp>
-        <p:nvSpPr>
-          <p:cNvPr id="8" name="TextBox 7"/>
-          <p:cNvSpPr txBox="1"/>
-          <p:nvPr/>
-        </p:nvSpPr>
-        <p:spPr>
-          <a:xfrm>
-            <a:off x="1097280" y="2679192"/>
-            <a:ext cx="10546080" cy="320040"/>
-          </a:xfrm>
-          <a:prstGeom prst="rect">
-            <a:avLst/>
-          </a:prstGeom>
-          <a:noFill/>
-        </p:spPr>
-        <p:txBody>
-          <a:bodyPr wrap="square" anchor="t" lIns="0" rIns="0" tIns="0" bIns="0">
-            <a:spAutoFit/>
-          </a:bodyPr>
-          <a:lstStyle/>
-          <a:p>
-            <a:pPr algn="l"/>
-            <a:r>
-              <a:rPr sz="1500" b="1">
-                <a:solidFill>
-                  <a:srgbClr val="2D2D2D"/>
-                </a:solidFill>
-                <a:latin typeface="Calibri"/>
-              </a:rPr>
-              <a:t>Cox (1972) — Regression Models and Life-Tables</a:t>
-            </a:r>
-          </a:p>
-        </p:txBody>
-      </p:sp>
-      <p:sp>
-        <p:nvSpPr>
-          <p:cNvPr id="9" name="TextBox 8"/>
-          <p:cNvSpPr txBox="1"/>
-          <p:nvPr/>
-        </p:nvSpPr>
-        <p:spPr>
-          <a:xfrm>
-            <a:off x="1097280" y="2990088"/>
-            <a:ext cx="10546080" cy="274320"/>
-          </a:xfrm>
-          <a:prstGeom prst="rect">
-            <a:avLst/>
-          </a:prstGeom>
-          <a:noFill/>
-        </p:spPr>
-        <p:txBody>
-          <a:bodyPr wrap="square" anchor="t" lIns="0" rIns="0" tIns="0" bIns="0">
-            <a:spAutoFit/>
-          </a:bodyPr>
-          <a:lstStyle/>
-          <a:p>
-            <a:pPr algn="l"/>
-            <a:r>
-              <a:rPr sz="1200" b="0">
-                <a:solidFill>
-                  <a:srgbClr val="6E6E6E"/>
-                </a:solidFill>
-                <a:latin typeface="Calibri"/>
-              </a:rPr>
-              <a:t>JRSS-B 34(2):187-220  —  el modelo de riesgos proporcionales y el hazard ratio</a:t>
-            </a:r>
-          </a:p>
-        </p:txBody>
-      </p:sp>
-      <p:sp>
-        <p:nvSpPr>
-          <p:cNvPr id="10" name="Oval 9"/>
-          <p:cNvSpPr/>
-          <p:nvPr/>
-        </p:nvSpPr>
-        <p:spPr>
-          <a:xfrm>
-            <a:off x="548640" y="3602736"/>
-            <a:ext cx="384048" cy="384048"/>
-          </a:xfrm>
-          <a:prstGeom prst="ellipse">
-            <a:avLst/>
-          </a:prstGeom>
-          <a:solidFill>
-            <a:srgbClr val="E4002B"/>
-          </a:solidFill>
-          <a:ln>
-            <a:noFill/>
-          </a:ln>
-          <a:effectLst/>
-        </p:spPr>
-        <p:style>
-          <a:lnRef idx="1">
-            <a:schemeClr val="accent1"/>
-          </a:lnRef>
-          <a:fillRef idx="3">
-            <a:schemeClr val="accent1"/>
-          </a:fillRef>
-          <a:effectRef idx="2">
-            <a:schemeClr val="accent1"/>
-          </a:effectRef>
-          <a:fontRef idx="minor">
-            <a:schemeClr val="lt1"/>
-          </a:fontRef>
-        </p:style>
-        <p:txBody>
-          <a:bodyPr rtlCol="0" anchor="ctr" lIns="0" rIns="0" tIns="0" bIns="0"/>
-          <a:lstStyle/>
-          <a:p>
-            <a:pPr algn="ctr"/>
-            <a:r>
-              <a:rPr sz="1400" b="1">
-                <a:solidFill>
-                  <a:srgbClr val="FFFFFF"/>
-                </a:solidFill>
-                <a:latin typeface="Calibri"/>
-              </a:rPr>
-              <a:t>3</a:t>
-            </a:r>
-          </a:p>
-        </p:txBody>
-      </p:sp>
-      <p:sp>
-        <p:nvSpPr>
-          <p:cNvPr id="11" name="TextBox 10"/>
-          <p:cNvSpPr txBox="1"/>
-          <p:nvPr/>
-        </p:nvSpPr>
-        <p:spPr>
-          <a:xfrm>
-            <a:off x="1097280" y="3575304"/>
-            <a:ext cx="10546080" cy="320040"/>
-          </a:xfrm>
-          <a:prstGeom prst="rect">
-            <a:avLst/>
-          </a:prstGeom>
-          <a:noFill/>
-        </p:spPr>
-        <p:txBody>
-          <a:bodyPr wrap="square" anchor="t" lIns="0" rIns="0" tIns="0" bIns="0">
-            <a:spAutoFit/>
-          </a:bodyPr>
-          <a:lstStyle/>
-          <a:p>
-            <a:pPr algn="l"/>
-            <a:r>
-              <a:rPr sz="1500" b="1">
-                <a:solidFill>
-                  <a:srgbClr val="2D2D2D"/>
-                </a:solidFill>
-                <a:latin typeface="Calibri"/>
-              </a:rPr>
-              <a:t>Therneau &amp; Grambsch (2000) — Modeling Survival Data</a:t>
-            </a:r>
-          </a:p>
-        </p:txBody>
-      </p:sp>
-      <p:sp>
-        <p:nvSpPr>
-          <p:cNvPr id="12" name="TextBox 11"/>
-          <p:cNvSpPr txBox="1"/>
-          <p:nvPr/>
-        </p:nvSpPr>
-        <p:spPr>
-          <a:xfrm>
-            <a:off x="1097280" y="3886200"/>
-            <a:ext cx="10546080" cy="274320"/>
-          </a:xfrm>
-          <a:prstGeom prst="rect">
-            <a:avLst/>
-          </a:prstGeom>
-          <a:noFill/>
-        </p:spPr>
-        <p:txBody>
-          <a:bodyPr wrap="square" anchor="t" lIns="0" rIns="0" tIns="0" bIns="0">
-            <a:spAutoFit/>
-          </a:bodyPr>
-          <a:lstStyle/>
-          <a:p>
-            <a:pPr algn="l"/>
-            <a:r>
-              <a:rPr sz="1200" b="0">
-                <a:solidFill>
-                  <a:srgbClr val="6E6E6E"/>
-                </a:solidFill>
-                <a:latin typeface="Calibri"/>
-              </a:rPr>
-              <a:t>Springer  —  diagnóstico de PH por residuales de Schoenfeld</a:t>
-            </a:r>
-          </a:p>
-        </p:txBody>
-      </p:sp>
-      <p:sp>
-        <p:nvSpPr>
-          <p:cNvPr id="13" name="Oval 12"/>
-          <p:cNvSpPr/>
-          <p:nvPr/>
-        </p:nvSpPr>
-        <p:spPr>
-          <a:xfrm>
-            <a:off x="548640" y="4498848"/>
-            <a:ext cx="384048" cy="384048"/>
-          </a:xfrm>
-          <a:prstGeom prst="ellipse">
-            <a:avLst/>
-          </a:prstGeom>
-          <a:solidFill>
-            <a:srgbClr val="E4002B"/>
-          </a:solidFill>
-          <a:ln>
-            <a:noFill/>
-          </a:ln>
-          <a:effectLst/>
-        </p:spPr>
-        <p:style>
-          <a:lnRef idx="1">
-            <a:schemeClr val="accent1"/>
-          </a:lnRef>
-          <a:fillRef idx="3">
-            <a:schemeClr val="accent1"/>
-          </a:fillRef>
-          <a:effectRef idx="2">
-            <a:schemeClr val="accent1"/>
-          </a:effectRef>
-          <a:fontRef idx="minor">
-            <a:schemeClr val="lt1"/>
-          </a:fontRef>
-        </p:style>
-        <p:txBody>
-          <a:bodyPr rtlCol="0" anchor="ctr" lIns="0" rIns="0" tIns="0" bIns="0"/>
-          <a:lstStyle/>
-          <a:p>
-            <a:pPr algn="ctr"/>
-            <a:r>
-              <a:rPr sz="1400" b="1">
-                <a:solidFill>
-                  <a:srgbClr val="FFFFFF"/>
-                </a:solidFill>
-                <a:latin typeface="Calibri"/>
-              </a:rPr>
-              <a:t>4</a:t>
-            </a:r>
-          </a:p>
-        </p:txBody>
-      </p:sp>
-      <p:sp>
-        <p:nvSpPr>
-          <p:cNvPr id="14" name="TextBox 13"/>
-          <p:cNvSpPr txBox="1"/>
-          <p:nvPr/>
-        </p:nvSpPr>
-        <p:spPr>
-          <a:xfrm>
-            <a:off x="1097280" y="4471416"/>
-            <a:ext cx="10546080" cy="320040"/>
-          </a:xfrm>
-          <a:prstGeom prst="rect">
-            <a:avLst/>
-          </a:prstGeom>
-          <a:noFill/>
-        </p:spPr>
-        <p:txBody>
-          <a:bodyPr wrap="square" anchor="t" lIns="0" rIns="0" tIns="0" bIns="0">
-            <a:spAutoFit/>
-          </a:bodyPr>
-          <a:lstStyle/>
-          <a:p>
-            <a:pPr algn="l"/>
-            <a:r>
-              <a:rPr sz="1500" b="1">
-                <a:solidFill>
-                  <a:srgbClr val="2D2D2D"/>
-                </a:solidFill>
-                <a:latin typeface="Calibri"/>
-              </a:rPr>
-              <a:t>Fader, Hardie &amp; Lee (2005) — RFM and CLV</a:t>
-            </a:r>
-          </a:p>
-        </p:txBody>
-      </p:sp>
-      <p:sp>
-        <p:nvSpPr>
-          <p:cNvPr id="15" name="TextBox 14"/>
-          <p:cNvSpPr txBox="1"/>
-          <p:nvPr/>
-        </p:nvSpPr>
-        <p:spPr>
-          <a:xfrm>
-            <a:off x="1097280" y="4782312"/>
-            <a:ext cx="10546080" cy="274320"/>
-          </a:xfrm>
-          <a:prstGeom prst="rect">
-            <a:avLst/>
-          </a:prstGeom>
-          <a:noFill/>
-        </p:spPr>
-        <p:txBody>
-          <a:bodyPr wrap="square" anchor="t" lIns="0" rIns="0" tIns="0" bIns="0">
-            <a:spAutoFit/>
-          </a:bodyPr>
-          <a:lstStyle/>
-          <a:p>
-            <a:pPr algn="l"/>
-            <a:r>
-              <a:rPr sz="1200" b="0">
-                <a:solidFill>
-                  <a:srgbClr val="6E6E6E"/>
-                </a:solidFill>
-                <a:latin typeface="Calibri"/>
-              </a:rPr>
-              <a:t>JMR 42(4):415-430  —  CLV desde probabilidades de retención/supervivencia</a:t>
-            </a:r>
-          </a:p>
-        </p:txBody>
-      </p:sp>
-      <p:sp>
-        <p:nvSpPr>
-          <p:cNvPr id="16" name="Oval 15"/>
-          <p:cNvSpPr/>
-          <p:nvPr/>
-        </p:nvSpPr>
-        <p:spPr>
-          <a:xfrm>
-            <a:off x="548640" y="6473952"/>
-            <a:ext cx="100584" cy="100584"/>
-          </a:xfrm>
-          <a:prstGeom prst="ellipse">
-            <a:avLst/>
-          </a:prstGeom>
-          <a:solidFill>
-            <a:srgbClr val="E4002B"/>
-          </a:solidFill>
-          <a:ln>
-            <a:noFill/>
-          </a:ln>
-          <a:effectLst/>
-        </p:spPr>
-        <p:style>
-          <a:lnRef idx="1">
-            <a:schemeClr val="accent1"/>
-          </a:lnRef>
-          <a:fillRef idx="3">
-            <a:schemeClr val="accent1"/>
-          </a:fillRef>
-          <a:effectRef idx="2">
-            <a:schemeClr val="accent1"/>
-          </a:effectRef>
-          <a:fontRef idx="minor">
-            <a:schemeClr val="lt1"/>
-          </a:fontRef>
-        </p:style>
-        <p:txBody>
-          <a:bodyPr rtlCol="0" anchor="ctr"/>
-          <a:lstStyle/>
-          <a:p>
-            <a:pPr algn="ctr"/>
-          </a:p>
-        </p:txBody>
-      </p:sp>
-      <p:sp>
-        <p:nvSpPr>
-          <p:cNvPr id="17" name="TextBox 16"/>
-          <p:cNvSpPr txBox="1"/>
-          <p:nvPr/>
-        </p:nvSpPr>
-        <p:spPr>
-          <a:xfrm>
-            <a:off x="749808" y="6437376"/>
-            <a:ext cx="7772400" cy="274320"/>
-          </a:xfrm>
-          <a:prstGeom prst="rect">
-            <a:avLst/>
-          </a:prstGeom>
-          <a:noFill/>
-        </p:spPr>
-        <p:txBody>
-          <a:bodyPr wrap="square" anchor="t" lIns="0" rIns="0" tIns="0" bIns="0">
-            <a:spAutoFit/>
-          </a:bodyPr>
-          <a:lstStyle/>
-          <a:p>
-            <a:pPr algn="l"/>
-            <a:r>
-              <a:rPr sz="900" b="0">
-                <a:solidFill>
-                  <a:srgbClr val="6E6E6E"/>
-                </a:solidFill>
-                <a:latin typeface="Calibri"/>
-              </a:rPr>
-              <a:t>S13 — Herramientas para la Ciencia de Datos, UPC</a:t>
-            </a:r>
-          </a:p>
-        </p:txBody>
-      </p:sp>
-      <p:sp>
-        <p:nvSpPr>
-          <p:cNvPr id="18" name="TextBox 17"/>
-          <p:cNvSpPr txBox="1"/>
-          <p:nvPr/>
-        </p:nvSpPr>
-        <p:spPr>
-          <a:xfrm>
-            <a:off x="10180320" y="6437376"/>
-            <a:ext cx="1463040" cy="274320"/>
-          </a:xfrm>
-          <a:prstGeom prst="rect">
-            <a:avLst/>
-          </a:prstGeom>
-          <a:noFill/>
-        </p:spPr>
-        <p:txBody>
-          <a:bodyPr wrap="square" anchor="t" lIns="0" rIns="0" tIns="0" bIns="0">
-            <a:spAutoFit/>
-          </a:bodyPr>
-          <a:lstStyle/>
-          <a:p>
-            <a:pPr algn="r"/>
-            <a:r>
-              <a:rPr sz="900" b="0">
-                <a:solidFill>
-                  <a:srgbClr val="6E6E6E"/>
-                </a:solidFill>
-                <a:latin typeface="Calibri"/>
-              </a:rPr>
-              <a:t>23 / 23</a:t>
+              <a:t>2 / 17</a:t>
             </a:r>
           </a:p>
         </p:txBody>
@@ -11580,7 +9528,7 @@
                 </a:solidFill>
                 <a:latin typeface="Calibri"/>
               </a:rPr>
-              <a:t>¿Por qué la regresión falla cuando el cliente aún no ha abandonado?</a:t>
+              <a:t>El dato censurado</a:t>
             </a:r>
           </a:p>
         </p:txBody>
@@ -11615,11 +9563,35 @@
                 </a:solidFill>
                 <a:latin typeface="Calibri"/>
               </a:rPr>
-              <a:t>Capítulo 13.1 — jueves, bloques A1 y A2</a:t>
-            </a:r>
-          </a:p>
-        </p:txBody>
-      </p:sp>
+              <a:t>Por qué la regresión clásica no maneja el tiempo-hasta-evento</a:t>
+            </a:r>
+          </a:p>
+        </p:txBody>
+      </p:sp>
+      <p:pic>
+        <p:nvPicPr>
+          <p:cNvPr id="5" name="Picture 4" descr="clock__FFFFFF.png"/>
+          <p:cNvPicPr>
+            <a:picLocks noChangeAspect="1"/>
+          </p:cNvPicPr>
+          <p:nvPr/>
+        </p:nvPicPr>
+        <p:blipFill>
+          <a:blip r:embed="rId2"/>
+          <a:stretch>
+            <a:fillRect/>
+          </a:stretch>
+        </p:blipFill>
+        <p:spPr>
+          <a:xfrm>
+            <a:off x="10195560" y="640080"/>
+            <a:ext cx="1051560" cy="1051560"/>
+          </a:xfrm>
+          <a:prstGeom prst="rect">
+            <a:avLst/>
+          </a:prstGeom>
+        </p:spPr>
+      </p:pic>
     </p:spTree>
   </p:cSld>
   <p:clrMapOvr>
@@ -11634,7 +9606,7 @@
     <p:bg>
       <p:bgPr>
         <a:solidFill>
-          <a:srgbClr val="9B1B30"/>
+          <a:srgbClr val="FFFFFF"/>
         </a:solidFill>
         <a:effectLst/>
       </p:bgPr>
@@ -11648,67 +9620,14 @@
       <p:grpSpPr/>
       <p:sp>
         <p:nvSpPr>
-          <p:cNvPr id="2" name="Oval 1"/>
-          <p:cNvSpPr/>
-          <p:nvPr/>
-        </p:nvSpPr>
-        <p:spPr>
-          <a:xfrm>
-            <a:off x="914400" y="2103120"/>
-            <a:ext cx="2377440" cy="2377440"/>
-          </a:xfrm>
-          <a:prstGeom prst="ellipse">
-            <a:avLst/>
-          </a:prstGeom>
-          <a:solidFill>
-            <a:srgbClr val="FFFFFF"/>
-          </a:solidFill>
-          <a:ln>
-            <a:noFill/>
-          </a:ln>
-          <a:effectLst/>
-        </p:spPr>
-        <p:style>
-          <a:lnRef idx="1">
-            <a:schemeClr val="accent1"/>
-          </a:lnRef>
-          <a:fillRef idx="3">
-            <a:schemeClr val="accent1"/>
-          </a:fillRef>
-          <a:effectRef idx="2">
-            <a:schemeClr val="accent1"/>
-          </a:effectRef>
-          <a:fontRef idx="minor">
-            <a:schemeClr val="lt1"/>
-          </a:fontRef>
-        </p:style>
-        <p:txBody>
-          <a:bodyPr rtlCol="0" anchor="ctr" lIns="0" rIns="0" tIns="0" bIns="0"/>
-          <a:lstStyle/>
-          <a:p>
-            <a:pPr algn="ctr"/>
-            <a:r>
-              <a:rPr sz="10000" b="1">
-                <a:solidFill>
-                  <a:srgbClr val="9B1B30"/>
-                </a:solidFill>
-                <a:latin typeface="Calibri"/>
-              </a:rPr>
-              <a:t>1</a:t>
-            </a:r>
-          </a:p>
-        </p:txBody>
-      </p:sp>
-      <p:sp>
-        <p:nvSpPr>
-          <p:cNvPr id="3" name="TextBox 2"/>
+          <p:cNvPr id="2" name="TextBox 1"/>
           <p:cNvSpPr txBox="1"/>
           <p:nvPr/>
         </p:nvSpPr>
         <p:spPr>
           <a:xfrm>
-            <a:off x="3931920" y="2651760"/>
-            <a:ext cx="7589520" cy="1371600"/>
+            <a:off x="548640" y="1828800"/>
+            <a:ext cx="5852160" cy="2926080"/>
           </a:xfrm>
           <a:prstGeom prst="rect">
             <a:avLst/>
@@ -11723,27 +9642,27 @@
           <a:p>
             <a:pPr algn="l"/>
             <a:r>
-              <a:rPr sz="4000" b="1">
-                <a:solidFill>
-                  <a:srgbClr val="FFFFFF"/>
-                </a:solidFill>
-                <a:latin typeface="Calibri"/>
-              </a:rPr>
-              <a:t>¿Por qué la regresión falla cuando el cliente aún no ha abandonado?</a:t>
-            </a:r>
-          </a:p>
-        </p:txBody>
-      </p:sp>
-      <p:sp>
-        <p:nvSpPr>
-          <p:cNvPr id="4" name="TextBox 3"/>
+              <a:rPr sz="14000" b="1">
+                <a:solidFill>
+                  <a:srgbClr val="E4002B"/>
+                </a:solidFill>
+                <a:latin typeface="Calibri"/>
+              </a:rPr>
+              <a:t>74 %</a:t>
+            </a:r>
+          </a:p>
+        </p:txBody>
+      </p:sp>
+      <p:sp>
+        <p:nvSpPr>
+          <p:cNvPr id="3" name="TextBox 2"/>
           <p:cNvSpPr txBox="1"/>
           <p:nvPr/>
         </p:nvSpPr>
         <p:spPr>
           <a:xfrm>
-            <a:off x="3931920" y="3977639"/>
-            <a:ext cx="7589520" cy="914400"/>
+            <a:off x="6766560" y="2286000"/>
+            <a:ext cx="4846320" cy="1371600"/>
           </a:xfrm>
           <a:prstGeom prst="rect">
             <a:avLst/>
@@ -11758,20 +9677,59 @@
           <a:p>
             <a:pPr algn="l"/>
             <a:r>
-              <a:rPr sz="1700" b="0">
-                <a:solidFill>
-                  <a:srgbClr val="FCEDEE"/>
-                </a:solidFill>
-                <a:latin typeface="Calibri"/>
-              </a:rPr>
-              <a:t>¿Por qué la regresión falla cuando el cliente aún no ha abandonado?</a:t>
+              <a:rPr sz="2600" b="1">
+                <a:solidFill>
+                  <a:srgbClr val="2D2D2D"/>
+                </a:solidFill>
+                <a:latin typeface="Calibri"/>
+              </a:rPr>
+              <a:t>La regresión clásica descartaría a 3 de cada 4 casos</a:t>
+            </a:r>
+          </a:p>
+        </p:txBody>
+      </p:sp>
+      <p:sp>
+        <p:nvSpPr>
+          <p:cNvPr id="4" name="TextBox 3"/>
+          <p:cNvSpPr txBox="1"/>
+          <p:nvPr/>
+        </p:nvSpPr>
+        <p:spPr>
+          <a:xfrm>
+            <a:off x="6766560" y="3749039"/>
+            <a:ext cx="4846320" cy="2011680"/>
+          </a:xfrm>
+          <a:prstGeom prst="rect">
+            <a:avLst/>
+          </a:prstGeom>
+          <a:noFill/>
+        </p:spPr>
+        <p:txBody>
+          <a:bodyPr wrap="square" anchor="t" lIns="0" rIns="0" tIns="0" bIns="0">
+            <a:spAutoFit/>
+          </a:bodyPr>
+          <a:lstStyle/>
+          <a:p>
+            <a:pPr algn="l">
+              <a:lnSpc>
+                <a:spcPct val="120000"/>
+              </a:lnSpc>
+            </a:pPr>
+            <a:r>
+              <a:rPr sz="1500" b="0">
+                <a:solidFill>
+                  <a:srgbClr val="6E6E6E"/>
+                </a:solidFill>
+                <a:latin typeface="Calibri"/>
+              </a:rPr>
+              <a:t>En Rossi, 318 de 432 ex-reclusos siguen sin reincidir a las 52 semanas: están censurados. Descartarlos sesga toda la retención.</a:t>
             </a:r>
           </a:p>
         </p:txBody>
       </p:sp>
       <p:pic>
         <p:nvPicPr>
-          <p:cNvPr id="5" name="Picture 4" descr="clock__FFFFFF.png"/>
+          <p:cNvPr id="5" name="Picture 4" descr="triangle-alert__E4002B.png"/>
           <p:cNvPicPr>
             <a:picLocks noChangeAspect="1"/>
           </p:cNvPicPr>
@@ -11785,14 +9743,162 @@
         </p:blipFill>
         <p:spPr>
           <a:xfrm>
-            <a:off x="10195560" y="640080"/>
-            <a:ext cx="1051560" cy="1051560"/>
+            <a:off x="6766560" y="1325880"/>
+            <a:ext cx="658368" cy="658368"/>
           </a:xfrm>
           <a:prstGeom prst="rect">
             <a:avLst/>
           </a:prstGeom>
         </p:spPr>
       </p:pic>
+      <p:sp>
+        <p:nvSpPr>
+          <p:cNvPr id="6" name="TextBox 5"/>
+          <p:cNvSpPr txBox="1"/>
+          <p:nvPr/>
+        </p:nvSpPr>
+        <p:spPr>
+          <a:xfrm>
+            <a:off x="548640" y="5870448"/>
+            <a:ext cx="11064240" cy="320040"/>
+          </a:xfrm>
+          <a:prstGeom prst="rect">
+            <a:avLst/>
+          </a:prstGeom>
+          <a:noFill/>
+        </p:spPr>
+        <p:txBody>
+          <a:bodyPr wrap="square">
+            <a:spAutoFit/>
+          </a:bodyPr>
+          <a:lstStyle/>
+          <a:p>
+            <a:r>
+              <a:rPr sz="1000">
+                <a:solidFill>
+                  <a:srgbClr val="6E6E6E"/>
+                </a:solidFill>
+                <a:latin typeface="Calibri"/>
+              </a:rPr>
+              <a:t>Rossi (Cox 1972) — 318/432 censurados = 73,6 %, Excel survival!n_censurados, DEFINICIONES punto 1.</a:t>
+            </a:r>
+          </a:p>
+        </p:txBody>
+      </p:sp>
+      <p:sp>
+        <p:nvSpPr>
+          <p:cNvPr id="7" name="Oval 6"/>
+          <p:cNvSpPr/>
+          <p:nvPr/>
+        </p:nvSpPr>
+        <p:spPr>
+          <a:xfrm>
+            <a:off x="548640" y="6473952"/>
+            <a:ext cx="100584" cy="100584"/>
+          </a:xfrm>
+          <a:prstGeom prst="ellipse">
+            <a:avLst/>
+          </a:prstGeom>
+          <a:solidFill>
+            <a:srgbClr val="E4002B"/>
+          </a:solidFill>
+          <a:ln>
+            <a:noFill/>
+          </a:ln>
+          <a:effectLst/>
+        </p:spPr>
+        <p:style>
+          <a:lnRef idx="1">
+            <a:schemeClr val="accent1"/>
+          </a:lnRef>
+          <a:fillRef idx="3">
+            <a:schemeClr val="accent1"/>
+          </a:fillRef>
+          <a:effectRef idx="2">
+            <a:schemeClr val="accent1"/>
+          </a:effectRef>
+          <a:fontRef idx="minor">
+            <a:schemeClr val="lt1"/>
+          </a:fontRef>
+        </p:style>
+        <p:txBody>
+          <a:bodyPr rtlCol="0" anchor="ctr"/>
+          <a:lstStyle/>
+          <a:p>
+            <a:pPr algn="ctr"/>
+          </a:p>
+        </p:txBody>
+      </p:sp>
+      <p:sp>
+        <p:nvSpPr>
+          <p:cNvPr id="8" name="TextBox 7"/>
+          <p:cNvSpPr txBox="1"/>
+          <p:nvPr/>
+        </p:nvSpPr>
+        <p:spPr>
+          <a:xfrm>
+            <a:off x="749808" y="6437376"/>
+            <a:ext cx="7772400" cy="274320"/>
+          </a:xfrm>
+          <a:prstGeom prst="rect">
+            <a:avLst/>
+          </a:prstGeom>
+          <a:noFill/>
+        </p:spPr>
+        <p:txBody>
+          <a:bodyPr wrap="square" anchor="t" lIns="0" rIns="0" tIns="0" bIns="0">
+            <a:spAutoFit/>
+          </a:bodyPr>
+          <a:lstStyle/>
+          <a:p>
+            <a:pPr algn="l"/>
+            <a:r>
+              <a:rPr sz="900" b="0">
+                <a:solidFill>
+                  <a:srgbClr val="6E6E6E"/>
+                </a:solidFill>
+                <a:latin typeface="Calibri"/>
+              </a:rPr>
+              <a:t>S13 — Herramientas para la Ciencia de Datos, UPC</a:t>
+            </a:r>
+          </a:p>
+        </p:txBody>
+      </p:sp>
+      <p:sp>
+        <p:nvSpPr>
+          <p:cNvPr id="9" name="TextBox 8"/>
+          <p:cNvSpPr txBox="1"/>
+          <p:nvPr/>
+        </p:nvSpPr>
+        <p:spPr>
+          <a:xfrm>
+            <a:off x="10180320" y="6437376"/>
+            <a:ext cx="1463040" cy="274320"/>
+          </a:xfrm>
+          <a:prstGeom prst="rect">
+            <a:avLst/>
+          </a:prstGeom>
+          <a:noFill/>
+        </p:spPr>
+        <p:txBody>
+          <a:bodyPr wrap="square" anchor="t" lIns="0" rIns="0" tIns="0" bIns="0">
+            <a:spAutoFit/>
+          </a:bodyPr>
+          <a:lstStyle/>
+          <a:p>
+            <a:pPr algn="r"/>
+            <a:r>
+              <a:rPr sz="900" b="0">
+                <a:solidFill>
+                  <a:srgbClr val="6E6E6E"/>
+                </a:solidFill>
+                <a:latin typeface="Calibri"/>
+              </a:rPr>
+              <a:t>4 / 17</a:t>
+            </a:r>
+          </a:p>
+        </p:txBody>
+      </p:sp>
     </p:spTree>
   </p:cSld>
   <p:clrMapOvr>
@@ -11827,8 +9933,8 @@
         </p:nvSpPr>
         <p:spPr>
           <a:xfrm>
-            <a:off x="548640" y="1828800"/>
-            <a:ext cx="5852160" cy="2926080"/>
+            <a:off x="548640" y="411480"/>
+            <a:ext cx="11094720" cy="292608"/>
           </a:xfrm>
           <a:prstGeom prst="rect">
             <a:avLst/>
@@ -11843,13 +9949,13 @@
           <a:p>
             <a:pPr algn="l"/>
             <a:r>
-              <a:rPr sz="14000" b="1">
-                <a:solidFill>
-                  <a:srgbClr val="E4002B"/>
-                </a:solidFill>
-                <a:latin typeface="Calibri"/>
-              </a:rPr>
-              <a:t>74 %</a:t>
+              <a:rPr sz="1300" b="1">
+                <a:solidFill>
+                  <a:srgbClr val="9B1B30"/>
+                </a:solidFill>
+                <a:latin typeface="Calibri"/>
+              </a:rPr>
+              <a:t>DEFINICIONES — FUNDAMENTOS DE LA SESIÓN</a:t>
             </a:r>
           </a:p>
         </p:txBody>
@@ -11862,8 +9968,8 @@
         </p:nvSpPr>
         <p:spPr>
           <a:xfrm>
-            <a:off x="6766560" y="2286000"/>
-            <a:ext cx="4846320" cy="1371600"/>
+            <a:off x="548640" y="731520"/>
+            <a:ext cx="11094720" cy="777240"/>
           </a:xfrm>
           <a:prstGeom prst="rect">
             <a:avLst/>
@@ -11878,59 +9984,64 @@
           <a:p>
             <a:pPr algn="l"/>
             <a:r>
-              <a:rPr sz="2600" b="1">
+              <a:rPr sz="4000" b="1">
                 <a:solidFill>
                   <a:srgbClr val="2D2D2D"/>
                 </a:solidFill>
                 <a:latin typeface="Calibri"/>
               </a:rPr>
-              <a:t>La regresión clásica descartaría a 3 de cada 4 casos</a:t>
-            </a:r>
-          </a:p>
-        </p:txBody>
-      </p:sp>
-      <p:sp>
-        <p:nvSpPr>
-          <p:cNvPr id="4" name="TextBox 3"/>
-          <p:cNvSpPr txBox="1"/>
-          <p:nvPr/>
-        </p:nvSpPr>
-        <p:spPr>
-          <a:xfrm>
-            <a:off x="6766560" y="3749039"/>
-            <a:ext cx="4846320" cy="2011680"/>
-          </a:xfrm>
-          <a:prstGeom prst="rect">
-            <a:avLst/>
-          </a:prstGeom>
-          <a:noFill/>
-        </p:spPr>
-        <p:txBody>
-          <a:bodyPr wrap="square" anchor="t" lIns="0" rIns="0" tIns="0" bIns="0">
-            <a:spAutoFit/>
-          </a:bodyPr>
-          <a:lstStyle/>
-          <a:p>
-            <a:pPr algn="l">
-              <a:lnSpc>
-                <a:spcPct val="120000"/>
-              </a:lnSpc>
-            </a:pPr>
-            <a:r>
-              <a:rPr sz="1500" b="0">
-                <a:solidFill>
-                  <a:srgbClr val="6E6E6E"/>
-                </a:solidFill>
-                <a:latin typeface="Calibri"/>
-              </a:rPr>
-              <a:t>En Rossi, 318 de 432 ex-reclusos siguen sin reincidir a las 52 semanas: están censurados. Descartarlos sesga toda la retención.</a:t>
-            </a:r>
+              <a:t>La censura es la razón de ser de la supervivencia</a:t>
+            </a:r>
+          </a:p>
+        </p:txBody>
+      </p:sp>
+      <p:sp>
+        <p:nvSpPr>
+          <p:cNvPr id="4" name="Oval 3"/>
+          <p:cNvSpPr/>
+          <p:nvPr/>
+        </p:nvSpPr>
+        <p:spPr>
+          <a:xfrm>
+            <a:off x="548640" y="2261616"/>
+            <a:ext cx="658368" cy="658368"/>
+          </a:xfrm>
+          <a:prstGeom prst="ellipse">
+            <a:avLst/>
+          </a:prstGeom>
+          <a:solidFill>
+            <a:srgbClr val="E4002B"/>
+          </a:solidFill>
+          <a:ln>
+            <a:noFill/>
+          </a:ln>
+          <a:effectLst/>
+        </p:spPr>
+        <p:style>
+          <a:lnRef idx="1">
+            <a:schemeClr val="accent1"/>
+          </a:lnRef>
+          <a:fillRef idx="3">
+            <a:schemeClr val="accent1"/>
+          </a:fillRef>
+          <a:effectRef idx="2">
+            <a:schemeClr val="accent1"/>
+          </a:effectRef>
+          <a:fontRef idx="minor">
+            <a:schemeClr val="lt1"/>
+          </a:fontRef>
+        </p:style>
+        <p:txBody>
+          <a:bodyPr rtlCol="0" anchor="ctr"/>
+          <a:lstStyle/>
+          <a:p>
+            <a:pPr algn="ctr"/>
           </a:p>
         </p:txBody>
       </p:sp>
       <p:pic>
         <p:nvPicPr>
-          <p:cNvPr id="5" name="Picture 4" descr="triangle-alert__E4002B.png"/>
+          <p:cNvPr id="5" name="Picture 4" descr="clock__FFFFFF.png"/>
           <p:cNvPicPr>
             <a:picLocks noChangeAspect="1"/>
           </p:cNvPicPr>
@@ -11944,8 +10055,8 @@
         </p:blipFill>
         <p:spPr>
           <a:xfrm>
-            <a:off x="6766560" y="1325880"/>
-            <a:ext cx="658368" cy="658368"/>
+            <a:off x="732983" y="2445959"/>
+            <a:ext cx="289682" cy="289682"/>
           </a:xfrm>
           <a:prstGeom prst="rect">
             <a:avLst/>
@@ -11960,8 +10071,8 @@
         </p:nvSpPr>
         <p:spPr>
           <a:xfrm>
-            <a:off x="548640" y="5870448"/>
-            <a:ext cx="11064240" cy="320040"/>
+            <a:off x="1508760" y="1938528"/>
+            <a:ext cx="10134600" cy="411480"/>
           </a:xfrm>
           <a:prstGeom prst="rect">
             <a:avLst/>
@@ -11969,33 +10080,73 @@
           <a:noFill/>
         </p:spPr>
         <p:txBody>
-          <a:bodyPr wrap="square">
+          <a:bodyPr wrap="square" anchor="t" lIns="0" rIns="0" tIns="0" bIns="0">
             <a:spAutoFit/>
           </a:bodyPr>
           <a:lstStyle/>
           <a:p>
-            <a:r>
-              <a:rPr sz="1000">
-                <a:solidFill>
-                  <a:srgbClr val="6E6E6E"/>
-                </a:solidFill>
-                <a:latin typeface="Calibri"/>
-              </a:rPr>
-              <a:t>Rossi (Cox 1972) — 318/432 censurados = 73,6 %, Excel survival!n_censurados, DEFINICIONES punto 1.</a:t>
-            </a:r>
-          </a:p>
-        </p:txBody>
-      </p:sp>
-      <p:sp>
-        <p:nvSpPr>
-          <p:cNvPr id="7" name="Oval 6"/>
+            <a:pPr algn="l"/>
+            <a:r>
+              <a:rPr sz="1800" b="1">
+                <a:solidFill>
+                  <a:srgbClr val="9B1B30"/>
+                </a:solidFill>
+                <a:latin typeface="Calibri"/>
+              </a:rPr>
+              <a:t>Dato censurado</a:t>
+            </a:r>
+          </a:p>
+        </p:txBody>
+      </p:sp>
+      <p:sp>
+        <p:nvSpPr>
+          <p:cNvPr id="7" name="TextBox 6"/>
+          <p:cNvSpPr txBox="1"/>
+          <p:nvPr/>
+        </p:nvSpPr>
+        <p:spPr>
+          <a:xfrm>
+            <a:off x="1508760" y="2395728"/>
+            <a:ext cx="10134600" cy="883920"/>
+          </a:xfrm>
+          <a:prstGeom prst="rect">
+            <a:avLst/>
+          </a:prstGeom>
+          <a:noFill/>
+        </p:spPr>
+        <p:txBody>
+          <a:bodyPr wrap="square" anchor="t" lIns="0" rIns="0" tIns="0" bIns="0">
+            <a:spAutoFit/>
+          </a:bodyPr>
+          <a:lstStyle/>
+          <a:p>
+            <a:pPr algn="l">
+              <a:lnSpc>
+                <a:spcPct val="110000"/>
+              </a:lnSpc>
+            </a:pPr>
+            <a:r>
+              <a:rPr sz="1400" b="0">
+                <a:solidFill>
+                  <a:srgbClr val="2D2D2D"/>
+                </a:solidFill>
+                <a:latin typeface="Calibri"/>
+              </a:rPr>
+              <a:t>El evento aún no ocurrió al cerrar el estudio: solo se sabe que el tiempo real es mayor. Descartarlo o fijarlo sesga.</a:t>
+            </a:r>
+          </a:p>
+        </p:txBody>
+      </p:sp>
+      <p:sp>
+        <p:nvSpPr>
+          <p:cNvPr id="8" name="Oval 7"/>
           <p:cNvSpPr/>
           <p:nvPr/>
         </p:nvSpPr>
         <p:spPr>
           <a:xfrm>
-            <a:off x="548640" y="6473952"/>
-            <a:ext cx="100584" cy="100584"/>
+            <a:off x="548640" y="3785616"/>
+            <a:ext cx="658368" cy="658368"/>
           </a:xfrm>
           <a:prstGeom prst="ellipse">
             <a:avLst/>
@@ -12030,16 +10181,40 @@
           </a:p>
         </p:txBody>
       </p:sp>
-      <p:sp>
-        <p:nvSpPr>
-          <p:cNvPr id="8" name="TextBox 7"/>
+      <p:pic>
+        <p:nvPicPr>
+          <p:cNvPr id="9" name="Picture 8" descr="chart-column__FFFFFF.png"/>
+          <p:cNvPicPr>
+            <a:picLocks noChangeAspect="1"/>
+          </p:cNvPicPr>
+          <p:nvPr/>
+        </p:nvPicPr>
+        <p:blipFill>
+          <a:blip r:embed="rId3"/>
+          <a:stretch>
+            <a:fillRect/>
+          </a:stretch>
+        </p:blipFill>
+        <p:spPr>
+          <a:xfrm>
+            <a:off x="732983" y="3969959"/>
+            <a:ext cx="289682" cy="289682"/>
+          </a:xfrm>
+          <a:prstGeom prst="rect">
+            <a:avLst/>
+          </a:prstGeom>
+        </p:spPr>
+      </p:pic>
+      <p:sp>
+        <p:nvSpPr>
+          <p:cNvPr id="10" name="TextBox 9"/>
           <p:cNvSpPr txBox="1"/>
           <p:nvPr/>
         </p:nvSpPr>
         <p:spPr>
           <a:xfrm>
-            <a:off x="749808" y="6437376"/>
-            <a:ext cx="7772400" cy="274320"/>
+            <a:off x="1508760" y="3462528"/>
+            <a:ext cx="10134600" cy="411480"/>
           </a:xfrm>
           <a:prstGeom prst="rect">
             <a:avLst/>
@@ -12054,27 +10229,27 @@
           <a:p>
             <a:pPr algn="l"/>
             <a:r>
-              <a:rPr sz="900" b="0">
-                <a:solidFill>
-                  <a:srgbClr val="6E6E6E"/>
-                </a:solidFill>
-                <a:latin typeface="Calibri"/>
-              </a:rPr>
-              <a:t>S13 — Herramientas para la Ciencia de Datos, UPC</a:t>
-            </a:r>
-          </a:p>
-        </p:txBody>
-      </p:sp>
-      <p:sp>
-        <p:nvSpPr>
-          <p:cNvPr id="9" name="TextBox 8"/>
+              <a:rPr sz="1800" b="1">
+                <a:solidFill>
+                  <a:srgbClr val="9B1B30"/>
+                </a:solidFill>
+                <a:latin typeface="Calibri"/>
+              </a:rPr>
+              <a:t>Función de supervivencia S(t)</a:t>
+            </a:r>
+          </a:p>
+        </p:txBody>
+      </p:sp>
+      <p:sp>
+        <p:nvSpPr>
+          <p:cNvPr id="11" name="TextBox 10"/>
           <p:cNvSpPr txBox="1"/>
           <p:nvPr/>
         </p:nvSpPr>
         <p:spPr>
           <a:xfrm>
-            <a:off x="10180320" y="6437376"/>
-            <a:ext cx="1463040" cy="274320"/>
+            <a:off x="1508760" y="3919728"/>
+            <a:ext cx="10134600" cy="883920"/>
           </a:xfrm>
           <a:prstGeom prst="rect">
             <a:avLst/>
@@ -12087,6 +10262,300 @@
           </a:bodyPr>
           <a:lstStyle/>
           <a:p>
+            <a:pPr algn="l">
+              <a:lnSpc>
+                <a:spcPct val="110000"/>
+              </a:lnSpc>
+            </a:pPr>
+            <a:r>
+              <a:rPr sz="1400" b="0">
+                <a:solidFill>
+                  <a:srgbClr val="2D2D2D"/>
+                </a:solidFill>
+                <a:latin typeface="Calibri"/>
+              </a:rPr>
+              <a:t>Probabilidad de seguir sin el evento pasado t. Es la curva de retención: S(12 meses) = clientes activos al año.</a:t>
+            </a:r>
+          </a:p>
+        </p:txBody>
+      </p:sp>
+      <p:sp>
+        <p:nvSpPr>
+          <p:cNvPr id="12" name="Oval 11"/>
+          <p:cNvSpPr/>
+          <p:nvPr/>
+        </p:nvSpPr>
+        <p:spPr>
+          <a:xfrm>
+            <a:off x="548640" y="5309616"/>
+            <a:ext cx="658368" cy="658368"/>
+          </a:xfrm>
+          <a:prstGeom prst="ellipse">
+            <a:avLst/>
+          </a:prstGeom>
+          <a:solidFill>
+            <a:srgbClr val="E4002B"/>
+          </a:solidFill>
+          <a:ln>
+            <a:noFill/>
+          </a:ln>
+          <a:effectLst/>
+        </p:spPr>
+        <p:style>
+          <a:lnRef idx="1">
+            <a:schemeClr val="accent1"/>
+          </a:lnRef>
+          <a:fillRef idx="3">
+            <a:schemeClr val="accent1"/>
+          </a:fillRef>
+          <a:effectRef idx="2">
+            <a:schemeClr val="accent1"/>
+          </a:effectRef>
+          <a:fontRef idx="minor">
+            <a:schemeClr val="lt1"/>
+          </a:fontRef>
+        </p:style>
+        <p:txBody>
+          <a:bodyPr rtlCol="0" anchor="ctr"/>
+          <a:lstStyle/>
+          <a:p>
+            <a:pPr algn="ctr"/>
+          </a:p>
+        </p:txBody>
+      </p:sp>
+      <p:pic>
+        <p:nvPicPr>
+          <p:cNvPr id="13" name="Picture 12" descr="triangle-alert__FFFFFF.png"/>
+          <p:cNvPicPr>
+            <a:picLocks noChangeAspect="1"/>
+          </p:cNvPicPr>
+          <p:nvPr/>
+        </p:nvPicPr>
+        <p:blipFill>
+          <a:blip r:embed="rId4"/>
+          <a:stretch>
+            <a:fillRect/>
+          </a:stretch>
+        </p:blipFill>
+        <p:spPr>
+          <a:xfrm>
+            <a:off x="732983" y="5493959"/>
+            <a:ext cx="289682" cy="289682"/>
+          </a:xfrm>
+          <a:prstGeom prst="rect">
+            <a:avLst/>
+          </a:prstGeom>
+        </p:spPr>
+      </p:pic>
+      <p:sp>
+        <p:nvSpPr>
+          <p:cNvPr id="14" name="TextBox 13"/>
+          <p:cNvSpPr txBox="1"/>
+          <p:nvPr/>
+        </p:nvSpPr>
+        <p:spPr>
+          <a:xfrm>
+            <a:off x="1508760" y="4986528"/>
+            <a:ext cx="10134600" cy="411480"/>
+          </a:xfrm>
+          <a:prstGeom prst="rect">
+            <a:avLst/>
+          </a:prstGeom>
+          <a:noFill/>
+        </p:spPr>
+        <p:txBody>
+          <a:bodyPr wrap="square" anchor="t" lIns="0" rIns="0" tIns="0" bIns="0">
+            <a:spAutoFit/>
+          </a:bodyPr>
+          <a:lstStyle/>
+          <a:p>
+            <a:pPr algn="l"/>
+            <a:r>
+              <a:rPr sz="1800" b="1">
+                <a:solidFill>
+                  <a:srgbClr val="9B1B30"/>
+                </a:solidFill>
+                <a:latin typeface="Calibri"/>
+              </a:rPr>
+              <a:t>Riesgo o hazard h(t)</a:t>
+            </a:r>
+          </a:p>
+        </p:txBody>
+      </p:sp>
+      <p:sp>
+        <p:nvSpPr>
+          <p:cNvPr id="15" name="TextBox 14"/>
+          <p:cNvSpPr txBox="1"/>
+          <p:nvPr/>
+        </p:nvSpPr>
+        <p:spPr>
+          <a:xfrm>
+            <a:off x="1508760" y="5443728"/>
+            <a:ext cx="10134600" cy="883920"/>
+          </a:xfrm>
+          <a:prstGeom prst="rect">
+            <a:avLst/>
+          </a:prstGeom>
+          <a:noFill/>
+        </p:spPr>
+        <p:txBody>
+          <a:bodyPr wrap="square" anchor="t" lIns="0" rIns="0" tIns="0" bIns="0">
+            <a:spAutoFit/>
+          </a:bodyPr>
+          <a:lstStyle/>
+          <a:p>
+            <a:pPr algn="l">
+              <a:lnSpc>
+                <a:spcPct val="110000"/>
+              </a:lnSpc>
+            </a:pPr>
+            <a:r>
+              <a:rPr sz="1400" b="0">
+                <a:solidFill>
+                  <a:srgbClr val="2D2D2D"/>
+                </a:solidFill>
+                <a:latin typeface="Calibri"/>
+              </a:rPr>
+              <a:t>Tasa instantánea del evento en t, dado que se sobrevivió hasta t. Dice cuándo es más peligroso perder al cliente.</a:t>
+            </a:r>
+          </a:p>
+        </p:txBody>
+      </p:sp>
+      <p:sp>
+        <p:nvSpPr>
+          <p:cNvPr id="16" name="TextBox 15"/>
+          <p:cNvSpPr txBox="1"/>
+          <p:nvPr/>
+        </p:nvSpPr>
+        <p:spPr>
+          <a:xfrm>
+            <a:off x="548640" y="5870448"/>
+            <a:ext cx="11064240" cy="320040"/>
+          </a:xfrm>
+          <a:prstGeom prst="rect">
+            <a:avLst/>
+          </a:prstGeom>
+          <a:noFill/>
+        </p:spPr>
+        <p:txBody>
+          <a:bodyPr wrap="square">
+            <a:spAutoFit/>
+          </a:bodyPr>
+          <a:lstStyle/>
+          <a:p>
+            <a:r>
+              <a:rPr sz="1000">
+                <a:solidFill>
+                  <a:srgbClr val="6E6E6E"/>
+                </a:solidFill>
+                <a:latin typeface="Calibri"/>
+              </a:rPr>
+              <a:t>DEFINICIONES puntos 1, 3, 4, Kaplan-Meier (1958), JASA 53(282); Cox (1972), JRSS-B 34(2). La regresión (S09) responde «si», no «cuándo».</a:t>
+            </a:r>
+          </a:p>
+        </p:txBody>
+      </p:sp>
+      <p:sp>
+        <p:nvSpPr>
+          <p:cNvPr id="17" name="Oval 16"/>
+          <p:cNvSpPr/>
+          <p:nvPr/>
+        </p:nvSpPr>
+        <p:spPr>
+          <a:xfrm>
+            <a:off x="548640" y="6473952"/>
+            <a:ext cx="100584" cy="100584"/>
+          </a:xfrm>
+          <a:prstGeom prst="ellipse">
+            <a:avLst/>
+          </a:prstGeom>
+          <a:solidFill>
+            <a:srgbClr val="E4002B"/>
+          </a:solidFill>
+          <a:ln>
+            <a:noFill/>
+          </a:ln>
+          <a:effectLst/>
+        </p:spPr>
+        <p:style>
+          <a:lnRef idx="1">
+            <a:schemeClr val="accent1"/>
+          </a:lnRef>
+          <a:fillRef idx="3">
+            <a:schemeClr val="accent1"/>
+          </a:fillRef>
+          <a:effectRef idx="2">
+            <a:schemeClr val="accent1"/>
+          </a:effectRef>
+          <a:fontRef idx="minor">
+            <a:schemeClr val="lt1"/>
+          </a:fontRef>
+        </p:style>
+        <p:txBody>
+          <a:bodyPr rtlCol="0" anchor="ctr"/>
+          <a:lstStyle/>
+          <a:p>
+            <a:pPr algn="ctr"/>
+          </a:p>
+        </p:txBody>
+      </p:sp>
+      <p:sp>
+        <p:nvSpPr>
+          <p:cNvPr id="18" name="TextBox 17"/>
+          <p:cNvSpPr txBox="1"/>
+          <p:nvPr/>
+        </p:nvSpPr>
+        <p:spPr>
+          <a:xfrm>
+            <a:off x="749808" y="6437376"/>
+            <a:ext cx="7772400" cy="274320"/>
+          </a:xfrm>
+          <a:prstGeom prst="rect">
+            <a:avLst/>
+          </a:prstGeom>
+          <a:noFill/>
+        </p:spPr>
+        <p:txBody>
+          <a:bodyPr wrap="square" anchor="t" lIns="0" rIns="0" tIns="0" bIns="0">
+            <a:spAutoFit/>
+          </a:bodyPr>
+          <a:lstStyle/>
+          <a:p>
+            <a:pPr algn="l"/>
+            <a:r>
+              <a:rPr sz="900" b="0">
+                <a:solidFill>
+                  <a:srgbClr val="6E6E6E"/>
+                </a:solidFill>
+                <a:latin typeface="Calibri"/>
+              </a:rPr>
+              <a:t>S13 — Herramientas para la Ciencia de Datos, UPC</a:t>
+            </a:r>
+          </a:p>
+        </p:txBody>
+      </p:sp>
+      <p:sp>
+        <p:nvSpPr>
+          <p:cNvPr id="19" name="TextBox 18"/>
+          <p:cNvSpPr txBox="1"/>
+          <p:nvPr/>
+        </p:nvSpPr>
+        <p:spPr>
+          <a:xfrm>
+            <a:off x="10180320" y="6437376"/>
+            <a:ext cx="1463040" cy="274320"/>
+          </a:xfrm>
+          <a:prstGeom prst="rect">
+            <a:avLst/>
+          </a:prstGeom>
+          <a:noFill/>
+        </p:spPr>
+        <p:txBody>
+          <a:bodyPr wrap="square" anchor="t" lIns="0" rIns="0" tIns="0" bIns="0">
+            <a:spAutoFit/>
+          </a:bodyPr>
+          <a:lstStyle/>
+          <a:p>
             <a:pPr algn="r"/>
             <a:r>
               <a:rPr sz="900" b="0">
@@ -12095,7 +10564,7 @@
                 </a:solidFill>
                 <a:latin typeface="Calibri"/>
               </a:rPr>
-              <a:t>5 / 23</a:t>
+              <a:t>5 / 17</a:t>
             </a:r>
           </a:p>
         </p:txBody>
@@ -12109,6 +10578,155 @@
 </file>
 
 <file path=ppt/slides/slide6.xml><?xml version="1.0" encoding="utf-8"?>
+<p:sld xmlns:a="http://schemas.openxmlformats.org/drawingml/2006/main" xmlns:p="http://schemas.openxmlformats.org/presentationml/2006/main" xmlns:r="http://schemas.openxmlformats.org/officeDocument/2006/relationships">
+  <p:cSld>
+    <p:bg>
+      <p:bgPr>
+        <a:solidFill>
+          <a:srgbClr val="FCEDEE"/>
+        </a:solidFill>
+        <a:effectLst/>
+      </p:bgPr>
+    </p:bg>
+    <p:spTree>
+      <p:nvGrpSpPr>
+        <p:cNvPr id="1" name=""/>
+        <p:cNvGrpSpPr/>
+        <p:nvPr/>
+      </p:nvGrpSpPr>
+      <p:grpSpPr/>
+      <p:sp>
+        <p:nvSpPr>
+          <p:cNvPr id="2" name="Oval 1"/>
+          <p:cNvSpPr/>
+          <p:nvPr/>
+        </p:nvSpPr>
+        <p:spPr>
+          <a:xfrm>
+            <a:off x="5593080" y="914400"/>
+            <a:ext cx="1005840" cy="1005840"/>
+          </a:xfrm>
+          <a:prstGeom prst="ellipse">
+            <a:avLst/>
+          </a:prstGeom>
+          <a:solidFill>
+            <a:srgbClr val="E4002B"/>
+          </a:solidFill>
+          <a:ln>
+            <a:noFill/>
+          </a:ln>
+          <a:effectLst/>
+        </p:spPr>
+        <p:style>
+          <a:lnRef idx="1">
+            <a:schemeClr val="accent1"/>
+          </a:lnRef>
+          <a:fillRef idx="3">
+            <a:schemeClr val="accent1"/>
+          </a:fillRef>
+          <a:effectRef idx="2">
+            <a:schemeClr val="accent1"/>
+          </a:effectRef>
+          <a:fontRef idx="minor">
+            <a:schemeClr val="lt1"/>
+          </a:fontRef>
+        </p:style>
+        <p:txBody>
+          <a:bodyPr rtlCol="0" anchor="ctr" lIns="0" rIns="0" tIns="0" bIns="0"/>
+          <a:lstStyle/>
+          <a:p>
+            <a:pPr algn="ctr"/>
+            <a:r>
+              <a:rPr sz="4400" b="1">
+                <a:solidFill>
+                  <a:srgbClr val="FFFFFF"/>
+                </a:solidFill>
+                <a:latin typeface="Calibri"/>
+              </a:rPr>
+              <a:t>?</a:t>
+            </a:r>
+          </a:p>
+        </p:txBody>
+      </p:sp>
+      <p:sp>
+        <p:nvSpPr>
+          <p:cNvPr id="3" name="TextBox 2"/>
+          <p:cNvSpPr txBox="1"/>
+          <p:nvPr/>
+        </p:nvSpPr>
+        <p:spPr>
+          <a:xfrm>
+            <a:off x="1371600" y="2468880"/>
+            <a:ext cx="9448800" cy="2011680"/>
+          </a:xfrm>
+          <a:prstGeom prst="rect">
+            <a:avLst/>
+          </a:prstGeom>
+          <a:noFill/>
+        </p:spPr>
+        <p:txBody>
+          <a:bodyPr wrap="square" anchor="t" lIns="0" rIns="0" tIns="0" bIns="0">
+            <a:spAutoFit/>
+          </a:bodyPr>
+          <a:lstStyle/>
+          <a:p>
+            <a:pPr algn="ctr"/>
+            <a:r>
+              <a:rPr sz="3200" b="1">
+                <a:solidFill>
+                  <a:srgbClr val="9B1B30"/>
+                </a:solidFill>
+                <a:latin typeface="Calibri"/>
+              </a:rPr>
+              <a:t>¿Es lo mismo que un cliente siga activo a que no se vaya nunca?</a:t>
+            </a:r>
+          </a:p>
+        </p:txBody>
+      </p:sp>
+      <p:sp>
+        <p:nvSpPr>
+          <p:cNvPr id="4" name="TextBox 3"/>
+          <p:cNvSpPr txBox="1"/>
+          <p:nvPr/>
+        </p:nvSpPr>
+        <p:spPr>
+          <a:xfrm>
+            <a:off x="2011680" y="4754880"/>
+            <a:ext cx="8168640" cy="1280160"/>
+          </a:xfrm>
+          <a:prstGeom prst="rect">
+            <a:avLst/>
+          </a:prstGeom>
+          <a:noFill/>
+        </p:spPr>
+        <p:txBody>
+          <a:bodyPr wrap="square" anchor="t" lIns="0" rIns="0" tIns="0" bIns="0">
+            <a:spAutoFit/>
+          </a:bodyPr>
+          <a:lstStyle/>
+          <a:p>
+            <a:pPr algn="ctr"/>
+            <a:r>
+              <a:rPr sz="1500" b="0">
+                <a:solidFill>
+                  <a:srgbClr val="2D2D2D"/>
+                </a:solidFill>
+                <a:latin typeface="Calibri"/>
+              </a:rPr>
+              <a:t>Discusión en parejas (2 min): ¿qué información aporta un cliente que aún no ha cancelado, y por qué descartarlo sesga la retención?</a:t>
+            </a:r>
+          </a:p>
+        </p:txBody>
+      </p:sp>
+    </p:spTree>
+  </p:cSld>
+  <p:clrMapOvr>
+    <a:masterClrMapping/>
+  </p:clrMapOvr>
+</p:sld>
+</file>
+
+<file path=ppt/slides/slide7.xml><?xml version="1.0" encoding="utf-8"?>
 <p:sld xmlns:a="http://schemas.openxmlformats.org/drawingml/2006/main" xmlns:p="http://schemas.openxmlformats.org/presentationml/2006/main" xmlns:r="http://schemas.openxmlformats.org/officeDocument/2006/relationships">
   <p:cSld>
     <p:bg>
@@ -12209,7 +10827,7 @@
                 </a:solidFill>
                 <a:latin typeface="Calibri"/>
               </a:rPr>
-              <a:t>¿Qué son la censura, la supervivencia y el riesgo instantáneo?</a:t>
+              <a:t>Kaplan-Meier y log-rank</a:t>
             </a:r>
           </a:p>
         </p:txBody>
@@ -12244,154 +10862,14 @@
                 </a:solidFill>
                 <a:latin typeface="Calibri"/>
               </a:rPr>
-              <a:t>Capítulo 13.2 — jueves, bloques A1 y A2</a:t>
-            </a:r>
-          </a:p>
-        </p:txBody>
-      </p:sp>
-    </p:spTree>
-  </p:cSld>
-  <p:clrMapOvr>
-    <a:masterClrMapping/>
-  </p:clrMapOvr>
-</p:sld>
-</file>
-
-<file path=ppt/slides/slide7.xml><?xml version="1.0" encoding="utf-8"?>
-<p:sld xmlns:a="http://schemas.openxmlformats.org/drawingml/2006/main" xmlns:p="http://schemas.openxmlformats.org/presentationml/2006/main" xmlns:r="http://schemas.openxmlformats.org/officeDocument/2006/relationships">
-  <p:cSld>
-    <p:bg>
-      <p:bgPr>
-        <a:solidFill>
-          <a:srgbClr val="FFFFFF"/>
-        </a:solidFill>
-        <a:effectLst/>
-      </p:bgPr>
-    </p:bg>
-    <p:spTree>
-      <p:nvGrpSpPr>
-        <p:cNvPr id="1" name=""/>
-        <p:cNvGrpSpPr/>
-        <p:nvPr/>
-      </p:nvGrpSpPr>
-      <p:grpSpPr/>
-      <p:sp>
-        <p:nvSpPr>
-          <p:cNvPr id="2" name="TextBox 1"/>
-          <p:cNvSpPr txBox="1"/>
-          <p:nvPr/>
-        </p:nvSpPr>
-        <p:spPr>
-          <a:xfrm>
-            <a:off x="548640" y="411480"/>
-            <a:ext cx="11094720" cy="292608"/>
-          </a:xfrm>
-          <a:prstGeom prst="rect">
-            <a:avLst/>
-          </a:prstGeom>
-          <a:noFill/>
-        </p:spPr>
-        <p:txBody>
-          <a:bodyPr wrap="square" anchor="t" lIns="0" rIns="0" tIns="0" bIns="0">
-            <a:spAutoFit/>
-          </a:bodyPr>
-          <a:lstStyle/>
-          <a:p>
-            <a:pPr algn="l"/>
-            <a:r>
-              <a:rPr sz="1300" b="1">
-                <a:solidFill>
-                  <a:srgbClr val="9B1B30"/>
-                </a:solidFill>
-                <a:latin typeface="Calibri"/>
-              </a:rPr>
-              <a:t>DEFINICIONES — FUNDAMENTOS DE LA SESIÓN</a:t>
-            </a:r>
-          </a:p>
-        </p:txBody>
-      </p:sp>
-      <p:sp>
-        <p:nvSpPr>
-          <p:cNvPr id="3" name="TextBox 2"/>
-          <p:cNvSpPr txBox="1"/>
-          <p:nvPr/>
-        </p:nvSpPr>
-        <p:spPr>
-          <a:xfrm>
-            <a:off x="548640" y="731520"/>
-            <a:ext cx="11094720" cy="777240"/>
-          </a:xfrm>
-          <a:prstGeom prst="rect">
-            <a:avLst/>
-          </a:prstGeom>
-          <a:noFill/>
-        </p:spPr>
-        <p:txBody>
-          <a:bodyPr wrap="square" anchor="t" lIns="0" rIns="0" tIns="0" bIns="0">
-            <a:spAutoFit/>
-          </a:bodyPr>
-          <a:lstStyle/>
-          <a:p>
-            <a:pPr algn="l"/>
-            <a:r>
-              <a:rPr sz="4000" b="1">
-                <a:solidFill>
-                  <a:srgbClr val="2D2D2D"/>
-                </a:solidFill>
-                <a:latin typeface="Calibri"/>
-              </a:rPr>
-              <a:t>La censura es la razón de ser de la supervivencia</a:t>
-            </a:r>
-          </a:p>
-        </p:txBody>
-      </p:sp>
-      <p:sp>
-        <p:nvSpPr>
-          <p:cNvPr id="4" name="Oval 3"/>
-          <p:cNvSpPr/>
-          <p:nvPr/>
-        </p:nvSpPr>
-        <p:spPr>
-          <a:xfrm>
-            <a:off x="548640" y="2261616"/>
-            <a:ext cx="658368" cy="658368"/>
-          </a:xfrm>
-          <a:prstGeom prst="ellipse">
-            <a:avLst/>
-          </a:prstGeom>
-          <a:solidFill>
-            <a:srgbClr val="E4002B"/>
-          </a:solidFill>
-          <a:ln>
-            <a:noFill/>
-          </a:ln>
-          <a:effectLst/>
-        </p:spPr>
-        <p:style>
-          <a:lnRef idx="1">
-            <a:schemeClr val="accent1"/>
-          </a:lnRef>
-          <a:fillRef idx="3">
-            <a:schemeClr val="accent1"/>
-          </a:fillRef>
-          <a:effectRef idx="2">
-            <a:schemeClr val="accent1"/>
-          </a:effectRef>
-          <a:fontRef idx="minor">
-            <a:schemeClr val="lt1"/>
-          </a:fontRef>
-        </p:style>
-        <p:txBody>
-          <a:bodyPr rtlCol="0" anchor="ctr"/>
-          <a:lstStyle/>
-          <a:p>
-            <a:pPr algn="ctr"/>
+              <a:t>Estimar la curva de retención y comparar segmentos sin supuestos</a:t>
+            </a:r>
           </a:p>
         </p:txBody>
       </p:sp>
       <p:pic>
         <p:nvPicPr>
-          <p:cNvPr id="5" name="Picture 4" descr="clock__FFFFFF.png"/>
+          <p:cNvPr id="5" name="Picture 4" descr="chart-column__FFFFFF.png"/>
           <p:cNvPicPr>
             <a:picLocks noChangeAspect="1"/>
           </p:cNvPicPr>
@@ -12405,520 +10883,14 @@
         </p:blipFill>
         <p:spPr>
           <a:xfrm>
-            <a:off x="732983" y="2445959"/>
-            <a:ext cx="289682" cy="289682"/>
+            <a:off x="10195560" y="640080"/>
+            <a:ext cx="1051560" cy="1051560"/>
           </a:xfrm>
           <a:prstGeom prst="rect">
             <a:avLst/>
           </a:prstGeom>
         </p:spPr>
       </p:pic>
-      <p:sp>
-        <p:nvSpPr>
-          <p:cNvPr id="6" name="TextBox 5"/>
-          <p:cNvSpPr txBox="1"/>
-          <p:nvPr/>
-        </p:nvSpPr>
-        <p:spPr>
-          <a:xfrm>
-            <a:off x="1508760" y="1938528"/>
-            <a:ext cx="10134600" cy="411480"/>
-          </a:xfrm>
-          <a:prstGeom prst="rect">
-            <a:avLst/>
-          </a:prstGeom>
-          <a:noFill/>
-        </p:spPr>
-        <p:txBody>
-          <a:bodyPr wrap="square" anchor="t" lIns="0" rIns="0" tIns="0" bIns="0">
-            <a:spAutoFit/>
-          </a:bodyPr>
-          <a:lstStyle/>
-          <a:p>
-            <a:pPr algn="l"/>
-            <a:r>
-              <a:rPr sz="1800" b="1">
-                <a:solidFill>
-                  <a:srgbClr val="9B1B30"/>
-                </a:solidFill>
-                <a:latin typeface="Calibri"/>
-              </a:rPr>
-              <a:t>Dato censurado</a:t>
-            </a:r>
-          </a:p>
-        </p:txBody>
-      </p:sp>
-      <p:sp>
-        <p:nvSpPr>
-          <p:cNvPr id="7" name="TextBox 6"/>
-          <p:cNvSpPr txBox="1"/>
-          <p:nvPr/>
-        </p:nvSpPr>
-        <p:spPr>
-          <a:xfrm>
-            <a:off x="1508760" y="2395728"/>
-            <a:ext cx="10134600" cy="883920"/>
-          </a:xfrm>
-          <a:prstGeom prst="rect">
-            <a:avLst/>
-          </a:prstGeom>
-          <a:noFill/>
-        </p:spPr>
-        <p:txBody>
-          <a:bodyPr wrap="square" anchor="t" lIns="0" rIns="0" tIns="0" bIns="0">
-            <a:spAutoFit/>
-          </a:bodyPr>
-          <a:lstStyle/>
-          <a:p>
-            <a:pPr algn="l">
-              <a:lnSpc>
-                <a:spcPct val="110000"/>
-              </a:lnSpc>
-            </a:pPr>
-            <a:r>
-              <a:rPr sz="1400" b="0">
-                <a:solidFill>
-                  <a:srgbClr val="2D2D2D"/>
-                </a:solidFill>
-                <a:latin typeface="Calibri"/>
-              </a:rPr>
-              <a:t>El evento aún no ocurrió al cerrar el estudio: solo se sabe que el tiempo real es mayor. Descartarlo o fijarlo sesga.</a:t>
-            </a:r>
-          </a:p>
-        </p:txBody>
-      </p:sp>
-      <p:sp>
-        <p:nvSpPr>
-          <p:cNvPr id="8" name="Oval 7"/>
-          <p:cNvSpPr/>
-          <p:nvPr/>
-        </p:nvSpPr>
-        <p:spPr>
-          <a:xfrm>
-            <a:off x="548640" y="3785616"/>
-            <a:ext cx="658368" cy="658368"/>
-          </a:xfrm>
-          <a:prstGeom prst="ellipse">
-            <a:avLst/>
-          </a:prstGeom>
-          <a:solidFill>
-            <a:srgbClr val="E4002B"/>
-          </a:solidFill>
-          <a:ln>
-            <a:noFill/>
-          </a:ln>
-          <a:effectLst/>
-        </p:spPr>
-        <p:style>
-          <a:lnRef idx="1">
-            <a:schemeClr val="accent1"/>
-          </a:lnRef>
-          <a:fillRef idx="3">
-            <a:schemeClr val="accent1"/>
-          </a:fillRef>
-          <a:effectRef idx="2">
-            <a:schemeClr val="accent1"/>
-          </a:effectRef>
-          <a:fontRef idx="minor">
-            <a:schemeClr val="lt1"/>
-          </a:fontRef>
-        </p:style>
-        <p:txBody>
-          <a:bodyPr rtlCol="0" anchor="ctr"/>
-          <a:lstStyle/>
-          <a:p>
-            <a:pPr algn="ctr"/>
-          </a:p>
-        </p:txBody>
-      </p:sp>
-      <p:pic>
-        <p:nvPicPr>
-          <p:cNvPr id="9" name="Picture 8" descr="chart-column__FFFFFF.png"/>
-          <p:cNvPicPr>
-            <a:picLocks noChangeAspect="1"/>
-          </p:cNvPicPr>
-          <p:nvPr/>
-        </p:nvPicPr>
-        <p:blipFill>
-          <a:blip r:embed="rId3"/>
-          <a:stretch>
-            <a:fillRect/>
-          </a:stretch>
-        </p:blipFill>
-        <p:spPr>
-          <a:xfrm>
-            <a:off x="732983" y="3969959"/>
-            <a:ext cx="289682" cy="289682"/>
-          </a:xfrm>
-          <a:prstGeom prst="rect">
-            <a:avLst/>
-          </a:prstGeom>
-        </p:spPr>
-      </p:pic>
-      <p:sp>
-        <p:nvSpPr>
-          <p:cNvPr id="10" name="TextBox 9"/>
-          <p:cNvSpPr txBox="1"/>
-          <p:nvPr/>
-        </p:nvSpPr>
-        <p:spPr>
-          <a:xfrm>
-            <a:off x="1508760" y="3462528"/>
-            <a:ext cx="10134600" cy="411480"/>
-          </a:xfrm>
-          <a:prstGeom prst="rect">
-            <a:avLst/>
-          </a:prstGeom>
-          <a:noFill/>
-        </p:spPr>
-        <p:txBody>
-          <a:bodyPr wrap="square" anchor="t" lIns="0" rIns="0" tIns="0" bIns="0">
-            <a:spAutoFit/>
-          </a:bodyPr>
-          <a:lstStyle/>
-          <a:p>
-            <a:pPr algn="l"/>
-            <a:r>
-              <a:rPr sz="1800" b="1">
-                <a:solidFill>
-                  <a:srgbClr val="9B1B30"/>
-                </a:solidFill>
-                <a:latin typeface="Calibri"/>
-              </a:rPr>
-              <a:t>Función de supervivencia S(t)</a:t>
-            </a:r>
-          </a:p>
-        </p:txBody>
-      </p:sp>
-      <p:sp>
-        <p:nvSpPr>
-          <p:cNvPr id="11" name="TextBox 10"/>
-          <p:cNvSpPr txBox="1"/>
-          <p:nvPr/>
-        </p:nvSpPr>
-        <p:spPr>
-          <a:xfrm>
-            <a:off x="1508760" y="3919728"/>
-            <a:ext cx="10134600" cy="883920"/>
-          </a:xfrm>
-          <a:prstGeom prst="rect">
-            <a:avLst/>
-          </a:prstGeom>
-          <a:noFill/>
-        </p:spPr>
-        <p:txBody>
-          <a:bodyPr wrap="square" anchor="t" lIns="0" rIns="0" tIns="0" bIns="0">
-            <a:spAutoFit/>
-          </a:bodyPr>
-          <a:lstStyle/>
-          <a:p>
-            <a:pPr algn="l">
-              <a:lnSpc>
-                <a:spcPct val="110000"/>
-              </a:lnSpc>
-            </a:pPr>
-            <a:r>
-              <a:rPr sz="1400" b="0">
-                <a:solidFill>
-                  <a:srgbClr val="2D2D2D"/>
-                </a:solidFill>
-                <a:latin typeface="Calibri"/>
-              </a:rPr>
-              <a:t>Probabilidad de seguir sin el evento pasado t. Es la curva de retención: S(12 meses) = clientes activos al año.</a:t>
-            </a:r>
-          </a:p>
-        </p:txBody>
-      </p:sp>
-      <p:sp>
-        <p:nvSpPr>
-          <p:cNvPr id="12" name="Oval 11"/>
-          <p:cNvSpPr/>
-          <p:nvPr/>
-        </p:nvSpPr>
-        <p:spPr>
-          <a:xfrm>
-            <a:off x="548640" y="5309616"/>
-            <a:ext cx="658368" cy="658368"/>
-          </a:xfrm>
-          <a:prstGeom prst="ellipse">
-            <a:avLst/>
-          </a:prstGeom>
-          <a:solidFill>
-            <a:srgbClr val="E4002B"/>
-          </a:solidFill>
-          <a:ln>
-            <a:noFill/>
-          </a:ln>
-          <a:effectLst/>
-        </p:spPr>
-        <p:style>
-          <a:lnRef idx="1">
-            <a:schemeClr val="accent1"/>
-          </a:lnRef>
-          <a:fillRef idx="3">
-            <a:schemeClr val="accent1"/>
-          </a:fillRef>
-          <a:effectRef idx="2">
-            <a:schemeClr val="accent1"/>
-          </a:effectRef>
-          <a:fontRef idx="minor">
-            <a:schemeClr val="lt1"/>
-          </a:fontRef>
-        </p:style>
-        <p:txBody>
-          <a:bodyPr rtlCol="0" anchor="ctr"/>
-          <a:lstStyle/>
-          <a:p>
-            <a:pPr algn="ctr"/>
-          </a:p>
-        </p:txBody>
-      </p:sp>
-      <p:pic>
-        <p:nvPicPr>
-          <p:cNvPr id="13" name="Picture 12" descr="triangle-alert__FFFFFF.png"/>
-          <p:cNvPicPr>
-            <a:picLocks noChangeAspect="1"/>
-          </p:cNvPicPr>
-          <p:nvPr/>
-        </p:nvPicPr>
-        <p:blipFill>
-          <a:blip r:embed="rId4"/>
-          <a:stretch>
-            <a:fillRect/>
-          </a:stretch>
-        </p:blipFill>
-        <p:spPr>
-          <a:xfrm>
-            <a:off x="732983" y="5493959"/>
-            <a:ext cx="289682" cy="289682"/>
-          </a:xfrm>
-          <a:prstGeom prst="rect">
-            <a:avLst/>
-          </a:prstGeom>
-        </p:spPr>
-      </p:pic>
-      <p:sp>
-        <p:nvSpPr>
-          <p:cNvPr id="14" name="TextBox 13"/>
-          <p:cNvSpPr txBox="1"/>
-          <p:nvPr/>
-        </p:nvSpPr>
-        <p:spPr>
-          <a:xfrm>
-            <a:off x="1508760" y="4986528"/>
-            <a:ext cx="10134600" cy="411480"/>
-          </a:xfrm>
-          <a:prstGeom prst="rect">
-            <a:avLst/>
-          </a:prstGeom>
-          <a:noFill/>
-        </p:spPr>
-        <p:txBody>
-          <a:bodyPr wrap="square" anchor="t" lIns="0" rIns="0" tIns="0" bIns="0">
-            <a:spAutoFit/>
-          </a:bodyPr>
-          <a:lstStyle/>
-          <a:p>
-            <a:pPr algn="l"/>
-            <a:r>
-              <a:rPr sz="1800" b="1">
-                <a:solidFill>
-                  <a:srgbClr val="9B1B30"/>
-                </a:solidFill>
-                <a:latin typeface="Calibri"/>
-              </a:rPr>
-              <a:t>Riesgo o hazard h(t)</a:t>
-            </a:r>
-          </a:p>
-        </p:txBody>
-      </p:sp>
-      <p:sp>
-        <p:nvSpPr>
-          <p:cNvPr id="15" name="TextBox 14"/>
-          <p:cNvSpPr txBox="1"/>
-          <p:nvPr/>
-        </p:nvSpPr>
-        <p:spPr>
-          <a:xfrm>
-            <a:off x="1508760" y="5443728"/>
-            <a:ext cx="10134600" cy="883920"/>
-          </a:xfrm>
-          <a:prstGeom prst="rect">
-            <a:avLst/>
-          </a:prstGeom>
-          <a:noFill/>
-        </p:spPr>
-        <p:txBody>
-          <a:bodyPr wrap="square" anchor="t" lIns="0" rIns="0" tIns="0" bIns="0">
-            <a:spAutoFit/>
-          </a:bodyPr>
-          <a:lstStyle/>
-          <a:p>
-            <a:pPr algn="l">
-              <a:lnSpc>
-                <a:spcPct val="110000"/>
-              </a:lnSpc>
-            </a:pPr>
-            <a:r>
-              <a:rPr sz="1400" b="0">
-                <a:solidFill>
-                  <a:srgbClr val="2D2D2D"/>
-                </a:solidFill>
-                <a:latin typeface="Calibri"/>
-              </a:rPr>
-              <a:t>Tasa instantánea del evento en t, dado que se sobrevivió hasta t. Dice cuándo es más peligroso perder al cliente.</a:t>
-            </a:r>
-          </a:p>
-        </p:txBody>
-      </p:sp>
-      <p:sp>
-        <p:nvSpPr>
-          <p:cNvPr id="16" name="TextBox 15"/>
-          <p:cNvSpPr txBox="1"/>
-          <p:nvPr/>
-        </p:nvSpPr>
-        <p:spPr>
-          <a:xfrm>
-            <a:off x="548640" y="5870448"/>
-            <a:ext cx="11064240" cy="320040"/>
-          </a:xfrm>
-          <a:prstGeom prst="rect">
-            <a:avLst/>
-          </a:prstGeom>
-          <a:noFill/>
-        </p:spPr>
-        <p:txBody>
-          <a:bodyPr wrap="square">
-            <a:spAutoFit/>
-          </a:bodyPr>
-          <a:lstStyle/>
-          <a:p>
-            <a:r>
-              <a:rPr sz="1000">
-                <a:solidFill>
-                  <a:srgbClr val="6E6E6E"/>
-                </a:solidFill>
-                <a:latin typeface="Calibri"/>
-              </a:rPr>
-              <a:t>DEFINICIONES puntos 1, 3, 4, Kaplan-Meier (1958), JASA 53(282); Cox (1972), JRSS-B 34(2). La regresión (S09) responde «si», no «cuándo».</a:t>
-            </a:r>
-          </a:p>
-        </p:txBody>
-      </p:sp>
-      <p:sp>
-        <p:nvSpPr>
-          <p:cNvPr id="17" name="Oval 16"/>
-          <p:cNvSpPr/>
-          <p:nvPr/>
-        </p:nvSpPr>
-        <p:spPr>
-          <a:xfrm>
-            <a:off x="548640" y="6473952"/>
-            <a:ext cx="100584" cy="100584"/>
-          </a:xfrm>
-          <a:prstGeom prst="ellipse">
-            <a:avLst/>
-          </a:prstGeom>
-          <a:solidFill>
-            <a:srgbClr val="E4002B"/>
-          </a:solidFill>
-          <a:ln>
-            <a:noFill/>
-          </a:ln>
-          <a:effectLst/>
-        </p:spPr>
-        <p:style>
-          <a:lnRef idx="1">
-            <a:schemeClr val="accent1"/>
-          </a:lnRef>
-          <a:fillRef idx="3">
-            <a:schemeClr val="accent1"/>
-          </a:fillRef>
-          <a:effectRef idx="2">
-            <a:schemeClr val="accent1"/>
-          </a:effectRef>
-          <a:fontRef idx="minor">
-            <a:schemeClr val="lt1"/>
-          </a:fontRef>
-        </p:style>
-        <p:txBody>
-          <a:bodyPr rtlCol="0" anchor="ctr"/>
-          <a:lstStyle/>
-          <a:p>
-            <a:pPr algn="ctr"/>
-          </a:p>
-        </p:txBody>
-      </p:sp>
-      <p:sp>
-        <p:nvSpPr>
-          <p:cNvPr id="18" name="TextBox 17"/>
-          <p:cNvSpPr txBox="1"/>
-          <p:nvPr/>
-        </p:nvSpPr>
-        <p:spPr>
-          <a:xfrm>
-            <a:off x="749808" y="6437376"/>
-            <a:ext cx="7772400" cy="274320"/>
-          </a:xfrm>
-          <a:prstGeom prst="rect">
-            <a:avLst/>
-          </a:prstGeom>
-          <a:noFill/>
-        </p:spPr>
-        <p:txBody>
-          <a:bodyPr wrap="square" anchor="t" lIns="0" rIns="0" tIns="0" bIns="0">
-            <a:spAutoFit/>
-          </a:bodyPr>
-          <a:lstStyle/>
-          <a:p>
-            <a:pPr algn="l"/>
-            <a:r>
-              <a:rPr sz="900" b="0">
-                <a:solidFill>
-                  <a:srgbClr val="6E6E6E"/>
-                </a:solidFill>
-                <a:latin typeface="Calibri"/>
-              </a:rPr>
-              <a:t>S13 — Herramientas para la Ciencia de Datos, UPC</a:t>
-            </a:r>
-          </a:p>
-        </p:txBody>
-      </p:sp>
-      <p:sp>
-        <p:nvSpPr>
-          <p:cNvPr id="19" name="TextBox 18"/>
-          <p:cNvSpPr txBox="1"/>
-          <p:nvPr/>
-        </p:nvSpPr>
-        <p:spPr>
-          <a:xfrm>
-            <a:off x="10180320" y="6437376"/>
-            <a:ext cx="1463040" cy="274320"/>
-          </a:xfrm>
-          <a:prstGeom prst="rect">
-            <a:avLst/>
-          </a:prstGeom>
-          <a:noFill/>
-        </p:spPr>
-        <p:txBody>
-          <a:bodyPr wrap="square" anchor="t" lIns="0" rIns="0" tIns="0" bIns="0">
-            <a:spAutoFit/>
-          </a:bodyPr>
-          <a:lstStyle/>
-          <a:p>
-            <a:pPr algn="r"/>
-            <a:r>
-              <a:rPr sz="900" b="0">
-                <a:solidFill>
-                  <a:srgbClr val="6E6E6E"/>
-                </a:solidFill>
-                <a:latin typeface="Calibri"/>
-              </a:rPr>
-              <a:t>7 / 23</a:t>
-            </a:r>
-          </a:p>
-        </p:txBody>
-      </p:sp>
     </p:spTree>
   </p:cSld>
   <p:clrMapOvr>
@@ -12933,7 +10905,7 @@
     <p:bg>
       <p:bgPr>
         <a:solidFill>
-          <a:srgbClr val="FCEDEE"/>
+          <a:srgbClr val="2D2D2D"/>
         </a:solidFill>
         <a:effectLst/>
       </p:bgPr>
@@ -12953,8 +10925,8 @@
         </p:nvSpPr>
         <p:spPr>
           <a:xfrm>
-            <a:off x="5593080" y="914400"/>
-            <a:ext cx="1005840" cy="1005840"/>
+            <a:off x="5638800" y="914400"/>
+            <a:ext cx="914400" cy="914400"/>
           </a:xfrm>
           <a:prstGeom prst="ellipse">
             <a:avLst/>
@@ -12987,13 +10959,13 @@
           <a:p>
             <a:pPr algn="ctr"/>
             <a:r>
-              <a:rPr sz="4400" b="1">
+              <a:rPr sz="4800" b="1">
                 <a:solidFill>
                   <a:srgbClr val="FFFFFF"/>
                 </a:solidFill>
                 <a:latin typeface="Calibri"/>
               </a:rPr>
-              <a:t>?</a:t>
+              <a:t>“</a:t>
             </a:r>
           </a:p>
         </p:txBody>
@@ -13006,8 +10978,8 @@
         </p:nvSpPr>
         <p:spPr>
           <a:xfrm>
-            <a:off x="1371600" y="2468880"/>
-            <a:ext cx="9448800" cy="2011680"/>
+            <a:off x="1645920" y="2377440"/>
+            <a:ext cx="8900160" cy="2377440"/>
           </a:xfrm>
           <a:prstGeom prst="rect">
             <a:avLst/>
@@ -13020,15 +10992,19 @@
           </a:bodyPr>
           <a:lstStyle/>
           <a:p>
-            <a:pPr algn="ctr"/>
-            <a:r>
-              <a:rPr sz="3200" b="1">
-                <a:solidFill>
-                  <a:srgbClr val="9B1B30"/>
-                </a:solidFill>
-                <a:latin typeface="Calibri"/>
-              </a:rPr>
-              <a:t>¿Es lo mismo que un cliente siga activo a que no se vaya nunca?</a:t>
+            <a:pPr algn="ctr">
+              <a:lnSpc>
+                <a:spcPct val="125000"/>
+              </a:lnSpc>
+            </a:pPr>
+            <a:r>
+              <a:rPr sz="2600" b="0">
+                <a:solidFill>
+                  <a:srgbClr val="FFFFFF"/>
+                </a:solidFill>
+                <a:latin typeface="Calibri"/>
+              </a:rPr>
+              <a:t>En pruebas de vida, seguimiento médico y otros campos, la observación del momento en que ocurre el evento de interés (llamado muerte) puede quedar impedida, para algunos elementos de la muestra, por la ocurrencia previa de otro evento (llamado pérdida).</a:t>
             </a:r>
           </a:p>
         </p:txBody>
@@ -13041,8 +11017,8 @@
         </p:nvSpPr>
         <p:spPr>
           <a:xfrm>
-            <a:off x="2011680" y="4754880"/>
-            <a:ext cx="8168640" cy="1280160"/>
+            <a:off x="1645920" y="5120640"/>
+            <a:ext cx="8900160" cy="548640"/>
           </a:xfrm>
           <a:prstGeom prst="rect">
             <a:avLst/>
@@ -13059,11 +11035,11 @@
             <a:r>
               <a:rPr sz="1500" b="0">
                 <a:solidFill>
-                  <a:srgbClr val="2D2D2D"/>
-                </a:solidFill>
-                <a:latin typeface="Calibri"/>
-              </a:rPr>
-              <a:t>Discusión en parejas (2 min): ¿qué información aporta un cliente que aún no ha cancelado, y por qué descartarlo sesga la retención?</a:t>
+                  <a:srgbClr val="FCEDEE"/>
+                </a:solidFill>
+                <a:latin typeface="Calibri"/>
+              </a:rPr>
+              <a:t>— Kaplan y Meier, 1958 — primera línea del resumen (p. 457)</a:t>
             </a:r>
           </a:p>
         </p:txBody>
@@ -13124,7 +11100,7 @@
                 </a:solidFill>
                 <a:latin typeface="Calibri"/>
               </a:rPr>
-              <a:t>CAPÍTULO 13.2 — ¿QUÉ SON LA CENSURA, LA SUPERVIVENCIA Y EL RIESGO?</a:t>
+              <a:t>QUÉ PREGUNTABAN LOS PAPERS Y POR QUÉ USARON LO QUE USARON</a:t>
             </a:r>
           </a:p>
         </p:txBody>
@@ -13159,7 +11135,7 @@
                 </a:solidFill>
                 <a:latin typeface="Calibri"/>
               </a:rPr>
-              <a:t>Tres objetos distintos que la clase suele confundir</a:t>
+              <a:t>Tres decisiones, cada una con su alternativa descartada</a:t>
             </a:r>
           </a:p>
         </p:txBody>
@@ -13291,7 +11267,7 @@
                 </a:solidFill>
                 <a:latin typeface="Calibri"/>
               </a:rPr>
-              <a:t>Censura</a:t>
+              <a:t>Por qué un producto y no una proporción</a:t>
             </a:r>
           </a:p>
         </p:txBody>
@@ -13330,7 +11306,7 @@
                 </a:solidFill>
                 <a:latin typeface="Calibri"/>
               </a:rPr>
-              <a:t>El seguimiento terminó antes que el desenlace. No es un dato perdido: es información parcial que sí se usa.</a:t>
+              <a:t>Con censura, el denominador cambia a cada instante: solo es local, la probabilidad de no fallar dado que se llegó vivo hasta ahí.</a:t>
             </a:r>
           </a:p>
         </p:txBody>
@@ -13365,7 +11341,7 @@
                 </a:solidFill>
                 <a:latin typeface="Calibri"/>
               </a:rPr>
-              <a:t>318 de 432 casos en Rossi</a:t>
+              <a:t>El censurado achica el riesgo, no baja el escalón</a:t>
             </a:r>
           </a:p>
         </p:txBody>
@@ -13497,7 +11473,7 @@
                 </a:solidFill>
                 <a:latin typeface="Calibri"/>
               </a:rPr>
-              <a:t>Supervivencia S(t)</a:t>
+              <a:t>Por qué el riesgo y no el tiempo</a:t>
             </a:r>
           </a:p>
         </p:txBody>
@@ -13536,7 +11512,7 @@
                 </a:solidFill>
                 <a:latin typeface="Calibri"/>
               </a:rPr>
-              <a:t>La probabilidad de seguir activo pasado el tiempo t. Responde «¿cuántos quedan?».</a:t>
+              <a:t>El hazard está CONDICIONADO a seguir vivo, justo lo que aporta un censurado. La forma de producto deja que cada atributo multiplique el riesgo.</a:t>
             </a:r>
           </a:p>
         </p:txBody>
@@ -13571,7 +11547,7 @@
                 </a:solidFill>
                 <a:latin typeface="Calibri"/>
               </a:rPr>
-              <a:t>Baja de forma escalonada</a:t>
+              <a:t>Postulado «provisionally»: un supuesto, no una verdad</a:t>
             </a:r>
           </a:p>
         </p:txBody>
@@ -13703,7 +11679,7 @@
                 </a:solidFill>
                 <a:latin typeface="Calibri"/>
               </a:rPr>
-              <a:t>Riesgo h(t)</a:t>
+              <a:t>Por qué el riesgo base queda libre</a:t>
             </a:r>
           </a:p>
         </p:txBody>
@@ -13742,7 +11718,7 @@
                 </a:solidFill>
                 <a:latin typeface="Calibri"/>
               </a:rPr>
-              <a:t>El riesgo instantáneo entre quienes siguen. Responde «¿cuál es el peligro ahora?».</a:t>
+              <a:t>Se gana no decidir la forma de la curva base, para la que casi nunca hay evidencia. Se paga que el efecto ya no puede depender del tiempo: riesgos proporcionales.</a:t>
             </a:r>
           </a:p>
         </p:txBody>
@@ -13777,14 +11753,48 @@
                 </a:solidFill>
                 <a:latin typeface="Calibri"/>
               </a:rPr>
-              <a:t>Puede subir mientras S(t) baja</a:t>
-            </a:r>
-          </a:p>
-        </p:txBody>
-      </p:sp>
-      <p:sp>
-        <p:nvSpPr>
-          <p:cNvPr id="19" name="Oval 18"/>
+              <a:t>La factura se cobra en el test de Schoenfeld</a:t>
+            </a:r>
+          </a:p>
+        </p:txBody>
+      </p:sp>
+      <p:sp>
+        <p:nvSpPr>
+          <p:cNvPr id="19" name="TextBox 18"/>
+          <p:cNvSpPr txBox="1"/>
+          <p:nvPr/>
+        </p:nvSpPr>
+        <p:spPr>
+          <a:xfrm>
+            <a:off x="548640" y="5870448"/>
+            <a:ext cx="11064240" cy="320040"/>
+          </a:xfrm>
+          <a:prstGeom prst="rect">
+            <a:avLst/>
+          </a:prstGeom>
+          <a:noFill/>
+        </p:spPr>
+        <p:txBody>
+          <a:bodyPr wrap="square">
+            <a:spAutoFit/>
+          </a:bodyPr>
+          <a:lstStyle/>
+          <a:p>
+            <a:r>
+              <a:rPr sz="1000">
+                <a:solidFill>
+                  <a:srgbClr val="6E6E6E"/>
+                </a:solidFill>
+                <a:latin typeface="Calibri"/>
+              </a:rPr>
+              <a:t>Decisiones documentadas en los originales: REPLICACION_PAPER Sección 0.3 (Kaplan y Meier 1958, pp. 457-458; Cox 1972 y su relato de 1986).</a:t>
+            </a:r>
+          </a:p>
+        </p:txBody>
+      </p:sp>
+      <p:sp>
+        <p:nvSpPr>
+          <p:cNvPr id="20" name="Oval 19"/>
           <p:cNvSpPr/>
           <p:nvPr/>
         </p:nvSpPr>
@@ -13828,7 +11838,7 @@
       </p:sp>
       <p:sp>
         <p:nvSpPr>
-          <p:cNvPr id="20" name="TextBox 19"/>
+          <p:cNvPr id="21" name="TextBox 20"/>
           <p:cNvSpPr txBox="1"/>
           <p:nvPr/>
         </p:nvSpPr>
@@ -13863,7 +11873,7 @@
       </p:sp>
       <p:sp>
         <p:nvSpPr>
-          <p:cNvPr id="21" name="TextBox 20"/>
+          <p:cNvPr id="22" name="TextBox 21"/>
           <p:cNvSpPr txBox="1"/>
           <p:nvPr/>
         </p:nvSpPr>
@@ -13891,7 +11901,7 @@
                 </a:solidFill>
                 <a:latin typeface="Calibri"/>
               </a:rPr>
-              <a:t>9 / 23</a:t>
+              <a:t>9 / 17</a:t>
             </a:r>
           </a:p>
         </p:txBody>
